--- a/compliance/research_presentation.pptx
+++ b/compliance/research_presentation.pptx
@@ -22,14 +22,16 @@
     <p:sldId id="267" r:id="rId17"/>
     <p:sldId id="268" r:id="rId18"/>
     <p:sldId id="269" r:id="rId19"/>
+    <p:sldId id="270" r:id="rId20"/>
+    <p:sldId id="271" r:id="rId21"/>
   </p:sldIdLst>
   <p:sldSz cy="3244850" cx="5765800"/>
   <p:notesSz cx="5765800" cy="3244850"/>
   <p:embeddedFontLst>
     <p:embeddedFont>
       <p:font typeface="Tahoma"/>
-      <p:regular r:id="rId20"/>
-      <p:bold r:id="rId21"/>
+      <p:regular r:id="rId22"/>
+      <p:bold r:id="rId23"/>
     </p:embeddedFont>
   </p:embeddedFontLst>
   <p:defaultTextStyle>
@@ -923,7 +925,7 @@
       </p:grpSpPr>
       <p:sp>
         <p:nvSpPr>
-          <p:cNvPr id="347" name="Google Shape;347;p3:notes"/>
+          <p:cNvPr id="347" name="Google Shape;347;g3d86df6ee25_0_4:notes"/>
           <p:cNvSpPr txBox="1"/>
           <p:nvPr>
             <p:ph idx="1" type="body"/>
@@ -932,7 +934,7 @@
         <p:spPr>
           <a:xfrm>
             <a:off x="576575" y="1541300"/>
-            <a:ext cx="4612625" cy="1460175"/>
+            <a:ext cx="4612500" cy="1460100"/>
           </a:xfrm>
           <a:prstGeom prst="rect">
             <a:avLst/>
@@ -962,7 +964,7 @@
       </p:sp>
       <p:sp>
         <p:nvSpPr>
-          <p:cNvPr id="348" name="Google Shape;348;p3:notes"/>
+          <p:cNvPr id="348" name="Google Shape;348;g3d86df6ee25_0_4:notes"/>
           <p:cNvSpPr/>
           <p:nvPr>
             <p:ph idx="2" type="sldImg"/>
@@ -971,7 +973,7 @@
         <p:spPr>
           <a:xfrm>
             <a:off x="961150" y="243350"/>
-            <a:ext cx="3844050" cy="1216800"/>
+            <a:ext cx="3844200" cy="1216800"/>
           </a:xfrm>
           <a:custGeom>
             <a:rect b="b" l="l" r="r" t="t"/>
@@ -1008,7 +1010,7 @@
   <p:cSld>
     <p:spTree>
       <p:nvGrpSpPr>
-        <p:cNvPr id="376" name="Shape 376"/>
+        <p:cNvPr id="373" name="Shape 373"/>
         <p:cNvGrpSpPr/>
         <p:nvPr/>
       </p:nvGrpSpPr>
@@ -1022,7 +1024,7 @@
       </p:grpSpPr>
       <p:sp>
         <p:nvSpPr>
-          <p:cNvPr id="377" name="Google Shape;377;p12:notes"/>
+          <p:cNvPr id="374" name="Google Shape;374;p3:notes"/>
           <p:cNvSpPr txBox="1"/>
           <p:nvPr>
             <p:ph idx="1" type="body"/>
@@ -1061,7 +1063,7 @@
       </p:sp>
       <p:sp>
         <p:nvSpPr>
-          <p:cNvPr id="378" name="Google Shape;378;p12:notes"/>
+          <p:cNvPr id="375" name="Google Shape;375;p3:notes"/>
           <p:cNvSpPr/>
           <p:nvPr>
             <p:ph idx="2" type="sldImg"/>
@@ -1107,7 +1109,7 @@
   <p:cSld>
     <p:spTree>
       <p:nvGrpSpPr>
-        <p:cNvPr id="401" name="Shape 401"/>
+        <p:cNvPr id="403" name="Shape 403"/>
         <p:cNvGrpSpPr/>
         <p:nvPr/>
       </p:nvGrpSpPr>
@@ -1121,7 +1123,7 @@
       </p:grpSpPr>
       <p:sp>
         <p:nvSpPr>
-          <p:cNvPr id="402" name="Google Shape;402;p17:notes"/>
+          <p:cNvPr id="404" name="Google Shape;404;p12:notes"/>
           <p:cNvSpPr txBox="1"/>
           <p:nvPr>
             <p:ph idx="1" type="body"/>
@@ -1160,7 +1162,7 @@
       </p:sp>
       <p:sp>
         <p:nvSpPr>
-          <p:cNvPr id="403" name="Google Shape;403;p17:notes"/>
+          <p:cNvPr id="405" name="Google Shape;405;p12:notes"/>
           <p:cNvSpPr/>
           <p:nvPr>
             <p:ph idx="2" type="sldImg"/>
@@ -1220,7 +1222,7 @@
       </p:grpSpPr>
       <p:sp>
         <p:nvSpPr>
-          <p:cNvPr id="431" name="Google Shape;431;p18:notes"/>
+          <p:cNvPr id="431" name="Google Shape;431;p17:notes"/>
           <p:cNvSpPr txBox="1"/>
           <p:nvPr>
             <p:ph idx="1" type="body"/>
@@ -1259,7 +1261,205 @@
       </p:sp>
       <p:sp>
         <p:nvSpPr>
-          <p:cNvPr id="432" name="Google Shape;432;p18:notes"/>
+          <p:cNvPr id="432" name="Google Shape;432;p17:notes"/>
+          <p:cNvSpPr/>
+          <p:nvPr>
+            <p:ph idx="2" type="sldImg"/>
+          </p:nvPr>
+        </p:nvSpPr>
+        <p:spPr>
+          <a:xfrm>
+            <a:off x="961150" y="243350"/>
+            <a:ext cx="3844050" cy="1216800"/>
+          </a:xfrm>
+          <a:custGeom>
+            <a:rect b="b" l="l" r="r" t="t"/>
+            <a:pathLst>
+              <a:path extrusionOk="0" h="120000" w="120000">
+                <a:moveTo>
+                  <a:pt x="0" y="0"/>
+                </a:moveTo>
+                <a:lnTo>
+                  <a:pt x="120000" y="0"/>
+                </a:lnTo>
+                <a:lnTo>
+                  <a:pt x="120000" y="120000"/>
+                </a:lnTo>
+                <a:lnTo>
+                  <a:pt x="0" y="120000"/>
+                </a:lnTo>
+                <a:close/>
+              </a:path>
+            </a:pathLst>
+          </a:custGeom>
+        </p:spPr>
+      </p:sp>
+    </p:spTree>
+  </p:cSld>
+  <p:clrMapOvr>
+    <a:masterClrMapping/>
+  </p:clrMapOvr>
+</p:notes>
+</file>
+
+<file path=ppt/notesSlides/notesSlide15.xml><?xml version="1.0" encoding="utf-8"?>
+<p:notes xmlns:a="http://schemas.openxmlformats.org/drawingml/2006/main" xmlns:r="http://schemas.openxmlformats.org/officeDocument/2006/relationships" xmlns:mc="http://schemas.openxmlformats.org/markup-compatibility/2006" xmlns:mv="urn:schemas-microsoft-com:mac:vml" xmlns:p="http://schemas.openxmlformats.org/presentationml/2006/main" xmlns:c="http://schemas.openxmlformats.org/drawingml/2006/chart" xmlns:dgm="http://schemas.openxmlformats.org/drawingml/2006/diagram" xmlns:o="urn:schemas-microsoft-com:office:office" xmlns:v="urn:schemas-microsoft-com:vml" xmlns:pvml="urn:schemas-microsoft-com:office:powerpoint" xmlns:com="http://schemas.openxmlformats.org/drawingml/2006/compatibility" xmlns:p14="http://schemas.microsoft.com/office/powerpoint/2010/main" xmlns:p15="http://schemas.microsoft.com/office/powerpoint/2012/main" xmlns:ahyp="http://schemas.microsoft.com/office/drawing/2018/hyperlinkcolor" showMasterPhAnim="0" showMasterSp="0">
+  <p:cSld>
+    <p:spTree>
+      <p:nvGrpSpPr>
+        <p:cNvPr id="460" name="Shape 460"/>
+        <p:cNvGrpSpPr/>
+        <p:nvPr/>
+      </p:nvGrpSpPr>
+      <p:grpSpPr>
+        <a:xfrm>
+          <a:off x="0" y="0"/>
+          <a:ext cx="0" cy="0"/>
+          <a:chOff x="0" y="0"/>
+          <a:chExt cx="0" cy="0"/>
+        </a:xfrm>
+      </p:grpSpPr>
+      <p:sp>
+        <p:nvSpPr>
+          <p:cNvPr id="461" name="Google Shape;461;g3d86df6ee25_0_32:notes"/>
+          <p:cNvSpPr txBox="1"/>
+          <p:nvPr>
+            <p:ph idx="1" type="body"/>
+          </p:nvPr>
+        </p:nvSpPr>
+        <p:spPr>
+          <a:xfrm>
+            <a:off x="576575" y="1541300"/>
+            <a:ext cx="4612500" cy="1460100"/>
+          </a:xfrm>
+          <a:prstGeom prst="rect">
+            <a:avLst/>
+          </a:prstGeom>
+        </p:spPr>
+        <p:txBody>
+          <a:bodyPr anchorCtr="0" anchor="t" bIns="91425" lIns="91425" spcFirstLastPara="1" rIns="91425" wrap="square" tIns="91425">
+            <a:noAutofit/>
+          </a:bodyPr>
+          <a:lstStyle/>
+          <a:p>
+            <a:pPr indent="0" lvl="0" marL="0" rtl="0" algn="l">
+              <a:spcBef>
+                <a:spcPts val="0"/>
+              </a:spcBef>
+              <a:spcAft>
+                <a:spcPts val="0"/>
+              </a:spcAft>
+              <a:buNone/>
+            </a:pPr>
+            <a:r>
+              <a:t/>
+            </a:r>
+            <a:endParaRPr/>
+          </a:p>
+        </p:txBody>
+      </p:sp>
+      <p:sp>
+        <p:nvSpPr>
+          <p:cNvPr id="462" name="Google Shape;462;g3d86df6ee25_0_32:notes"/>
+          <p:cNvSpPr/>
+          <p:nvPr>
+            <p:ph idx="2" type="sldImg"/>
+          </p:nvPr>
+        </p:nvSpPr>
+        <p:spPr>
+          <a:xfrm>
+            <a:off x="961150" y="243350"/>
+            <a:ext cx="3844200" cy="1216800"/>
+          </a:xfrm>
+          <a:custGeom>
+            <a:rect b="b" l="l" r="r" t="t"/>
+            <a:pathLst>
+              <a:path extrusionOk="0" h="120000" w="120000">
+                <a:moveTo>
+                  <a:pt x="0" y="0"/>
+                </a:moveTo>
+                <a:lnTo>
+                  <a:pt x="120000" y="0"/>
+                </a:lnTo>
+                <a:lnTo>
+                  <a:pt x="120000" y="120000"/>
+                </a:lnTo>
+                <a:lnTo>
+                  <a:pt x="0" y="120000"/>
+                </a:lnTo>
+                <a:close/>
+              </a:path>
+            </a:pathLst>
+          </a:custGeom>
+        </p:spPr>
+      </p:sp>
+    </p:spTree>
+  </p:cSld>
+  <p:clrMapOvr>
+    <a:masterClrMapping/>
+  </p:clrMapOvr>
+</p:notes>
+</file>
+
+<file path=ppt/notesSlides/notesSlide16.xml><?xml version="1.0" encoding="utf-8"?>
+<p:notes xmlns:a="http://schemas.openxmlformats.org/drawingml/2006/main" xmlns:r="http://schemas.openxmlformats.org/officeDocument/2006/relationships" xmlns:mc="http://schemas.openxmlformats.org/markup-compatibility/2006" xmlns:mv="urn:schemas-microsoft-com:mac:vml" xmlns:p="http://schemas.openxmlformats.org/presentationml/2006/main" xmlns:c="http://schemas.openxmlformats.org/drawingml/2006/chart" xmlns:dgm="http://schemas.openxmlformats.org/drawingml/2006/diagram" xmlns:o="urn:schemas-microsoft-com:office:office" xmlns:v="urn:schemas-microsoft-com:vml" xmlns:pvml="urn:schemas-microsoft-com:office:powerpoint" xmlns:com="http://schemas.openxmlformats.org/drawingml/2006/compatibility" xmlns:p14="http://schemas.microsoft.com/office/powerpoint/2010/main" xmlns:p15="http://schemas.microsoft.com/office/powerpoint/2012/main" xmlns:ahyp="http://schemas.microsoft.com/office/drawing/2018/hyperlinkcolor" showMasterPhAnim="0" showMasterSp="0">
+  <p:cSld>
+    <p:spTree>
+      <p:nvGrpSpPr>
+        <p:cNvPr id="491" name="Shape 491"/>
+        <p:cNvGrpSpPr/>
+        <p:nvPr/>
+      </p:nvGrpSpPr>
+      <p:grpSpPr>
+        <a:xfrm>
+          <a:off x="0" y="0"/>
+          <a:ext cx="0" cy="0"/>
+          <a:chOff x="0" y="0"/>
+          <a:chExt cx="0" cy="0"/>
+        </a:xfrm>
+      </p:grpSpPr>
+      <p:sp>
+        <p:nvSpPr>
+          <p:cNvPr id="492" name="Google Shape;492;p18:notes"/>
+          <p:cNvSpPr txBox="1"/>
+          <p:nvPr>
+            <p:ph idx="1" type="body"/>
+          </p:nvPr>
+        </p:nvSpPr>
+        <p:spPr>
+          <a:xfrm>
+            <a:off x="576575" y="1541300"/>
+            <a:ext cx="4612625" cy="1460175"/>
+          </a:xfrm>
+          <a:prstGeom prst="rect">
+            <a:avLst/>
+          </a:prstGeom>
+        </p:spPr>
+        <p:txBody>
+          <a:bodyPr anchorCtr="0" anchor="t" bIns="91425" lIns="91425" spcFirstLastPara="1" rIns="91425" wrap="square" tIns="91425">
+            <a:noAutofit/>
+          </a:bodyPr>
+          <a:lstStyle/>
+          <a:p>
+            <a:pPr indent="0" lvl="0" marL="0" rtl="0" algn="l">
+              <a:spcBef>
+                <a:spcPts val="0"/>
+              </a:spcBef>
+              <a:spcAft>
+                <a:spcPts val="0"/>
+              </a:spcAft>
+              <a:buNone/>
+            </a:pPr>
+            <a:r>
+              <a:t/>
+            </a:r>
+            <a:endParaRPr/>
+          </a:p>
+        </p:txBody>
+      </p:sp>
+      <p:sp>
+        <p:nvSpPr>
+          <p:cNvPr id="493" name="Google Shape;493;p18:notes"/>
           <p:cNvSpPr/>
           <p:nvPr>
             <p:ph idx="2" type="sldImg"/>
@@ -9531,7 +9731,7 @@
                 <a:cs typeface="Tahoma"/>
                 <a:sym typeface="Tahoma"/>
               </a:rPr>
-              <a:t>Methods</a:t>
+              <a:t>Results</a:t>
             </a:r>
             <a:endParaRPr sz="1100">
               <a:latin typeface="Tahoma"/>
@@ -10703,14 +10903,12 @@
         <p:nvSpPr>
           <p:cNvPr id="350" name="Google Shape;350;p17"/>
           <p:cNvSpPr txBox="1"/>
-          <p:nvPr>
-            <p:ph type="title"/>
-          </p:nvPr>
+          <p:nvPr/>
         </p:nvSpPr>
         <p:spPr>
           <a:xfrm>
-            <a:off x="95300" y="72300"/>
-            <a:ext cx="1816200" cy="180900"/>
+            <a:off x="83477" y="3135783"/>
+            <a:ext cx="1752600" cy="92400"/>
           </a:xfrm>
           <a:prstGeom prst="rect">
             <a:avLst/>
@@ -10721,14 +10919,14 @@
           </a:ln>
         </p:spPr>
         <p:txBody>
-          <a:bodyPr anchorCtr="0" anchor="t" bIns="0" lIns="0" spcFirstLastPara="1" rIns="0" wrap="square" tIns="11425">
+          <a:bodyPr anchorCtr="0" anchor="t" bIns="0" lIns="0" spcFirstLastPara="1" rIns="0" wrap="square" tIns="0">
             <a:spAutoFit/>
           </a:bodyPr>
           <a:lstStyle/>
           <a:p>
             <a:pPr indent="0" lvl="0" marL="12700" rtl="0" algn="l">
               <a:lnSpc>
-                <a:spcPct val="100000"/>
+                <a:spcPct val="112500"/>
               </a:lnSpc>
               <a:spcBef>
                 <a:spcPts val="0"/>
@@ -10739,24 +10937,174 @@
               <a:buNone/>
             </a:pPr>
             <a:r>
-              <a:rPr lang="en-US">
+              <a:rPr lang="en-US" sz="600">
                 <a:solidFill>
-                  <a:srgbClr val="094183"/>
+                  <a:srgbClr val="F2F2F2"/>
                 </a:solidFill>
+                <a:latin typeface="Tahoma"/>
+                <a:ea typeface="Tahoma"/>
+                <a:cs typeface="Tahoma"/>
+                <a:sym typeface="Tahoma"/>
               </a:rPr>
-              <a:t>Coverage</a:t>
+              <a:t>Yi, Jiang, Tran, G´omez, Canning, Bloem &amp; Barrett</a:t>
             </a:r>
-            <a:endParaRPr>
-              <a:solidFill>
-                <a:srgbClr val="094183"/>
-              </a:solidFill>
+            <a:endParaRPr sz="600">
+              <a:latin typeface="Tahoma"/>
+              <a:ea typeface="Tahoma"/>
+              <a:cs typeface="Tahoma"/>
+              <a:sym typeface="Tahoma"/>
             </a:endParaRPr>
+          </a:p>
+        </p:txBody>
+      </p:sp>
+      <p:sp>
+        <p:nvSpPr>
+          <p:cNvPr id="351" name="Google Shape;351;p17"/>
+          <p:cNvSpPr txBox="1"/>
+          <p:nvPr>
+            <p:ph idx="11" type="ftr"/>
+          </p:nvPr>
+        </p:nvSpPr>
+        <p:spPr>
+          <a:xfrm>
+            <a:off x="2111768" y="3135783"/>
+            <a:ext cx="1536600" cy="92400"/>
+          </a:xfrm>
+          <a:prstGeom prst="rect">
+            <a:avLst/>
+          </a:prstGeom>
+          <a:noFill/>
+          <a:ln>
+            <a:noFill/>
+          </a:ln>
+        </p:spPr>
+        <p:txBody>
+          <a:bodyPr anchorCtr="0" anchor="t" bIns="0" lIns="0" spcFirstLastPara="1" rIns="0" wrap="square" tIns="0">
+            <a:spAutoFit/>
+          </a:bodyPr>
+          <a:lstStyle/>
+          <a:p>
+            <a:pPr indent="0" lvl="0" marL="12700" rtl="0" algn="l">
+              <a:lnSpc>
+                <a:spcPct val="112500"/>
+              </a:lnSpc>
+              <a:spcBef>
+                <a:spcPts val="0"/>
+              </a:spcBef>
+              <a:spcAft>
+                <a:spcPts val="0"/>
+              </a:spcAft>
+              <a:buNone/>
+            </a:pPr>
+            <a:r>
+              <a:rPr lang="en-US"/>
+              <a:t>Employment and Compensation within AVCs</a:t>
+            </a:r>
+            <a:endParaRPr/>
+          </a:p>
+        </p:txBody>
+      </p:sp>
+      <p:sp>
+        <p:nvSpPr>
+          <p:cNvPr id="352" name="Google Shape;352;p17"/>
+          <p:cNvSpPr txBox="1"/>
+          <p:nvPr>
+            <p:ph idx="10" type="dt"/>
+          </p:nvPr>
+        </p:nvSpPr>
+        <p:spPr>
+          <a:xfrm>
+            <a:off x="4472876" y="3135783"/>
+            <a:ext cx="426000" cy="92400"/>
+          </a:xfrm>
+          <a:prstGeom prst="rect">
+            <a:avLst/>
+          </a:prstGeom>
+          <a:noFill/>
+          <a:ln>
+            <a:noFill/>
+          </a:ln>
+        </p:spPr>
+        <p:txBody>
+          <a:bodyPr anchorCtr="0" anchor="t" bIns="0" lIns="0" spcFirstLastPara="1" rIns="0" wrap="square" tIns="0">
+            <a:spAutoFit/>
+          </a:bodyPr>
+          <a:lstStyle/>
+          <a:p>
+            <a:pPr indent="0" lvl="0" marL="12700" rtl="0" algn="l">
+              <a:lnSpc>
+                <a:spcPct val="112500"/>
+              </a:lnSpc>
+              <a:spcBef>
+                <a:spcPts val="0"/>
+              </a:spcBef>
+              <a:spcAft>
+                <a:spcPts val="0"/>
+              </a:spcAft>
+              <a:buNone/>
+            </a:pPr>
+            <a:r>
+              <a:rPr lang="en-US"/>
+              <a:t>March 2025</a:t>
+            </a:r>
+            <a:endParaRPr/>
+          </a:p>
+        </p:txBody>
+      </p:sp>
+      <p:sp>
+        <p:nvSpPr>
+          <p:cNvPr id="353" name="Google Shape;353;p17"/>
+          <p:cNvSpPr txBox="1"/>
+          <p:nvPr>
+            <p:ph idx="12" type="sldNum"/>
+          </p:nvPr>
+        </p:nvSpPr>
+        <p:spPr>
+          <a:xfrm>
+            <a:off x="5451184" y="3135783"/>
+            <a:ext cx="254100" cy="92400"/>
+          </a:xfrm>
+          <a:prstGeom prst="rect">
+            <a:avLst/>
+          </a:prstGeom>
+          <a:noFill/>
+          <a:ln>
+            <a:noFill/>
+          </a:ln>
+        </p:spPr>
+        <p:txBody>
+          <a:bodyPr anchorCtr="0" anchor="t" bIns="0" lIns="0" spcFirstLastPara="1" rIns="0" wrap="square" tIns="0">
+            <a:spAutoFit/>
+          </a:bodyPr>
+          <a:lstStyle/>
+          <a:p>
+            <a:pPr indent="0" lvl="0" marL="12700" rtl="0" algn="l">
+              <a:lnSpc>
+                <a:spcPct val="112500"/>
+              </a:lnSpc>
+              <a:spcBef>
+                <a:spcPts val="0"/>
+              </a:spcBef>
+              <a:spcAft>
+                <a:spcPts val="0"/>
+              </a:spcAft>
+              <a:buNone/>
+            </a:pPr>
+            <a:fld id="{00000000-1234-1234-1234-123412341234}" type="slidenum">
+              <a:rPr lang="en-US"/>
+              <a:t>‹#›</a:t>
+            </a:fld>
+            <a:r>
+              <a:rPr lang="en-US"/>
+              <a:t> / 18</a:t>
+            </a:r>
+            <a:endParaRPr/>
           </a:p>
         </p:txBody>
       </p:sp>
       <p:grpSp>
         <p:nvGrpSpPr>
-          <p:cNvPr id="351" name="Google Shape;351;p17"/>
+          <p:cNvPr id="354" name="Google Shape;354;p17"/>
           <p:cNvGrpSpPr/>
           <p:nvPr/>
         </p:nvGrpSpPr>
@@ -10770,7 +11118,7 @@
         </p:grpSpPr>
         <p:sp>
           <p:nvSpPr>
-            <p:cNvPr id="352" name="Google Shape;352;p17"/>
+            <p:cNvPr id="355" name="Google Shape;355;p17"/>
             <p:cNvSpPr/>
             <p:nvPr/>
           </p:nvSpPr>
@@ -10803,7 +11151,7 @@
               </a:pathLst>
             </a:custGeom>
             <a:solidFill>
-              <a:srgbClr val="A30000"/>
+              <a:srgbClr val="094183"/>
             </a:solidFill>
             <a:ln>
               <a:noFill/>
@@ -10833,7 +11181,7 @@
         </p:sp>
         <p:sp>
           <p:nvSpPr>
-            <p:cNvPr id="353" name="Google Shape;353;p17"/>
+            <p:cNvPr id="356" name="Google Shape;356;p17"/>
             <p:cNvSpPr/>
             <p:nvPr/>
           </p:nvSpPr>
@@ -10896,7 +11244,7 @@
         </p:sp>
         <p:sp>
           <p:nvSpPr>
-            <p:cNvPr id="354" name="Google Shape;354;p17"/>
+            <p:cNvPr id="357" name="Google Shape;357;p17"/>
             <p:cNvSpPr/>
             <p:nvPr/>
           </p:nvSpPr>
@@ -10960,7 +11308,7 @@
       </p:grpSp>
       <p:sp>
         <p:nvSpPr>
-          <p:cNvPr id="355" name="Google Shape;355;p17"/>
+          <p:cNvPr id="358" name="Google Shape;358;p17"/>
           <p:cNvSpPr txBox="1"/>
           <p:nvPr/>
         </p:nvSpPr>
@@ -11005,7 +11353,7 @@
                 <a:cs typeface="Tahoma"/>
                 <a:sym typeface="Tahoma"/>
               </a:rPr>
-              <a:t>Yi, Jiang, Tran, G´omez, Canning, Bloem &amp; Barrett</a:t>
+              <a:t>Jhonatan Parada Torres, Dr. Merlinda Drini</a:t>
             </a:r>
             <a:endParaRPr sz="600">
               <a:latin typeface="Tahoma"/>
@@ -11018,7 +11366,7 @@
       </p:sp>
       <p:sp>
         <p:nvSpPr>
-          <p:cNvPr id="356" name="Google Shape;356;p17"/>
+          <p:cNvPr id="359" name="Google Shape;359;p17"/>
           <p:cNvSpPr txBox="1"/>
           <p:nvPr>
             <p:ph idx="11" type="ftr"/>
@@ -11056,16 +11404,24 @@
               <a:buNone/>
             </a:pPr>
             <a:r>
-              <a:rPr lang="en-US"/>
-              <a:t>Employment and Compensation within AVCs</a:t>
+              <a:rPr lang="en-US">
+                <a:solidFill>
+                  <a:srgbClr val="094183"/>
+                </a:solidFill>
+              </a:rPr>
+              <a:t>Network IDPS Using Open-Source Tools</a:t>
             </a:r>
-            <a:endParaRPr/>
+            <a:endParaRPr>
+              <a:solidFill>
+                <a:srgbClr val="094183"/>
+              </a:solidFill>
+            </a:endParaRPr>
           </a:p>
         </p:txBody>
       </p:sp>
       <p:sp>
         <p:nvSpPr>
-          <p:cNvPr id="357" name="Google Shape;357;p17"/>
+          <p:cNvPr id="360" name="Google Shape;360;p17"/>
           <p:cNvSpPr txBox="1"/>
           <p:nvPr>
             <p:ph idx="10" type="dt"/>
@@ -11103,16 +11459,24 @@
               <a:buNone/>
             </a:pPr>
             <a:r>
-              <a:rPr lang="en-US"/>
-              <a:t>March 2025</a:t>
+              <a:rPr lang="en-US">
+                <a:solidFill>
+                  <a:srgbClr val="094183"/>
+                </a:solidFill>
+              </a:rPr>
+              <a:t>April 2026</a:t>
             </a:r>
-            <a:endParaRPr/>
+            <a:endParaRPr>
+              <a:solidFill>
+                <a:srgbClr val="094183"/>
+              </a:solidFill>
+            </a:endParaRPr>
           </a:p>
         </p:txBody>
       </p:sp>
       <p:sp>
         <p:nvSpPr>
-          <p:cNvPr id="358" name="Google Shape;358;p17"/>
+          <p:cNvPr id="361" name="Google Shape;361;p17"/>
           <p:cNvSpPr txBox="1"/>
           <p:nvPr>
             <p:ph idx="12" type="sldNum"/>
@@ -11150,20 +11514,32 @@
               <a:buNone/>
             </a:pPr>
             <a:fld id="{00000000-1234-1234-1234-123412341234}" type="slidenum">
-              <a:rPr lang="en-US"/>
+              <a:rPr lang="en-US">
+                <a:solidFill>
+                  <a:srgbClr val="094183"/>
+                </a:solidFill>
+              </a:rPr>
               <a:t>‹#›</a:t>
             </a:fld>
             <a:r>
-              <a:rPr lang="en-US"/>
+              <a:rPr lang="en-US">
+                <a:solidFill>
+                  <a:srgbClr val="094183"/>
+                </a:solidFill>
+              </a:rPr>
               <a:t> / 18</a:t>
             </a:r>
-            <a:endParaRPr/>
+            <a:endParaRPr>
+              <a:solidFill>
+                <a:srgbClr val="094183"/>
+              </a:solidFill>
+            </a:endParaRPr>
           </a:p>
         </p:txBody>
       </p:sp>
       <p:grpSp>
         <p:nvGrpSpPr>
-          <p:cNvPr id="359" name="Google Shape;359;p17"/>
+          <p:cNvPr id="362" name="Google Shape;362;p17"/>
           <p:cNvGrpSpPr/>
           <p:nvPr/>
         </p:nvGrpSpPr>
@@ -11177,7 +11553,7 @@
         </p:grpSpPr>
         <p:sp>
           <p:nvSpPr>
-            <p:cNvPr id="360" name="Google Shape;360;p17"/>
+            <p:cNvPr id="363" name="Google Shape;363;p17"/>
             <p:cNvSpPr/>
             <p:nvPr/>
           </p:nvSpPr>
@@ -11240,7 +11616,7 @@
         </p:sp>
         <p:sp>
           <p:nvSpPr>
-            <p:cNvPr id="361" name="Google Shape;361;p17"/>
+            <p:cNvPr id="364" name="Google Shape;364;p17"/>
             <p:cNvSpPr/>
             <p:nvPr/>
           </p:nvSpPr>
@@ -11303,7 +11679,7 @@
         </p:sp>
         <p:sp>
           <p:nvSpPr>
-            <p:cNvPr id="362" name="Google Shape;362;p17"/>
+            <p:cNvPr id="365" name="Google Shape;365;p17"/>
             <p:cNvSpPr/>
             <p:nvPr/>
           </p:nvSpPr>
@@ -11367,7 +11743,7 @@
       </p:grpSp>
       <p:sp>
         <p:nvSpPr>
-          <p:cNvPr id="363" name="Google Shape;363;p17"/>
+          <p:cNvPr id="366" name="Google Shape;366;p17"/>
           <p:cNvSpPr txBox="1"/>
           <p:nvPr/>
         </p:nvSpPr>
@@ -11412,7 +11788,7 @@
                 <a:cs typeface="Tahoma"/>
                 <a:sym typeface="Tahoma"/>
               </a:rPr>
-              <a:t>Jhonatan Parada Torres, Dr. Merlinda Drini</a:t>
+              <a:t>Jhonatan Parada Torres, Dr. Guozhen An</a:t>
             </a:r>
             <a:endParaRPr sz="600">
               <a:latin typeface="Tahoma"/>
@@ -11425,7 +11801,7 @@
       </p:sp>
       <p:sp>
         <p:nvSpPr>
-          <p:cNvPr id="364" name="Google Shape;364;p17"/>
+          <p:cNvPr id="367" name="Google Shape;367;p17"/>
           <p:cNvSpPr txBox="1"/>
           <p:nvPr>
             <p:ph idx="11" type="ftr"/>
@@ -11450,7 +11826,7 @@
           </a:bodyPr>
           <a:lstStyle/>
           <a:p>
-            <a:pPr indent="0" lvl="0" marL="12700" rtl="0" algn="l">
+            <a:pPr indent="0" lvl="0" marL="0" rtl="0" algn="ctr">
               <a:lnSpc>
                 <a:spcPct val="112500"/>
               </a:lnSpc>
@@ -11468,7 +11844,7 @@
                   <a:srgbClr val="094183"/>
                 </a:solidFill>
               </a:rPr>
-              <a:t>Network IDPS Using Open-Source Tools</a:t>
+              <a:t>System of MBTI personality Recognition</a:t>
             </a:r>
             <a:endParaRPr>
               <a:solidFill>
@@ -11480,7 +11856,7 @@
       </p:sp>
       <p:sp>
         <p:nvSpPr>
-          <p:cNvPr id="365" name="Google Shape;365;p17"/>
+          <p:cNvPr id="368" name="Google Shape;368;p17"/>
           <p:cNvSpPr txBox="1"/>
           <p:nvPr>
             <p:ph idx="10" type="dt"/>
@@ -11535,7 +11911,7 @@
       </p:sp>
       <p:sp>
         <p:nvSpPr>
-          <p:cNvPr id="366" name="Google Shape;366;p17"/>
+          <p:cNvPr id="369" name="Google Shape;369;p17"/>
           <p:cNvSpPr txBox="1"/>
           <p:nvPr>
             <p:ph idx="12" type="sldNum"/>
@@ -11596,9 +11972,206 @@
           </a:p>
         </p:txBody>
       </p:sp>
+      <p:pic>
+        <p:nvPicPr>
+          <p:cNvPr id="370" name="Google Shape;370;p17"/>
+          <p:cNvPicPr preferRelativeResize="0"/>
+          <p:nvPr/>
+        </p:nvPicPr>
+        <p:blipFill>
+          <a:blip r:embed="rId3">
+            <a:alphaModFix/>
+          </a:blip>
+          <a:stretch>
+            <a:fillRect/>
+          </a:stretch>
+        </p:blipFill>
+        <p:spPr>
+          <a:xfrm>
+            <a:off x="2553442" y="44069"/>
+            <a:ext cx="3051651" cy="2980649"/>
+          </a:xfrm>
+          <a:prstGeom prst="rect">
+            <a:avLst/>
+          </a:prstGeom>
+          <a:noFill/>
+          <a:ln>
+            <a:noFill/>
+          </a:ln>
+        </p:spPr>
+      </p:pic>
+      <p:pic>
+        <p:nvPicPr>
+          <p:cNvPr id="371" name="Google Shape;371;p17"/>
+          <p:cNvPicPr preferRelativeResize="0"/>
+          <p:nvPr/>
+        </p:nvPicPr>
+        <p:blipFill>
+          <a:blip r:embed="rId4">
+            <a:alphaModFix/>
+          </a:blip>
+          <a:stretch>
+            <a:fillRect/>
+          </a:stretch>
+        </p:blipFill>
+        <p:spPr>
+          <a:xfrm>
+            <a:off x="73398" y="722947"/>
+            <a:ext cx="2510274" cy="1798953"/>
+          </a:xfrm>
+          <a:prstGeom prst="rect">
+            <a:avLst/>
+          </a:prstGeom>
+          <a:noFill/>
+          <a:ln>
+            <a:noFill/>
+          </a:ln>
+        </p:spPr>
+      </p:pic>
+      <p:sp>
+        <p:nvSpPr>
+          <p:cNvPr id="372" name="Google Shape;372;p17"/>
+          <p:cNvSpPr txBox="1"/>
+          <p:nvPr/>
+        </p:nvSpPr>
+        <p:spPr>
+          <a:xfrm>
+            <a:off x="95300" y="44075"/>
+            <a:ext cx="2635500" cy="209100"/>
+          </a:xfrm>
+          <a:prstGeom prst="rect">
+            <a:avLst/>
+          </a:prstGeom>
+          <a:noFill/>
+          <a:ln>
+            <a:noFill/>
+          </a:ln>
+        </p:spPr>
+        <p:txBody>
+          <a:bodyPr anchorCtr="0" anchor="t" bIns="0" lIns="0" spcFirstLastPara="1" rIns="0" wrap="square" tIns="39350">
+            <a:spAutoFit/>
+          </a:bodyPr>
+          <a:lstStyle/>
+          <a:p>
+            <a:pPr indent="0" lvl="0" marL="12700" rtl="0" algn="l">
+              <a:lnSpc>
+                <a:spcPct val="100000"/>
+              </a:lnSpc>
+              <a:spcBef>
+                <a:spcPts val="0"/>
+              </a:spcBef>
+              <a:spcAft>
+                <a:spcPts val="0"/>
+              </a:spcAft>
+              <a:buNone/>
+            </a:pPr>
+            <a:r>
+              <a:rPr lang="en-US" sz="1100">
+                <a:solidFill>
+                  <a:srgbClr val="094183"/>
+                </a:solidFill>
+                <a:latin typeface="Tahoma"/>
+                <a:ea typeface="Tahoma"/>
+                <a:cs typeface="Tahoma"/>
+                <a:sym typeface="Tahoma"/>
+              </a:rPr>
+              <a:t>Results</a:t>
+            </a:r>
+            <a:endParaRPr sz="1100">
+              <a:latin typeface="Tahoma"/>
+              <a:ea typeface="Tahoma"/>
+              <a:cs typeface="Tahoma"/>
+              <a:sym typeface="Tahoma"/>
+            </a:endParaRPr>
+          </a:p>
+        </p:txBody>
+      </p:sp>
+    </p:spTree>
+  </p:cSld>
+  <p:clrMapOvr>
+    <a:masterClrMapping/>
+  </p:clrMapOvr>
+  <p:transition>
+    <p:fade thruBlk="1"/>
+  </p:transition>
+</p:sld>
+</file>
+
+<file path=ppt/slides/slide12.xml><?xml version="1.0" encoding="utf-8"?>
+<p:sld xmlns:a="http://schemas.openxmlformats.org/drawingml/2006/main" xmlns:r="http://schemas.openxmlformats.org/officeDocument/2006/relationships" xmlns:mc="http://schemas.openxmlformats.org/markup-compatibility/2006" xmlns:mv="urn:schemas-microsoft-com:mac:vml" xmlns:p="http://schemas.openxmlformats.org/presentationml/2006/main" xmlns:c="http://schemas.openxmlformats.org/drawingml/2006/chart" xmlns:dgm="http://schemas.openxmlformats.org/drawingml/2006/diagram" xmlns:o="urn:schemas-microsoft-com:office:office" xmlns:v="urn:schemas-microsoft-com:vml" xmlns:pvml="urn:schemas-microsoft-com:office:powerpoint" xmlns:com="http://schemas.openxmlformats.org/drawingml/2006/compatibility" xmlns:p14="http://schemas.microsoft.com/office/powerpoint/2010/main" xmlns:p15="http://schemas.microsoft.com/office/powerpoint/2012/main" xmlns:ahyp="http://schemas.microsoft.com/office/drawing/2018/hyperlinkcolor">
+  <p:cSld>
+    <p:spTree>
+      <p:nvGrpSpPr>
+        <p:cNvPr id="376" name="Shape 376"/>
+        <p:cNvGrpSpPr/>
+        <p:nvPr/>
+      </p:nvGrpSpPr>
+      <p:grpSpPr>
+        <a:xfrm>
+          <a:off x="0" y="0"/>
+          <a:ext cx="0" cy="0"/>
+          <a:chOff x="0" y="0"/>
+          <a:chExt cx="0" cy="0"/>
+        </a:xfrm>
+      </p:grpSpPr>
+      <p:sp>
+        <p:nvSpPr>
+          <p:cNvPr id="377" name="Google Shape;377;p18"/>
+          <p:cNvSpPr txBox="1"/>
+          <p:nvPr>
+            <p:ph type="title"/>
+          </p:nvPr>
+        </p:nvSpPr>
+        <p:spPr>
+          <a:xfrm>
+            <a:off x="95300" y="72300"/>
+            <a:ext cx="1816200" cy="180900"/>
+          </a:xfrm>
+          <a:prstGeom prst="rect">
+            <a:avLst/>
+          </a:prstGeom>
+          <a:noFill/>
+          <a:ln>
+            <a:noFill/>
+          </a:ln>
+        </p:spPr>
+        <p:txBody>
+          <a:bodyPr anchorCtr="0" anchor="t" bIns="0" lIns="0" spcFirstLastPara="1" rIns="0" wrap="square" tIns="11425">
+            <a:spAutoFit/>
+          </a:bodyPr>
+          <a:lstStyle/>
+          <a:p>
+            <a:pPr indent="0" lvl="0" marL="12700" rtl="0" algn="l">
+              <a:lnSpc>
+                <a:spcPct val="100000"/>
+              </a:lnSpc>
+              <a:spcBef>
+                <a:spcPts val="0"/>
+              </a:spcBef>
+              <a:spcAft>
+                <a:spcPts val="0"/>
+              </a:spcAft>
+              <a:buNone/>
+            </a:pPr>
+            <a:r>
+              <a:rPr lang="en-US">
+                <a:solidFill>
+                  <a:srgbClr val="094183"/>
+                </a:solidFill>
+              </a:rPr>
+              <a:t>Coverage</a:t>
+            </a:r>
+            <a:endParaRPr>
+              <a:solidFill>
+                <a:srgbClr val="094183"/>
+              </a:solidFill>
+            </a:endParaRPr>
+          </a:p>
+        </p:txBody>
+      </p:sp>
       <p:grpSp>
         <p:nvGrpSpPr>
-          <p:cNvPr id="367" name="Google Shape;367;p17"/>
+          <p:cNvPr id="378" name="Google Shape;378;p18"/>
           <p:cNvGrpSpPr/>
           <p:nvPr/>
         </p:nvGrpSpPr>
@@ -11612,7 +12185,7 @@
         </p:grpSpPr>
         <p:sp>
           <p:nvSpPr>
-            <p:cNvPr id="368" name="Google Shape;368;p17"/>
+            <p:cNvPr id="379" name="Google Shape;379;p18"/>
             <p:cNvSpPr/>
             <p:nvPr/>
           </p:nvSpPr>
@@ -11645,7 +12218,7 @@
               </a:pathLst>
             </a:custGeom>
             <a:solidFill>
-              <a:srgbClr val="094183"/>
+              <a:srgbClr val="A30000"/>
             </a:solidFill>
             <a:ln>
               <a:noFill/>
@@ -11675,7 +12248,7 @@
         </p:sp>
         <p:sp>
           <p:nvSpPr>
-            <p:cNvPr id="369" name="Google Shape;369;p17"/>
+            <p:cNvPr id="380" name="Google Shape;380;p18"/>
             <p:cNvSpPr/>
             <p:nvPr/>
           </p:nvSpPr>
@@ -11738,7 +12311,7 @@
         </p:sp>
         <p:sp>
           <p:nvSpPr>
-            <p:cNvPr id="370" name="Google Shape;370;p17"/>
+            <p:cNvPr id="381" name="Google Shape;381;p18"/>
             <p:cNvSpPr/>
             <p:nvPr/>
           </p:nvSpPr>
@@ -11802,7 +12375,7 @@
       </p:grpSp>
       <p:sp>
         <p:nvSpPr>
-          <p:cNvPr id="371" name="Google Shape;371;p17"/>
+          <p:cNvPr id="382" name="Google Shape;382;p18"/>
           <p:cNvSpPr txBox="1"/>
           <p:nvPr/>
         </p:nvSpPr>
@@ -11810,351 +12383,6 @@
           <a:xfrm>
             <a:off x="83477" y="3135783"/>
             <a:ext cx="1752600" cy="92400"/>
-          </a:xfrm>
-          <a:prstGeom prst="rect">
-            <a:avLst/>
-          </a:prstGeom>
-          <a:noFill/>
-          <a:ln>
-            <a:noFill/>
-          </a:ln>
-        </p:spPr>
-        <p:txBody>
-          <a:bodyPr anchorCtr="0" anchor="t" bIns="0" lIns="0" spcFirstLastPara="1" rIns="0" wrap="square" tIns="0">
-            <a:spAutoFit/>
-          </a:bodyPr>
-          <a:lstStyle/>
-          <a:p>
-            <a:pPr indent="0" lvl="0" marL="12700" rtl="0" algn="l">
-              <a:lnSpc>
-                <a:spcPct val="112500"/>
-              </a:lnSpc>
-              <a:spcBef>
-                <a:spcPts val="0"/>
-              </a:spcBef>
-              <a:spcAft>
-                <a:spcPts val="0"/>
-              </a:spcAft>
-              <a:buNone/>
-            </a:pPr>
-            <a:r>
-              <a:rPr lang="en-US" sz="600">
-                <a:solidFill>
-                  <a:srgbClr val="F2F2F2"/>
-                </a:solidFill>
-                <a:latin typeface="Tahoma"/>
-                <a:ea typeface="Tahoma"/>
-                <a:cs typeface="Tahoma"/>
-                <a:sym typeface="Tahoma"/>
-              </a:rPr>
-              <a:t>Jhonatan Parada Torres, Dr. Guozhen An</a:t>
-            </a:r>
-            <a:endParaRPr sz="600">
-              <a:latin typeface="Tahoma"/>
-              <a:ea typeface="Tahoma"/>
-              <a:cs typeface="Tahoma"/>
-              <a:sym typeface="Tahoma"/>
-            </a:endParaRPr>
-          </a:p>
-        </p:txBody>
-      </p:sp>
-      <p:sp>
-        <p:nvSpPr>
-          <p:cNvPr id="372" name="Google Shape;372;p17"/>
-          <p:cNvSpPr txBox="1"/>
-          <p:nvPr>
-            <p:ph idx="11" type="ftr"/>
-          </p:nvPr>
-        </p:nvSpPr>
-        <p:spPr>
-          <a:xfrm>
-            <a:off x="2111768" y="3135783"/>
-            <a:ext cx="1536600" cy="92400"/>
-          </a:xfrm>
-          <a:prstGeom prst="rect">
-            <a:avLst/>
-          </a:prstGeom>
-          <a:noFill/>
-          <a:ln>
-            <a:noFill/>
-          </a:ln>
-        </p:spPr>
-        <p:txBody>
-          <a:bodyPr anchorCtr="0" anchor="t" bIns="0" lIns="0" spcFirstLastPara="1" rIns="0" wrap="square" tIns="0">
-            <a:spAutoFit/>
-          </a:bodyPr>
-          <a:lstStyle/>
-          <a:p>
-            <a:pPr indent="0" lvl="0" marL="0" rtl="0" algn="ctr">
-              <a:lnSpc>
-                <a:spcPct val="112500"/>
-              </a:lnSpc>
-              <a:spcBef>
-                <a:spcPts val="0"/>
-              </a:spcBef>
-              <a:spcAft>
-                <a:spcPts val="0"/>
-              </a:spcAft>
-              <a:buNone/>
-            </a:pPr>
-            <a:r>
-              <a:rPr lang="en-US">
-                <a:solidFill>
-                  <a:srgbClr val="094183"/>
-                </a:solidFill>
-              </a:rPr>
-              <a:t>System of MBTI personality Recognition</a:t>
-            </a:r>
-            <a:endParaRPr>
-              <a:solidFill>
-                <a:srgbClr val="094183"/>
-              </a:solidFill>
-            </a:endParaRPr>
-          </a:p>
-        </p:txBody>
-      </p:sp>
-      <p:sp>
-        <p:nvSpPr>
-          <p:cNvPr id="373" name="Google Shape;373;p17"/>
-          <p:cNvSpPr txBox="1"/>
-          <p:nvPr>
-            <p:ph idx="10" type="dt"/>
-          </p:nvPr>
-        </p:nvSpPr>
-        <p:spPr>
-          <a:xfrm>
-            <a:off x="4472876" y="3135783"/>
-            <a:ext cx="426000" cy="92400"/>
-          </a:xfrm>
-          <a:prstGeom prst="rect">
-            <a:avLst/>
-          </a:prstGeom>
-          <a:noFill/>
-          <a:ln>
-            <a:noFill/>
-          </a:ln>
-        </p:spPr>
-        <p:txBody>
-          <a:bodyPr anchorCtr="0" anchor="t" bIns="0" lIns="0" spcFirstLastPara="1" rIns="0" wrap="square" tIns="0">
-            <a:spAutoFit/>
-          </a:bodyPr>
-          <a:lstStyle/>
-          <a:p>
-            <a:pPr indent="0" lvl="0" marL="12700" rtl="0" algn="l">
-              <a:lnSpc>
-                <a:spcPct val="112500"/>
-              </a:lnSpc>
-              <a:spcBef>
-                <a:spcPts val="0"/>
-              </a:spcBef>
-              <a:spcAft>
-                <a:spcPts val="0"/>
-              </a:spcAft>
-              <a:buNone/>
-            </a:pPr>
-            <a:r>
-              <a:rPr lang="en-US">
-                <a:solidFill>
-                  <a:srgbClr val="094183"/>
-                </a:solidFill>
-              </a:rPr>
-              <a:t>April 2026</a:t>
-            </a:r>
-            <a:endParaRPr>
-              <a:solidFill>
-                <a:srgbClr val="094183"/>
-              </a:solidFill>
-            </a:endParaRPr>
-          </a:p>
-        </p:txBody>
-      </p:sp>
-      <p:sp>
-        <p:nvSpPr>
-          <p:cNvPr id="374" name="Google Shape;374;p17"/>
-          <p:cNvSpPr txBox="1"/>
-          <p:nvPr>
-            <p:ph idx="12" type="sldNum"/>
-          </p:nvPr>
-        </p:nvSpPr>
-        <p:spPr>
-          <a:xfrm>
-            <a:off x="5451184" y="3135783"/>
-            <a:ext cx="254100" cy="92400"/>
-          </a:xfrm>
-          <a:prstGeom prst="rect">
-            <a:avLst/>
-          </a:prstGeom>
-          <a:noFill/>
-          <a:ln>
-            <a:noFill/>
-          </a:ln>
-        </p:spPr>
-        <p:txBody>
-          <a:bodyPr anchorCtr="0" anchor="t" bIns="0" lIns="0" spcFirstLastPara="1" rIns="0" wrap="square" tIns="0">
-            <a:spAutoFit/>
-          </a:bodyPr>
-          <a:lstStyle/>
-          <a:p>
-            <a:pPr indent="0" lvl="0" marL="12700" rtl="0" algn="l">
-              <a:lnSpc>
-                <a:spcPct val="112500"/>
-              </a:lnSpc>
-              <a:spcBef>
-                <a:spcPts val="0"/>
-              </a:spcBef>
-              <a:spcAft>
-                <a:spcPts val="0"/>
-              </a:spcAft>
-              <a:buNone/>
-            </a:pPr>
-            <a:fld id="{00000000-1234-1234-1234-123412341234}" type="slidenum">
-              <a:rPr lang="en-US">
-                <a:solidFill>
-                  <a:srgbClr val="094183"/>
-                </a:solidFill>
-              </a:rPr>
-              <a:t>‹#›</a:t>
-            </a:fld>
-            <a:r>
-              <a:rPr lang="en-US">
-                <a:solidFill>
-                  <a:srgbClr val="094183"/>
-                </a:solidFill>
-              </a:rPr>
-              <a:t> / 18</a:t>
-            </a:r>
-            <a:endParaRPr>
-              <a:solidFill>
-                <a:srgbClr val="094183"/>
-              </a:solidFill>
-            </a:endParaRPr>
-          </a:p>
-        </p:txBody>
-      </p:sp>
-      <p:pic>
-        <p:nvPicPr>
-          <p:cNvPr id="375" name="Google Shape;375;p17"/>
-          <p:cNvPicPr preferRelativeResize="0"/>
-          <p:nvPr/>
-        </p:nvPicPr>
-        <p:blipFill>
-          <a:blip r:embed="rId3">
-            <a:alphaModFix/>
-          </a:blip>
-          <a:stretch>
-            <a:fillRect/>
-          </a:stretch>
-        </p:blipFill>
-        <p:spPr>
-          <a:xfrm>
-            <a:off x="215013" y="336250"/>
-            <a:ext cx="5330128" cy="2572345"/>
-          </a:xfrm>
-          <a:prstGeom prst="rect">
-            <a:avLst/>
-          </a:prstGeom>
-          <a:noFill/>
-          <a:ln>
-            <a:noFill/>
-          </a:ln>
-        </p:spPr>
-      </p:pic>
-    </p:spTree>
-  </p:cSld>
-  <p:clrMapOvr>
-    <a:masterClrMapping/>
-  </p:clrMapOvr>
-  <p:transition>
-    <p:fade thruBlk="1"/>
-  </p:transition>
-</p:sld>
-</file>
-
-<file path=ppt/slides/slide12.xml><?xml version="1.0" encoding="utf-8"?>
-<p:sld xmlns:a="http://schemas.openxmlformats.org/drawingml/2006/main" xmlns:r="http://schemas.openxmlformats.org/officeDocument/2006/relationships" xmlns:mc="http://schemas.openxmlformats.org/markup-compatibility/2006" xmlns:mv="urn:schemas-microsoft-com:mac:vml" xmlns:p="http://schemas.openxmlformats.org/presentationml/2006/main" xmlns:c="http://schemas.openxmlformats.org/drawingml/2006/chart" xmlns:dgm="http://schemas.openxmlformats.org/drawingml/2006/diagram" xmlns:o="urn:schemas-microsoft-com:office:office" xmlns:v="urn:schemas-microsoft-com:vml" xmlns:pvml="urn:schemas-microsoft-com:office:powerpoint" xmlns:com="http://schemas.openxmlformats.org/drawingml/2006/compatibility" xmlns:p14="http://schemas.microsoft.com/office/powerpoint/2010/main" xmlns:p15="http://schemas.microsoft.com/office/powerpoint/2012/main" xmlns:ahyp="http://schemas.microsoft.com/office/drawing/2018/hyperlinkcolor">
-  <p:cSld>
-    <p:spTree>
-      <p:nvGrpSpPr>
-        <p:cNvPr id="379" name="Shape 379"/>
-        <p:cNvGrpSpPr/>
-        <p:nvPr/>
-      </p:nvGrpSpPr>
-      <p:grpSpPr>
-        <a:xfrm>
-          <a:off x="0" y="0"/>
-          <a:ext cx="0" cy="0"/>
-          <a:chOff x="0" y="0"/>
-          <a:chExt cx="0" cy="0"/>
-        </a:xfrm>
-      </p:grpSpPr>
-      <p:sp>
-        <p:nvSpPr>
-          <p:cNvPr id="380" name="Google Shape;380;p18"/>
-          <p:cNvSpPr txBox="1"/>
-          <p:nvPr/>
-        </p:nvSpPr>
-        <p:spPr>
-          <a:xfrm>
-            <a:off x="95300" y="44079"/>
-            <a:ext cx="5079300" cy="209100"/>
-          </a:xfrm>
-          <a:prstGeom prst="rect">
-            <a:avLst/>
-          </a:prstGeom>
-          <a:noFill/>
-          <a:ln>
-            <a:noFill/>
-          </a:ln>
-        </p:spPr>
-        <p:txBody>
-          <a:bodyPr anchorCtr="0" anchor="t" bIns="0" lIns="0" spcFirstLastPara="1" rIns="0" wrap="square" tIns="39350">
-            <a:spAutoFit/>
-          </a:bodyPr>
-          <a:lstStyle/>
-          <a:p>
-            <a:pPr indent="0" lvl="0" marL="12700" rtl="0" algn="l">
-              <a:lnSpc>
-                <a:spcPct val="100000"/>
-              </a:lnSpc>
-              <a:spcBef>
-                <a:spcPts val="0"/>
-              </a:spcBef>
-              <a:spcAft>
-                <a:spcPts val="0"/>
-              </a:spcAft>
-              <a:buNone/>
-            </a:pPr>
-            <a:r>
-              <a:rPr lang="en-US" sz="1100">
-                <a:solidFill>
-                  <a:srgbClr val="094183"/>
-                </a:solidFill>
-                <a:latin typeface="Tahoma"/>
-                <a:ea typeface="Tahoma"/>
-                <a:cs typeface="Tahoma"/>
-                <a:sym typeface="Tahoma"/>
-              </a:rPr>
-              <a:t>Results</a:t>
-            </a:r>
-            <a:endParaRPr sz="1100">
-              <a:latin typeface="Tahoma"/>
-              <a:ea typeface="Tahoma"/>
-              <a:cs typeface="Tahoma"/>
-              <a:sym typeface="Tahoma"/>
-            </a:endParaRPr>
-          </a:p>
-        </p:txBody>
-      </p:sp>
-      <p:sp>
-        <p:nvSpPr>
-          <p:cNvPr id="381" name="Google Shape;381;p18"/>
-          <p:cNvSpPr txBox="1"/>
-          <p:nvPr/>
-        </p:nvSpPr>
-        <p:spPr>
-          <a:xfrm>
-            <a:off x="83477" y="3135783"/>
-            <a:ext cx="1752600" cy="102235"/>
           </a:xfrm>
           <a:prstGeom prst="rect">
             <a:avLst/>
@@ -12205,7 +12433,7 @@
       </p:sp>
       <p:sp>
         <p:nvSpPr>
-          <p:cNvPr id="382" name="Google Shape;382;p18"/>
+          <p:cNvPr id="383" name="Google Shape;383;p18"/>
           <p:cNvSpPr txBox="1"/>
           <p:nvPr>
             <p:ph idx="11" type="ftr"/>
@@ -12214,7 +12442,7 @@
         <p:spPr>
           <a:xfrm>
             <a:off x="2111768" y="3135783"/>
-            <a:ext cx="1536700" cy="102235"/>
+            <a:ext cx="1536600" cy="92400"/>
           </a:xfrm>
           <a:prstGeom prst="rect">
             <a:avLst/>
@@ -12252,7 +12480,7 @@
       </p:sp>
       <p:sp>
         <p:nvSpPr>
-          <p:cNvPr id="383" name="Google Shape;383;p18"/>
+          <p:cNvPr id="384" name="Google Shape;384;p18"/>
           <p:cNvSpPr txBox="1"/>
           <p:nvPr>
             <p:ph idx="10" type="dt"/>
@@ -12261,7 +12489,7 @@
         <p:spPr>
           <a:xfrm>
             <a:off x="4472876" y="3135783"/>
-            <a:ext cx="426000" cy="102300"/>
+            <a:ext cx="426000" cy="92400"/>
           </a:xfrm>
           <a:prstGeom prst="rect">
             <a:avLst/>
@@ -12299,7 +12527,7 @@
       </p:sp>
       <p:sp>
         <p:nvSpPr>
-          <p:cNvPr id="384" name="Google Shape;384;p18"/>
+          <p:cNvPr id="385" name="Google Shape;385;p18"/>
           <p:cNvSpPr txBox="1"/>
           <p:nvPr>
             <p:ph idx="12" type="sldNum"/>
@@ -12308,7 +12536,7 @@
         <p:spPr>
           <a:xfrm>
             <a:off x="5451184" y="3135783"/>
-            <a:ext cx="254100" cy="102300"/>
+            <a:ext cx="254100" cy="92400"/>
           </a:xfrm>
           <a:prstGeom prst="rect">
             <a:avLst/>
@@ -12350,7 +12578,7 @@
       </p:sp>
       <p:grpSp>
         <p:nvGrpSpPr>
-          <p:cNvPr id="385" name="Google Shape;385;p18"/>
+          <p:cNvPr id="386" name="Google Shape;386;p18"/>
           <p:cNvGrpSpPr/>
           <p:nvPr/>
         </p:nvGrpSpPr>
@@ -12364,7 +12592,7 @@
         </p:grpSpPr>
         <p:sp>
           <p:nvSpPr>
-            <p:cNvPr id="386" name="Google Shape;386;p18"/>
+            <p:cNvPr id="387" name="Google Shape;387;p18"/>
             <p:cNvSpPr/>
             <p:nvPr/>
           </p:nvSpPr>
@@ -12427,7 +12655,7 @@
         </p:sp>
         <p:sp>
           <p:nvSpPr>
-            <p:cNvPr id="387" name="Google Shape;387;p18"/>
+            <p:cNvPr id="388" name="Google Shape;388;p18"/>
             <p:cNvSpPr/>
             <p:nvPr/>
           </p:nvSpPr>
@@ -12490,7 +12718,7 @@
         </p:sp>
         <p:sp>
           <p:nvSpPr>
-            <p:cNvPr id="388" name="Google Shape;388;p18"/>
+            <p:cNvPr id="389" name="Google Shape;389;p18"/>
             <p:cNvSpPr/>
             <p:nvPr/>
           </p:nvSpPr>
@@ -12554,7 +12782,7 @@
       </p:grpSp>
       <p:sp>
         <p:nvSpPr>
-          <p:cNvPr id="389" name="Google Shape;389;p18"/>
+          <p:cNvPr id="390" name="Google Shape;390;p18"/>
           <p:cNvSpPr txBox="1"/>
           <p:nvPr/>
         </p:nvSpPr>
@@ -12612,7 +12840,7 @@
       </p:sp>
       <p:sp>
         <p:nvSpPr>
-          <p:cNvPr id="390" name="Google Shape;390;p18"/>
+          <p:cNvPr id="391" name="Google Shape;391;p18"/>
           <p:cNvSpPr txBox="1"/>
           <p:nvPr>
             <p:ph idx="11" type="ftr"/>
@@ -12667,7 +12895,7 @@
       </p:sp>
       <p:sp>
         <p:nvSpPr>
-          <p:cNvPr id="391" name="Google Shape;391;p18"/>
+          <p:cNvPr id="392" name="Google Shape;392;p18"/>
           <p:cNvSpPr txBox="1"/>
           <p:nvPr>
             <p:ph idx="10" type="dt"/>
@@ -12722,7 +12950,7 @@
       </p:sp>
       <p:sp>
         <p:nvSpPr>
-          <p:cNvPr id="392" name="Google Shape;392;p18"/>
+          <p:cNvPr id="393" name="Google Shape;393;p18"/>
           <p:cNvSpPr txBox="1"/>
           <p:nvPr>
             <p:ph idx="12" type="sldNum"/>
@@ -12785,7 +13013,7 @@
       </p:sp>
       <p:grpSp>
         <p:nvGrpSpPr>
-          <p:cNvPr id="393" name="Google Shape;393;p18"/>
+          <p:cNvPr id="394" name="Google Shape;394;p18"/>
           <p:cNvGrpSpPr/>
           <p:nvPr/>
         </p:nvGrpSpPr>
@@ -12799,7 +13027,7 @@
         </p:grpSpPr>
         <p:sp>
           <p:nvSpPr>
-            <p:cNvPr id="394" name="Google Shape;394;p18"/>
+            <p:cNvPr id="395" name="Google Shape;395;p18"/>
             <p:cNvSpPr/>
             <p:nvPr/>
           </p:nvSpPr>
@@ -12862,7 +13090,7 @@
         </p:sp>
         <p:sp>
           <p:nvSpPr>
-            <p:cNvPr id="395" name="Google Shape;395;p18"/>
+            <p:cNvPr id="396" name="Google Shape;396;p18"/>
             <p:cNvSpPr/>
             <p:nvPr/>
           </p:nvSpPr>
@@ -12925,7 +13153,7 @@
         </p:sp>
         <p:sp>
           <p:nvSpPr>
-            <p:cNvPr id="396" name="Google Shape;396;p18"/>
+            <p:cNvPr id="397" name="Google Shape;397;p18"/>
             <p:cNvSpPr/>
             <p:nvPr/>
           </p:nvSpPr>
@@ -12989,7 +13217,7 @@
       </p:grpSp>
       <p:sp>
         <p:nvSpPr>
-          <p:cNvPr id="397" name="Google Shape;397;p18"/>
+          <p:cNvPr id="398" name="Google Shape;398;p18"/>
           <p:cNvSpPr txBox="1"/>
           <p:nvPr/>
         </p:nvSpPr>
@@ -13047,7 +13275,7 @@
       </p:sp>
       <p:sp>
         <p:nvSpPr>
-          <p:cNvPr id="398" name="Google Shape;398;p18"/>
+          <p:cNvPr id="399" name="Google Shape;399;p18"/>
           <p:cNvSpPr txBox="1"/>
           <p:nvPr>
             <p:ph idx="11" type="ftr"/>
@@ -13102,7 +13330,7 @@
       </p:sp>
       <p:sp>
         <p:nvSpPr>
-          <p:cNvPr id="399" name="Google Shape;399;p18"/>
+          <p:cNvPr id="400" name="Google Shape;400;p18"/>
           <p:cNvSpPr txBox="1"/>
           <p:nvPr>
             <p:ph idx="10" type="dt"/>
@@ -13157,7 +13385,7 @@
       </p:sp>
       <p:sp>
         <p:nvSpPr>
-          <p:cNvPr id="400" name="Google Shape;400;p18"/>
+          <p:cNvPr id="401" name="Google Shape;401;p18"/>
           <p:cNvSpPr txBox="1"/>
           <p:nvPr>
             <p:ph idx="12" type="sldNum"/>
@@ -13218,6 +13446,34 @@
           </a:p>
         </p:txBody>
       </p:sp>
+      <p:pic>
+        <p:nvPicPr>
+          <p:cNvPr id="402" name="Google Shape;402;p18"/>
+          <p:cNvPicPr preferRelativeResize="0"/>
+          <p:nvPr/>
+        </p:nvPicPr>
+        <p:blipFill>
+          <a:blip r:embed="rId3">
+            <a:alphaModFix/>
+          </a:blip>
+          <a:stretch>
+            <a:fillRect/>
+          </a:stretch>
+        </p:blipFill>
+        <p:spPr>
+          <a:xfrm>
+            <a:off x="215013" y="336250"/>
+            <a:ext cx="5330128" cy="2572345"/>
+          </a:xfrm>
+          <a:prstGeom prst="rect">
+            <a:avLst/>
+          </a:prstGeom>
+          <a:noFill/>
+          <a:ln>
+            <a:noFill/>
+          </a:ln>
+        </p:spPr>
+      </p:pic>
     </p:spTree>
   </p:cSld>
   <p:clrMapOvr>
@@ -13234,7 +13490,7 @@
   <p:cSld>
     <p:spTree>
       <p:nvGrpSpPr>
-        <p:cNvPr id="404" name="Shape 404"/>
+        <p:cNvPr id="406" name="Shape 406"/>
         <p:cNvGrpSpPr/>
         <p:nvPr/>
       </p:nvGrpSpPr>
@@ -13246,9 +13502,270 @@
           <a:chExt cx="0" cy="0"/>
         </a:xfrm>
       </p:grpSpPr>
+      <p:sp>
+        <p:nvSpPr>
+          <p:cNvPr id="407" name="Google Shape;407;p19"/>
+          <p:cNvSpPr txBox="1"/>
+          <p:nvPr/>
+        </p:nvSpPr>
+        <p:spPr>
+          <a:xfrm>
+            <a:off x="95300" y="44079"/>
+            <a:ext cx="5079300" cy="209100"/>
+          </a:xfrm>
+          <a:prstGeom prst="rect">
+            <a:avLst/>
+          </a:prstGeom>
+          <a:noFill/>
+          <a:ln>
+            <a:noFill/>
+          </a:ln>
+        </p:spPr>
+        <p:txBody>
+          <a:bodyPr anchorCtr="0" anchor="t" bIns="0" lIns="0" spcFirstLastPara="1" rIns="0" wrap="square" tIns="39350">
+            <a:spAutoFit/>
+          </a:bodyPr>
+          <a:lstStyle/>
+          <a:p>
+            <a:pPr indent="0" lvl="0" marL="12700" rtl="0" algn="l">
+              <a:lnSpc>
+                <a:spcPct val="100000"/>
+              </a:lnSpc>
+              <a:spcBef>
+                <a:spcPts val="0"/>
+              </a:spcBef>
+              <a:spcAft>
+                <a:spcPts val="0"/>
+              </a:spcAft>
+              <a:buNone/>
+            </a:pPr>
+            <a:r>
+              <a:rPr lang="en-US" sz="1100">
+                <a:solidFill>
+                  <a:srgbClr val="094183"/>
+                </a:solidFill>
+                <a:latin typeface="Tahoma"/>
+                <a:ea typeface="Tahoma"/>
+                <a:cs typeface="Tahoma"/>
+                <a:sym typeface="Tahoma"/>
+              </a:rPr>
+              <a:t>Results</a:t>
+            </a:r>
+            <a:endParaRPr sz="1100">
+              <a:latin typeface="Tahoma"/>
+              <a:ea typeface="Tahoma"/>
+              <a:cs typeface="Tahoma"/>
+              <a:sym typeface="Tahoma"/>
+            </a:endParaRPr>
+          </a:p>
+        </p:txBody>
+      </p:sp>
+      <p:sp>
+        <p:nvSpPr>
+          <p:cNvPr id="408" name="Google Shape;408;p19"/>
+          <p:cNvSpPr txBox="1"/>
+          <p:nvPr/>
+        </p:nvSpPr>
+        <p:spPr>
+          <a:xfrm>
+            <a:off x="83477" y="3135783"/>
+            <a:ext cx="1752600" cy="102235"/>
+          </a:xfrm>
+          <a:prstGeom prst="rect">
+            <a:avLst/>
+          </a:prstGeom>
+          <a:noFill/>
+          <a:ln>
+            <a:noFill/>
+          </a:ln>
+        </p:spPr>
+        <p:txBody>
+          <a:bodyPr anchorCtr="0" anchor="t" bIns="0" lIns="0" spcFirstLastPara="1" rIns="0" wrap="square" tIns="0">
+            <a:spAutoFit/>
+          </a:bodyPr>
+          <a:lstStyle/>
+          <a:p>
+            <a:pPr indent="0" lvl="0" marL="12700" rtl="0" algn="l">
+              <a:lnSpc>
+                <a:spcPct val="112500"/>
+              </a:lnSpc>
+              <a:spcBef>
+                <a:spcPts val="0"/>
+              </a:spcBef>
+              <a:spcAft>
+                <a:spcPts val="0"/>
+              </a:spcAft>
+              <a:buNone/>
+            </a:pPr>
+            <a:r>
+              <a:rPr lang="en-US" sz="600">
+                <a:solidFill>
+                  <a:srgbClr val="F2F2F2"/>
+                </a:solidFill>
+                <a:latin typeface="Tahoma"/>
+                <a:ea typeface="Tahoma"/>
+                <a:cs typeface="Tahoma"/>
+                <a:sym typeface="Tahoma"/>
+              </a:rPr>
+              <a:t>Yi, Jiang, Tran, G´omez, Canning, Bloem &amp; Barrett</a:t>
+            </a:r>
+            <a:endParaRPr sz="600">
+              <a:latin typeface="Tahoma"/>
+              <a:ea typeface="Tahoma"/>
+              <a:cs typeface="Tahoma"/>
+              <a:sym typeface="Tahoma"/>
+            </a:endParaRPr>
+          </a:p>
+        </p:txBody>
+      </p:sp>
+      <p:sp>
+        <p:nvSpPr>
+          <p:cNvPr id="409" name="Google Shape;409;p19"/>
+          <p:cNvSpPr txBox="1"/>
+          <p:nvPr>
+            <p:ph idx="11" type="ftr"/>
+          </p:nvPr>
+        </p:nvSpPr>
+        <p:spPr>
+          <a:xfrm>
+            <a:off x="2111768" y="3135783"/>
+            <a:ext cx="1536700" cy="102235"/>
+          </a:xfrm>
+          <a:prstGeom prst="rect">
+            <a:avLst/>
+          </a:prstGeom>
+          <a:noFill/>
+          <a:ln>
+            <a:noFill/>
+          </a:ln>
+        </p:spPr>
+        <p:txBody>
+          <a:bodyPr anchorCtr="0" anchor="t" bIns="0" lIns="0" spcFirstLastPara="1" rIns="0" wrap="square" tIns="0">
+            <a:spAutoFit/>
+          </a:bodyPr>
+          <a:lstStyle/>
+          <a:p>
+            <a:pPr indent="0" lvl="0" marL="12700" rtl="0" algn="l">
+              <a:lnSpc>
+                <a:spcPct val="112500"/>
+              </a:lnSpc>
+              <a:spcBef>
+                <a:spcPts val="0"/>
+              </a:spcBef>
+              <a:spcAft>
+                <a:spcPts val="0"/>
+              </a:spcAft>
+              <a:buNone/>
+            </a:pPr>
+            <a:r>
+              <a:rPr lang="en-US"/>
+              <a:t>Employment and Compensation within AVCs</a:t>
+            </a:r>
+            <a:endParaRPr/>
+          </a:p>
+        </p:txBody>
+      </p:sp>
+      <p:sp>
+        <p:nvSpPr>
+          <p:cNvPr id="410" name="Google Shape;410;p19"/>
+          <p:cNvSpPr txBox="1"/>
+          <p:nvPr>
+            <p:ph idx="10" type="dt"/>
+          </p:nvPr>
+        </p:nvSpPr>
+        <p:spPr>
+          <a:xfrm>
+            <a:off x="4472876" y="3135783"/>
+            <a:ext cx="426000" cy="102300"/>
+          </a:xfrm>
+          <a:prstGeom prst="rect">
+            <a:avLst/>
+          </a:prstGeom>
+          <a:noFill/>
+          <a:ln>
+            <a:noFill/>
+          </a:ln>
+        </p:spPr>
+        <p:txBody>
+          <a:bodyPr anchorCtr="0" anchor="t" bIns="0" lIns="0" spcFirstLastPara="1" rIns="0" wrap="square" tIns="0">
+            <a:spAutoFit/>
+          </a:bodyPr>
+          <a:lstStyle/>
+          <a:p>
+            <a:pPr indent="0" lvl="0" marL="12700" rtl="0" algn="l">
+              <a:lnSpc>
+                <a:spcPct val="112500"/>
+              </a:lnSpc>
+              <a:spcBef>
+                <a:spcPts val="0"/>
+              </a:spcBef>
+              <a:spcAft>
+                <a:spcPts val="0"/>
+              </a:spcAft>
+              <a:buNone/>
+            </a:pPr>
+            <a:r>
+              <a:rPr lang="en-US"/>
+              <a:t>March 2025</a:t>
+            </a:r>
+            <a:endParaRPr/>
+          </a:p>
+        </p:txBody>
+      </p:sp>
+      <p:sp>
+        <p:nvSpPr>
+          <p:cNvPr id="411" name="Google Shape;411;p19"/>
+          <p:cNvSpPr txBox="1"/>
+          <p:nvPr>
+            <p:ph idx="12" type="sldNum"/>
+          </p:nvPr>
+        </p:nvSpPr>
+        <p:spPr>
+          <a:xfrm>
+            <a:off x="5451184" y="3135783"/>
+            <a:ext cx="254100" cy="102300"/>
+          </a:xfrm>
+          <a:prstGeom prst="rect">
+            <a:avLst/>
+          </a:prstGeom>
+          <a:noFill/>
+          <a:ln>
+            <a:noFill/>
+          </a:ln>
+        </p:spPr>
+        <p:txBody>
+          <a:bodyPr anchorCtr="0" anchor="t" bIns="0" lIns="0" spcFirstLastPara="1" rIns="0" wrap="square" tIns="0">
+            <a:spAutoFit/>
+          </a:bodyPr>
+          <a:lstStyle/>
+          <a:p>
+            <a:pPr indent="0" lvl="0" marL="12700" rtl="0" algn="l">
+              <a:lnSpc>
+                <a:spcPct val="112500"/>
+              </a:lnSpc>
+              <a:spcBef>
+                <a:spcPts val="0"/>
+              </a:spcBef>
+              <a:spcAft>
+                <a:spcPts val="0"/>
+              </a:spcAft>
+              <a:buNone/>
+            </a:pPr>
+            <a:fld id="{00000000-1234-1234-1234-123412341234}" type="slidenum">
+              <a:rPr lang="en-US"/>
+              <a:t>‹#›</a:t>
+            </a:fld>
+            <a:r>
+              <a:rPr lang="en-US"/>
+              <a:t> / 18</a:t>
+            </a:r>
+            <a:endParaRPr/>
+          </a:p>
+        </p:txBody>
+      </p:sp>
       <p:grpSp>
         <p:nvGrpSpPr>
-          <p:cNvPr id="405" name="Google Shape;405;p19"/>
+          <p:cNvPr id="412" name="Google Shape;412;p19"/>
           <p:cNvGrpSpPr/>
           <p:nvPr/>
         </p:nvGrpSpPr>
@@ -13262,7 +13779,7 @@
         </p:grpSpPr>
         <p:sp>
           <p:nvSpPr>
-            <p:cNvPr id="406" name="Google Shape;406;p19"/>
+            <p:cNvPr id="413" name="Google Shape;413;p19"/>
             <p:cNvSpPr/>
             <p:nvPr/>
           </p:nvSpPr>
@@ -13295,7 +13812,7 @@
               </a:pathLst>
             </a:custGeom>
             <a:solidFill>
-              <a:srgbClr val="A30000"/>
+              <a:srgbClr val="094183"/>
             </a:solidFill>
             <a:ln>
               <a:noFill/>
@@ -13325,7 +13842,7 @@
         </p:sp>
         <p:sp>
           <p:nvSpPr>
-            <p:cNvPr id="407" name="Google Shape;407;p19"/>
+            <p:cNvPr id="414" name="Google Shape;414;p19"/>
             <p:cNvSpPr/>
             <p:nvPr/>
           </p:nvSpPr>
@@ -13388,7 +13905,7 @@
         </p:sp>
         <p:sp>
           <p:nvSpPr>
-            <p:cNvPr id="408" name="Google Shape;408;p19"/>
+            <p:cNvPr id="415" name="Google Shape;415;p19"/>
             <p:cNvSpPr/>
             <p:nvPr/>
           </p:nvSpPr>
@@ -13452,69 +13969,14 @@
       </p:grpSp>
       <p:sp>
         <p:nvSpPr>
-          <p:cNvPr id="409" name="Google Shape;409;p19"/>
-          <p:cNvSpPr txBox="1"/>
-          <p:nvPr>
-            <p:ph type="title"/>
-          </p:nvPr>
-        </p:nvSpPr>
-        <p:spPr>
-          <a:xfrm>
-            <a:off x="95300" y="72312"/>
-            <a:ext cx="1744200" cy="180900"/>
-          </a:xfrm>
-          <a:prstGeom prst="rect">
-            <a:avLst/>
-          </a:prstGeom>
-          <a:noFill/>
-          <a:ln>
-            <a:noFill/>
-          </a:ln>
-        </p:spPr>
-        <p:txBody>
-          <a:bodyPr anchorCtr="0" anchor="t" bIns="0" lIns="0" spcFirstLastPara="1" rIns="0" wrap="square" tIns="11425">
-            <a:spAutoFit/>
-          </a:bodyPr>
-          <a:lstStyle/>
-          <a:p>
-            <a:pPr indent="0" lvl="0" marL="12700" rtl="0" algn="l">
-              <a:lnSpc>
-                <a:spcPct val="100000"/>
-              </a:lnSpc>
-              <a:spcBef>
-                <a:spcPts val="0"/>
-              </a:spcBef>
-              <a:spcAft>
-                <a:spcPts val="0"/>
-              </a:spcAft>
-              <a:buNone/>
-            </a:pPr>
-            <a:r>
-              <a:rPr lang="en-US">
-                <a:solidFill>
-                  <a:srgbClr val="094183"/>
-                </a:solidFill>
-              </a:rPr>
-              <a:t>Summary</a:t>
-            </a:r>
-            <a:endParaRPr>
-              <a:solidFill>
-                <a:srgbClr val="094183"/>
-              </a:solidFill>
-            </a:endParaRPr>
-          </a:p>
-        </p:txBody>
-      </p:sp>
-      <p:sp>
-        <p:nvSpPr>
-          <p:cNvPr id="410" name="Google Shape;410;p19"/>
+          <p:cNvPr id="416" name="Google Shape;416;p19"/>
           <p:cNvSpPr txBox="1"/>
           <p:nvPr/>
         </p:nvSpPr>
         <p:spPr>
           <a:xfrm>
             <a:off x="83477" y="3135783"/>
-            <a:ext cx="1752600" cy="102235"/>
+            <a:ext cx="1752600" cy="92400"/>
           </a:xfrm>
           <a:prstGeom prst="rect">
             <a:avLst/>
@@ -13552,7 +14014,7 @@
                 <a:cs typeface="Tahoma"/>
                 <a:sym typeface="Tahoma"/>
               </a:rPr>
-              <a:t>Yi, Jiang, Tran, G´omez, Canning, Bloem &amp; Barrett</a:t>
+              <a:t>Jhonatan Parada Torres, Dr. Merlinda Drini</a:t>
             </a:r>
             <a:endParaRPr sz="600">
               <a:latin typeface="Tahoma"/>
@@ -13565,7 +14027,7 @@
       </p:sp>
       <p:sp>
         <p:nvSpPr>
-          <p:cNvPr id="411" name="Google Shape;411;p19"/>
+          <p:cNvPr id="417" name="Google Shape;417;p19"/>
           <p:cNvSpPr txBox="1"/>
           <p:nvPr>
             <p:ph idx="11" type="ftr"/>
@@ -13574,7 +14036,7 @@
         <p:spPr>
           <a:xfrm>
             <a:off x="2111768" y="3135783"/>
-            <a:ext cx="1536700" cy="102235"/>
+            <a:ext cx="1536600" cy="92400"/>
           </a:xfrm>
           <a:prstGeom prst="rect">
             <a:avLst/>
@@ -13603,16 +14065,24 @@
               <a:buNone/>
             </a:pPr>
             <a:r>
-              <a:rPr lang="en-US"/>
-              <a:t>Employment and Compensation within AVCs</a:t>
+              <a:rPr lang="en-US">
+                <a:solidFill>
+                  <a:srgbClr val="094183"/>
+                </a:solidFill>
+              </a:rPr>
+              <a:t>Network IDPS Using Open-Source Tools</a:t>
             </a:r>
-            <a:endParaRPr/>
+            <a:endParaRPr>
+              <a:solidFill>
+                <a:srgbClr val="094183"/>
+              </a:solidFill>
+            </a:endParaRPr>
           </a:p>
         </p:txBody>
       </p:sp>
       <p:sp>
         <p:nvSpPr>
-          <p:cNvPr id="412" name="Google Shape;412;p19"/>
+          <p:cNvPr id="418" name="Google Shape;418;p19"/>
           <p:cNvSpPr txBox="1"/>
           <p:nvPr>
             <p:ph idx="10" type="dt"/>
@@ -13621,7 +14091,7 @@
         <p:spPr>
           <a:xfrm>
             <a:off x="4472876" y="3135783"/>
-            <a:ext cx="426085" cy="102235"/>
+            <a:ext cx="426000" cy="92400"/>
           </a:xfrm>
           <a:prstGeom prst="rect">
             <a:avLst/>
@@ -13650,16 +14120,24 @@
               <a:buNone/>
             </a:pPr>
             <a:r>
-              <a:rPr lang="en-US"/>
-              <a:t>March 2025</a:t>
+              <a:rPr lang="en-US">
+                <a:solidFill>
+                  <a:srgbClr val="094183"/>
+                </a:solidFill>
+              </a:rPr>
+              <a:t>April 2026</a:t>
             </a:r>
-            <a:endParaRPr/>
+            <a:endParaRPr>
+              <a:solidFill>
+                <a:srgbClr val="094183"/>
+              </a:solidFill>
+            </a:endParaRPr>
           </a:p>
         </p:txBody>
       </p:sp>
       <p:sp>
         <p:nvSpPr>
-          <p:cNvPr id="413" name="Google Shape;413;p19"/>
+          <p:cNvPr id="419" name="Google Shape;419;p19"/>
           <p:cNvSpPr txBox="1"/>
           <p:nvPr>
             <p:ph idx="12" type="sldNum"/>
@@ -13668,7 +14146,7 @@
         <p:spPr>
           <a:xfrm>
             <a:off x="5451184" y="3135783"/>
-            <a:ext cx="254000" cy="102235"/>
+            <a:ext cx="254100" cy="92400"/>
           </a:xfrm>
           <a:prstGeom prst="rect">
             <a:avLst/>
@@ -13697,20 +14175,32 @@
               <a:buNone/>
             </a:pPr>
             <a:fld id="{00000000-1234-1234-1234-123412341234}" type="slidenum">
-              <a:rPr lang="en-US"/>
+              <a:rPr lang="en-US">
+                <a:solidFill>
+                  <a:srgbClr val="094183"/>
+                </a:solidFill>
+              </a:rPr>
               <a:t>‹#›</a:t>
             </a:fld>
             <a:r>
-              <a:rPr lang="en-US"/>
+              <a:rPr lang="en-US">
+                <a:solidFill>
+                  <a:srgbClr val="094183"/>
+                </a:solidFill>
+              </a:rPr>
               <a:t> / 18</a:t>
             </a:r>
-            <a:endParaRPr/>
+            <a:endParaRPr>
+              <a:solidFill>
+                <a:srgbClr val="094183"/>
+              </a:solidFill>
+            </a:endParaRPr>
           </a:p>
         </p:txBody>
       </p:sp>
       <p:grpSp>
         <p:nvGrpSpPr>
-          <p:cNvPr id="414" name="Google Shape;414;p19"/>
+          <p:cNvPr id="420" name="Google Shape;420;p19"/>
           <p:cNvGrpSpPr/>
           <p:nvPr/>
         </p:nvGrpSpPr>
@@ -13724,7 +14214,7 @@
         </p:grpSpPr>
         <p:sp>
           <p:nvSpPr>
-            <p:cNvPr id="415" name="Google Shape;415;p19"/>
+            <p:cNvPr id="421" name="Google Shape;421;p19"/>
             <p:cNvSpPr/>
             <p:nvPr/>
           </p:nvSpPr>
@@ -13787,7 +14277,7 @@
         </p:sp>
         <p:sp>
           <p:nvSpPr>
-            <p:cNvPr id="416" name="Google Shape;416;p19"/>
+            <p:cNvPr id="422" name="Google Shape;422;p19"/>
             <p:cNvSpPr/>
             <p:nvPr/>
           </p:nvSpPr>
@@ -13850,7 +14340,7 @@
         </p:sp>
         <p:sp>
           <p:nvSpPr>
-            <p:cNvPr id="417" name="Google Shape;417;p19"/>
+            <p:cNvPr id="423" name="Google Shape;423;p19"/>
             <p:cNvSpPr/>
             <p:nvPr/>
           </p:nvSpPr>
@@ -13914,7 +14404,7 @@
       </p:grpSp>
       <p:sp>
         <p:nvSpPr>
-          <p:cNvPr id="418" name="Google Shape;418;p19"/>
+          <p:cNvPr id="424" name="Google Shape;424;p19"/>
           <p:cNvSpPr txBox="1"/>
           <p:nvPr/>
         </p:nvSpPr>
@@ -13959,7 +14449,7 @@
                 <a:cs typeface="Tahoma"/>
                 <a:sym typeface="Tahoma"/>
               </a:rPr>
-              <a:t>Jhonatan Parada Torres, Dr. Merlinda Drini</a:t>
+              <a:t>Jhonatan Parada Torres, Dr. Guozhen An</a:t>
             </a:r>
             <a:endParaRPr sz="600">
               <a:latin typeface="Tahoma"/>
@@ -13972,7 +14462,7 @@
       </p:sp>
       <p:sp>
         <p:nvSpPr>
-          <p:cNvPr id="419" name="Google Shape;419;p19"/>
+          <p:cNvPr id="425" name="Google Shape;425;p19"/>
           <p:cNvSpPr txBox="1"/>
           <p:nvPr>
             <p:ph idx="11" type="ftr"/>
@@ -13997,7 +14487,7 @@
           </a:bodyPr>
           <a:lstStyle/>
           <a:p>
-            <a:pPr indent="0" lvl="0" marL="12700" rtl="0" algn="l">
+            <a:pPr indent="0" lvl="0" marL="0" rtl="0" algn="ctr">
               <a:lnSpc>
                 <a:spcPct val="112500"/>
               </a:lnSpc>
@@ -14015,7 +14505,7 @@
                   <a:srgbClr val="094183"/>
                 </a:solidFill>
               </a:rPr>
-              <a:t>Network IDPS Using Open-Source Tools</a:t>
+              <a:t>System of MBTI personality Recognition</a:t>
             </a:r>
             <a:endParaRPr>
               <a:solidFill>
@@ -14027,7 +14517,7 @@
       </p:sp>
       <p:sp>
         <p:nvSpPr>
-          <p:cNvPr id="420" name="Google Shape;420;p19"/>
+          <p:cNvPr id="426" name="Google Shape;426;p19"/>
           <p:cNvSpPr txBox="1"/>
           <p:nvPr>
             <p:ph idx="10" type="dt"/>
@@ -14082,7 +14572,7 @@
       </p:sp>
       <p:sp>
         <p:nvSpPr>
-          <p:cNvPr id="421" name="Google Shape;421;p19"/>
+          <p:cNvPr id="427" name="Google Shape;427;p19"/>
           <p:cNvSpPr txBox="1"/>
           <p:nvPr>
             <p:ph idx="12" type="sldNum"/>
@@ -14143,220 +14633,24 @@
           </a:p>
         </p:txBody>
       </p:sp>
-      <p:grpSp>
-        <p:nvGrpSpPr>
-          <p:cNvPr id="422" name="Google Shape;422;p19"/>
-          <p:cNvGrpSpPr/>
+      <p:pic>
+        <p:nvPicPr>
+          <p:cNvPr id="428" name="Google Shape;428;p19"/>
+          <p:cNvPicPr preferRelativeResize="0"/>
           <p:nvPr/>
-        </p:nvGrpSpPr>
-        <p:grpSpPr>
-          <a:xfrm>
-            <a:off x="0" y="3130346"/>
-            <a:ext cx="5760185" cy="109855"/>
-            <a:chOff x="0" y="3130346"/>
-            <a:chExt cx="5760185" cy="109855"/>
-          </a:xfrm>
-        </p:grpSpPr>
-        <p:sp>
-          <p:nvSpPr>
-            <p:cNvPr id="423" name="Google Shape;423;p19"/>
-            <p:cNvSpPr/>
-            <p:nvPr/>
-          </p:nvSpPr>
-          <p:spPr>
-            <a:xfrm>
-              <a:off x="0" y="3130346"/>
-              <a:ext cx="1920239" cy="109855"/>
-            </a:xfrm>
-            <a:custGeom>
-              <a:rect b="b" l="l" r="r" t="t"/>
-              <a:pathLst>
-                <a:path extrusionOk="0" h="109855" w="1920239">
-                  <a:moveTo>
-                    <a:pt x="1919973" y="0"/>
-                  </a:moveTo>
-                  <a:lnTo>
-                    <a:pt x="0" y="0"/>
-                  </a:lnTo>
-                  <a:lnTo>
-                    <a:pt x="0" y="109651"/>
-                  </a:lnTo>
-                  <a:lnTo>
-                    <a:pt x="1919973" y="109651"/>
-                  </a:lnTo>
-                  <a:lnTo>
-                    <a:pt x="1919973" y="0"/>
-                  </a:lnTo>
-                  <a:close/>
-                </a:path>
-              </a:pathLst>
-            </a:custGeom>
-            <a:solidFill>
-              <a:srgbClr val="094183"/>
-            </a:solidFill>
-            <a:ln>
-              <a:noFill/>
-            </a:ln>
-          </p:spPr>
-          <p:txBody>
-            <a:bodyPr anchorCtr="0" anchor="t" bIns="0" lIns="0" spcFirstLastPara="1" rIns="0" wrap="square" tIns="0">
-              <a:noAutofit/>
-            </a:bodyPr>
-            <a:lstStyle/>
-            <a:p>
-              <a:pPr indent="0" lvl="0" marL="0" rtl="0" algn="l">
-                <a:spcBef>
-                  <a:spcPts val="0"/>
-                </a:spcBef>
-                <a:spcAft>
-                  <a:spcPts val="0"/>
-                </a:spcAft>
-                <a:buNone/>
-              </a:pPr>
-              <a:r>
-                <a:t/>
-              </a:r>
-              <a:endParaRPr/>
-            </a:p>
-          </p:txBody>
-        </p:sp>
-        <p:sp>
-          <p:nvSpPr>
-            <p:cNvPr id="424" name="Google Shape;424;p19"/>
-            <p:cNvSpPr/>
-            <p:nvPr/>
-          </p:nvSpPr>
-          <p:spPr>
-            <a:xfrm>
-              <a:off x="1919973" y="3130346"/>
-              <a:ext cx="1920239" cy="109855"/>
-            </a:xfrm>
-            <a:custGeom>
-              <a:rect b="b" l="l" r="r" t="t"/>
-              <a:pathLst>
-                <a:path extrusionOk="0" h="109855" w="1920239">
-                  <a:moveTo>
-                    <a:pt x="1919973" y="0"/>
-                  </a:moveTo>
-                  <a:lnTo>
-                    <a:pt x="0" y="0"/>
-                  </a:lnTo>
-                  <a:lnTo>
-                    <a:pt x="0" y="109651"/>
-                  </a:lnTo>
-                  <a:lnTo>
-                    <a:pt x="1919973" y="109651"/>
-                  </a:lnTo>
-                  <a:lnTo>
-                    <a:pt x="1919973" y="0"/>
-                  </a:lnTo>
-                  <a:close/>
-                </a:path>
-              </a:pathLst>
-            </a:custGeom>
-            <a:solidFill>
-              <a:srgbClr val="EBEBEB"/>
-            </a:solidFill>
-            <a:ln>
-              <a:noFill/>
-            </a:ln>
-          </p:spPr>
-          <p:txBody>
-            <a:bodyPr anchorCtr="0" anchor="t" bIns="0" lIns="0" spcFirstLastPara="1" rIns="0" wrap="square" tIns="0">
-              <a:noAutofit/>
-            </a:bodyPr>
-            <a:lstStyle/>
-            <a:p>
-              <a:pPr indent="0" lvl="0" marL="0" rtl="0" algn="l">
-                <a:spcBef>
-                  <a:spcPts val="0"/>
-                </a:spcBef>
-                <a:spcAft>
-                  <a:spcPts val="0"/>
-                </a:spcAft>
-                <a:buNone/>
-              </a:pPr>
-              <a:r>
-                <a:t/>
-              </a:r>
-              <a:endParaRPr/>
-            </a:p>
-          </p:txBody>
-        </p:sp>
-        <p:sp>
-          <p:nvSpPr>
-            <p:cNvPr id="425" name="Google Shape;425;p19"/>
-            <p:cNvSpPr/>
-            <p:nvPr/>
-          </p:nvSpPr>
-          <p:spPr>
-            <a:xfrm>
-              <a:off x="3839946" y="3130346"/>
-              <a:ext cx="1920239" cy="109855"/>
-            </a:xfrm>
-            <a:custGeom>
-              <a:rect b="b" l="l" r="r" t="t"/>
-              <a:pathLst>
-                <a:path extrusionOk="0" h="109855" w="1920239">
-                  <a:moveTo>
-                    <a:pt x="1919973" y="0"/>
-                  </a:moveTo>
-                  <a:lnTo>
-                    <a:pt x="0" y="0"/>
-                  </a:lnTo>
-                  <a:lnTo>
-                    <a:pt x="0" y="109651"/>
-                  </a:lnTo>
-                  <a:lnTo>
-                    <a:pt x="1919973" y="109651"/>
-                  </a:lnTo>
-                  <a:lnTo>
-                    <a:pt x="1919973" y="0"/>
-                  </a:lnTo>
-                  <a:close/>
-                </a:path>
-              </a:pathLst>
-            </a:custGeom>
-            <a:solidFill>
-              <a:srgbClr val="D8D8D8"/>
-            </a:solidFill>
-            <a:ln>
-              <a:noFill/>
-            </a:ln>
-          </p:spPr>
-          <p:txBody>
-            <a:bodyPr anchorCtr="0" anchor="t" bIns="0" lIns="0" spcFirstLastPara="1" rIns="0" wrap="square" tIns="0">
-              <a:noAutofit/>
-            </a:bodyPr>
-            <a:lstStyle/>
-            <a:p>
-              <a:pPr indent="0" lvl="0" marL="0" rtl="0" algn="l">
-                <a:spcBef>
-                  <a:spcPts val="0"/>
-                </a:spcBef>
-                <a:spcAft>
-                  <a:spcPts val="0"/>
-                </a:spcAft>
-                <a:buNone/>
-              </a:pPr>
-              <a:r>
-                <a:t/>
-              </a:r>
-              <a:endParaRPr/>
-            </a:p>
-          </p:txBody>
-        </p:sp>
-      </p:grpSp>
-      <p:sp>
-        <p:nvSpPr>
-          <p:cNvPr id="426" name="Google Shape;426;p19"/>
-          <p:cNvSpPr txBox="1"/>
-          <p:nvPr/>
-        </p:nvSpPr>
+        </p:nvPicPr>
+        <p:blipFill>
+          <a:blip r:embed="rId3">
+            <a:alphaModFix/>
+          </a:blip>
+          <a:stretch>
+            <a:fillRect/>
+          </a:stretch>
+        </p:blipFill>
         <p:spPr>
           <a:xfrm>
-            <a:off x="83477" y="3135783"/>
-            <a:ext cx="1752600" cy="92400"/>
+            <a:off x="152400" y="365270"/>
+            <a:ext cx="1907760" cy="2572368"/>
           </a:xfrm>
           <a:prstGeom prst="rect">
             <a:avLst/>
@@ -14366,57 +14660,25 @@
             <a:noFill/>
           </a:ln>
         </p:spPr>
-        <p:txBody>
-          <a:bodyPr anchorCtr="0" anchor="t" bIns="0" lIns="0" spcFirstLastPara="1" rIns="0" wrap="square" tIns="0">
-            <a:spAutoFit/>
-          </a:bodyPr>
-          <a:lstStyle/>
-          <a:p>
-            <a:pPr indent="0" lvl="0" marL="12700" rtl="0" algn="l">
-              <a:lnSpc>
-                <a:spcPct val="112500"/>
-              </a:lnSpc>
-              <a:spcBef>
-                <a:spcPts val="0"/>
-              </a:spcBef>
-              <a:spcAft>
-                <a:spcPts val="0"/>
-              </a:spcAft>
-              <a:buNone/>
-            </a:pPr>
-            <a:r>
-              <a:rPr lang="en-US" sz="600">
-                <a:solidFill>
-                  <a:srgbClr val="F2F2F2"/>
-                </a:solidFill>
-                <a:latin typeface="Tahoma"/>
-                <a:ea typeface="Tahoma"/>
-                <a:cs typeface="Tahoma"/>
-                <a:sym typeface="Tahoma"/>
-              </a:rPr>
-              <a:t>Jhonatan Parada Torres, Dr. Guozhen An</a:t>
-            </a:r>
-            <a:endParaRPr sz="600">
-              <a:latin typeface="Tahoma"/>
-              <a:ea typeface="Tahoma"/>
-              <a:cs typeface="Tahoma"/>
-              <a:sym typeface="Tahoma"/>
-            </a:endParaRPr>
-          </a:p>
-        </p:txBody>
-      </p:sp>
-      <p:sp>
-        <p:nvSpPr>
-          <p:cNvPr id="427" name="Google Shape;427;p19"/>
-          <p:cNvSpPr txBox="1"/>
-          <p:nvPr>
-            <p:ph idx="11" type="ftr"/>
-          </p:nvPr>
-        </p:nvSpPr>
+      </p:pic>
+      <p:pic>
+        <p:nvPicPr>
+          <p:cNvPr id="429" name="Google Shape;429;p19"/>
+          <p:cNvPicPr preferRelativeResize="0"/>
+          <p:nvPr/>
+        </p:nvPicPr>
+        <p:blipFill>
+          <a:blip r:embed="rId4">
+            <a:alphaModFix/>
+          </a:blip>
+          <a:stretch>
+            <a:fillRect/>
+          </a:stretch>
+        </p:blipFill>
         <p:spPr>
           <a:xfrm>
-            <a:off x="2111768" y="3135783"/>
-            <a:ext cx="1536600" cy="92400"/>
+            <a:off x="2111774" y="382936"/>
+            <a:ext cx="3465850" cy="2464200"/>
           </a:xfrm>
           <a:prstGeom prst="rect">
             <a:avLst/>
@@ -14426,158 +14688,7 @@
             <a:noFill/>
           </a:ln>
         </p:spPr>
-        <p:txBody>
-          <a:bodyPr anchorCtr="0" anchor="t" bIns="0" lIns="0" spcFirstLastPara="1" rIns="0" wrap="square" tIns="0">
-            <a:spAutoFit/>
-          </a:bodyPr>
-          <a:lstStyle/>
-          <a:p>
-            <a:pPr indent="0" lvl="0" marL="0" rtl="0" algn="ctr">
-              <a:lnSpc>
-                <a:spcPct val="112500"/>
-              </a:lnSpc>
-              <a:spcBef>
-                <a:spcPts val="0"/>
-              </a:spcBef>
-              <a:spcAft>
-                <a:spcPts val="0"/>
-              </a:spcAft>
-              <a:buNone/>
-            </a:pPr>
-            <a:r>
-              <a:rPr lang="en-US">
-                <a:solidFill>
-                  <a:srgbClr val="094183"/>
-                </a:solidFill>
-              </a:rPr>
-              <a:t>System of MBTI personality Recognition</a:t>
-            </a:r>
-            <a:endParaRPr>
-              <a:solidFill>
-                <a:srgbClr val="094183"/>
-              </a:solidFill>
-            </a:endParaRPr>
-          </a:p>
-        </p:txBody>
-      </p:sp>
-      <p:sp>
-        <p:nvSpPr>
-          <p:cNvPr id="428" name="Google Shape;428;p19"/>
-          <p:cNvSpPr txBox="1"/>
-          <p:nvPr>
-            <p:ph idx="10" type="dt"/>
-          </p:nvPr>
-        </p:nvSpPr>
-        <p:spPr>
-          <a:xfrm>
-            <a:off x="4472876" y="3135783"/>
-            <a:ext cx="426000" cy="92400"/>
-          </a:xfrm>
-          <a:prstGeom prst="rect">
-            <a:avLst/>
-          </a:prstGeom>
-          <a:noFill/>
-          <a:ln>
-            <a:noFill/>
-          </a:ln>
-        </p:spPr>
-        <p:txBody>
-          <a:bodyPr anchorCtr="0" anchor="t" bIns="0" lIns="0" spcFirstLastPara="1" rIns="0" wrap="square" tIns="0">
-            <a:spAutoFit/>
-          </a:bodyPr>
-          <a:lstStyle/>
-          <a:p>
-            <a:pPr indent="0" lvl="0" marL="12700" rtl="0" algn="l">
-              <a:lnSpc>
-                <a:spcPct val="112500"/>
-              </a:lnSpc>
-              <a:spcBef>
-                <a:spcPts val="0"/>
-              </a:spcBef>
-              <a:spcAft>
-                <a:spcPts val="0"/>
-              </a:spcAft>
-              <a:buNone/>
-            </a:pPr>
-            <a:r>
-              <a:rPr lang="en-US">
-                <a:solidFill>
-                  <a:srgbClr val="094183"/>
-                </a:solidFill>
-              </a:rPr>
-              <a:t>April 2026</a:t>
-            </a:r>
-            <a:endParaRPr>
-              <a:solidFill>
-                <a:srgbClr val="094183"/>
-              </a:solidFill>
-            </a:endParaRPr>
-          </a:p>
-        </p:txBody>
-      </p:sp>
-      <p:sp>
-        <p:nvSpPr>
-          <p:cNvPr id="429" name="Google Shape;429;p19"/>
-          <p:cNvSpPr txBox="1"/>
-          <p:nvPr>
-            <p:ph idx="12" type="sldNum"/>
-          </p:nvPr>
-        </p:nvSpPr>
-        <p:spPr>
-          <a:xfrm>
-            <a:off x="5451184" y="3135783"/>
-            <a:ext cx="254100" cy="92400"/>
-          </a:xfrm>
-          <a:prstGeom prst="rect">
-            <a:avLst/>
-          </a:prstGeom>
-          <a:noFill/>
-          <a:ln>
-            <a:noFill/>
-          </a:ln>
-        </p:spPr>
-        <p:txBody>
-          <a:bodyPr anchorCtr="0" anchor="t" bIns="0" lIns="0" spcFirstLastPara="1" rIns="0" wrap="square" tIns="0">
-            <a:spAutoFit/>
-          </a:bodyPr>
-          <a:lstStyle/>
-          <a:p>
-            <a:pPr indent="0" lvl="0" marL="12700" rtl="0" algn="l">
-              <a:lnSpc>
-                <a:spcPct val="112500"/>
-              </a:lnSpc>
-              <a:spcBef>
-                <a:spcPts val="0"/>
-              </a:spcBef>
-              <a:spcAft>
-                <a:spcPts val="0"/>
-              </a:spcAft>
-              <a:buNone/>
-            </a:pPr>
-            <a:fld id="{00000000-1234-1234-1234-123412341234}" type="slidenum">
-              <a:rPr lang="en-US">
-                <a:solidFill>
-                  <a:srgbClr val="094183"/>
-                </a:solidFill>
-              </a:rPr>
-              <a:t>‹#›</a:t>
-            </a:fld>
-            <a:r>
-              <a:rPr lang="en-US">
-                <a:solidFill>
-                  <a:srgbClr val="094183"/>
-                </a:solidFill>
-              </a:rPr>
-              <a:t> / 18</a:t>
-            </a:r>
-            <a:endParaRPr>
-              <a:solidFill>
-                <a:srgbClr val="094183"/>
-              </a:solidFill>
-            </a:endParaRPr>
-          </a:p>
-        </p:txBody>
-      </p:sp>
+      </p:pic>
     </p:spTree>
   </p:cSld>
   <p:clrMapOvr>
@@ -14814,12 +14925,14 @@
         <p:nvSpPr>
           <p:cNvPr id="438" name="Google Shape;438;p20"/>
           <p:cNvSpPr txBox="1"/>
-          <p:nvPr/>
+          <p:nvPr>
+            <p:ph type="title"/>
+          </p:nvPr>
         </p:nvSpPr>
         <p:spPr>
           <a:xfrm>
-            <a:off x="1166329" y="919820"/>
-            <a:ext cx="3429000" cy="381600"/>
+            <a:off x="95300" y="72312"/>
+            <a:ext cx="1744200" cy="180900"/>
           </a:xfrm>
           <a:prstGeom prst="rect">
             <a:avLst/>
@@ -14830,12 +14943,12 @@
           </a:ln>
         </p:spPr>
         <p:txBody>
-          <a:bodyPr anchorCtr="0" anchor="t" bIns="0" lIns="0" spcFirstLastPara="1" rIns="0" wrap="square" tIns="12050">
+          <a:bodyPr anchorCtr="0" anchor="t" bIns="0" lIns="0" spcFirstLastPara="1" rIns="0" wrap="square" tIns="11425">
             <a:spAutoFit/>
           </a:bodyPr>
           <a:lstStyle/>
           <a:p>
-            <a:pPr indent="0" lvl="0" marL="0" rtl="0" algn="ctr">
+            <a:pPr indent="0" lvl="0" marL="12700" rtl="0" algn="l">
               <a:lnSpc>
                 <a:spcPct val="100000"/>
               </a:lnSpc>
@@ -14848,25 +14961,17 @@
               <a:buNone/>
             </a:pPr>
             <a:r>
-              <a:rPr lang="en-US" sz="1200">
+              <a:rPr lang="en-US">
                 <a:solidFill>
                   <a:srgbClr val="094183"/>
                 </a:solidFill>
-                <a:latin typeface="Tahoma"/>
-                <a:ea typeface="Tahoma"/>
-                <a:cs typeface="Tahoma"/>
-                <a:sym typeface="Tahoma"/>
               </a:rPr>
-              <a:t>Thank you for your interest, questions, and comments!</a:t>
+              <a:t>Summary</a:t>
             </a:r>
-            <a:endParaRPr sz="1200">
+            <a:endParaRPr>
               <a:solidFill>
                 <a:srgbClr val="094183"/>
               </a:solidFill>
-              <a:latin typeface="Tahoma"/>
-              <a:ea typeface="Tahoma"/>
-              <a:cs typeface="Tahoma"/>
-              <a:sym typeface="Tahoma"/>
             </a:endParaRPr>
           </a:p>
         </p:txBody>
@@ -15884,6 +15989,2821 @@
       <p:sp>
         <p:nvSpPr>
           <p:cNvPr id="458" name="Google Shape;458;p20"/>
+          <p:cNvSpPr txBox="1"/>
+          <p:nvPr>
+            <p:ph idx="12" type="sldNum"/>
+          </p:nvPr>
+        </p:nvSpPr>
+        <p:spPr>
+          <a:xfrm>
+            <a:off x="5451184" y="3135783"/>
+            <a:ext cx="254100" cy="92400"/>
+          </a:xfrm>
+          <a:prstGeom prst="rect">
+            <a:avLst/>
+          </a:prstGeom>
+          <a:noFill/>
+          <a:ln>
+            <a:noFill/>
+          </a:ln>
+        </p:spPr>
+        <p:txBody>
+          <a:bodyPr anchorCtr="0" anchor="t" bIns="0" lIns="0" spcFirstLastPara="1" rIns="0" wrap="square" tIns="0">
+            <a:spAutoFit/>
+          </a:bodyPr>
+          <a:lstStyle/>
+          <a:p>
+            <a:pPr indent="0" lvl="0" marL="12700" rtl="0" algn="l">
+              <a:lnSpc>
+                <a:spcPct val="112500"/>
+              </a:lnSpc>
+              <a:spcBef>
+                <a:spcPts val="0"/>
+              </a:spcBef>
+              <a:spcAft>
+                <a:spcPts val="0"/>
+              </a:spcAft>
+              <a:buNone/>
+            </a:pPr>
+            <a:fld id="{00000000-1234-1234-1234-123412341234}" type="slidenum">
+              <a:rPr lang="en-US">
+                <a:solidFill>
+                  <a:srgbClr val="094183"/>
+                </a:solidFill>
+              </a:rPr>
+              <a:t>‹#›</a:t>
+            </a:fld>
+            <a:r>
+              <a:rPr lang="en-US">
+                <a:solidFill>
+                  <a:srgbClr val="094183"/>
+                </a:solidFill>
+              </a:rPr>
+              <a:t> / 18</a:t>
+            </a:r>
+            <a:endParaRPr>
+              <a:solidFill>
+                <a:srgbClr val="094183"/>
+              </a:solidFill>
+            </a:endParaRPr>
+          </a:p>
+        </p:txBody>
+      </p:sp>
+      <p:pic>
+        <p:nvPicPr>
+          <p:cNvPr id="459" name="Google Shape;459;p20"/>
+          <p:cNvPicPr preferRelativeResize="0"/>
+          <p:nvPr/>
+        </p:nvPicPr>
+        <p:blipFill>
+          <a:blip r:embed="rId3">
+            <a:alphaModFix/>
+          </a:blip>
+          <a:stretch>
+            <a:fillRect/>
+          </a:stretch>
+        </p:blipFill>
+        <p:spPr>
+          <a:xfrm>
+            <a:off x="850087" y="481112"/>
+            <a:ext cx="4059974" cy="2282625"/>
+          </a:xfrm>
+          <a:prstGeom prst="rect">
+            <a:avLst/>
+          </a:prstGeom>
+          <a:noFill/>
+          <a:ln>
+            <a:noFill/>
+          </a:ln>
+        </p:spPr>
+      </p:pic>
+    </p:spTree>
+  </p:cSld>
+  <p:clrMapOvr>
+    <a:masterClrMapping/>
+  </p:clrMapOvr>
+  <p:transition>
+    <p:fade thruBlk="1"/>
+  </p:transition>
+</p:sld>
+</file>
+
+<file path=ppt/slides/slide15.xml><?xml version="1.0" encoding="utf-8"?>
+<p:sld xmlns:a="http://schemas.openxmlformats.org/drawingml/2006/main" xmlns:r="http://schemas.openxmlformats.org/officeDocument/2006/relationships" xmlns:mc="http://schemas.openxmlformats.org/markup-compatibility/2006" xmlns:mv="urn:schemas-microsoft-com:mac:vml" xmlns:p="http://schemas.openxmlformats.org/presentationml/2006/main" xmlns:c="http://schemas.openxmlformats.org/drawingml/2006/chart" xmlns:dgm="http://schemas.openxmlformats.org/drawingml/2006/diagram" xmlns:o="urn:schemas-microsoft-com:office:office" xmlns:v="urn:schemas-microsoft-com:vml" xmlns:pvml="urn:schemas-microsoft-com:office:powerpoint" xmlns:com="http://schemas.openxmlformats.org/drawingml/2006/compatibility" xmlns:p14="http://schemas.microsoft.com/office/powerpoint/2010/main" xmlns:p15="http://schemas.microsoft.com/office/powerpoint/2012/main" xmlns:ahyp="http://schemas.microsoft.com/office/drawing/2018/hyperlinkcolor">
+  <p:cSld>
+    <p:spTree>
+      <p:nvGrpSpPr>
+        <p:cNvPr id="463" name="Shape 463"/>
+        <p:cNvGrpSpPr/>
+        <p:nvPr/>
+      </p:nvGrpSpPr>
+      <p:grpSpPr>
+        <a:xfrm>
+          <a:off x="0" y="0"/>
+          <a:ext cx="0" cy="0"/>
+          <a:chOff x="0" y="0"/>
+          <a:chExt cx="0" cy="0"/>
+        </a:xfrm>
+      </p:grpSpPr>
+      <p:grpSp>
+        <p:nvGrpSpPr>
+          <p:cNvPr id="464" name="Google Shape;464;p21"/>
+          <p:cNvGrpSpPr/>
+          <p:nvPr/>
+        </p:nvGrpSpPr>
+        <p:grpSpPr>
+          <a:xfrm>
+            <a:off x="0" y="3130346"/>
+            <a:ext cx="5760185" cy="109855"/>
+            <a:chOff x="0" y="3130346"/>
+            <a:chExt cx="5760185" cy="109855"/>
+          </a:xfrm>
+        </p:grpSpPr>
+        <p:sp>
+          <p:nvSpPr>
+            <p:cNvPr id="465" name="Google Shape;465;p21"/>
+            <p:cNvSpPr/>
+            <p:nvPr/>
+          </p:nvSpPr>
+          <p:spPr>
+            <a:xfrm>
+              <a:off x="0" y="3130346"/>
+              <a:ext cx="1920239" cy="109855"/>
+            </a:xfrm>
+            <a:custGeom>
+              <a:rect b="b" l="l" r="r" t="t"/>
+              <a:pathLst>
+                <a:path extrusionOk="0" h="109855" w="1920239">
+                  <a:moveTo>
+                    <a:pt x="1919973" y="0"/>
+                  </a:moveTo>
+                  <a:lnTo>
+                    <a:pt x="0" y="0"/>
+                  </a:lnTo>
+                  <a:lnTo>
+                    <a:pt x="0" y="109651"/>
+                  </a:lnTo>
+                  <a:lnTo>
+                    <a:pt x="1919973" y="109651"/>
+                  </a:lnTo>
+                  <a:lnTo>
+                    <a:pt x="1919973" y="0"/>
+                  </a:lnTo>
+                  <a:close/>
+                </a:path>
+              </a:pathLst>
+            </a:custGeom>
+            <a:solidFill>
+              <a:srgbClr val="A30000"/>
+            </a:solidFill>
+            <a:ln>
+              <a:noFill/>
+            </a:ln>
+          </p:spPr>
+          <p:txBody>
+            <a:bodyPr anchorCtr="0" anchor="t" bIns="0" lIns="0" spcFirstLastPara="1" rIns="0" wrap="square" tIns="0">
+              <a:noAutofit/>
+            </a:bodyPr>
+            <a:lstStyle/>
+            <a:p>
+              <a:pPr indent="0" lvl="0" marL="0" rtl="0" algn="l">
+                <a:spcBef>
+                  <a:spcPts val="0"/>
+                </a:spcBef>
+                <a:spcAft>
+                  <a:spcPts val="0"/>
+                </a:spcAft>
+                <a:buNone/>
+              </a:pPr>
+              <a:r>
+                <a:t/>
+              </a:r>
+              <a:endParaRPr/>
+            </a:p>
+          </p:txBody>
+        </p:sp>
+        <p:sp>
+          <p:nvSpPr>
+            <p:cNvPr id="466" name="Google Shape;466;p21"/>
+            <p:cNvSpPr/>
+            <p:nvPr/>
+          </p:nvSpPr>
+          <p:spPr>
+            <a:xfrm>
+              <a:off x="1919973" y="3130346"/>
+              <a:ext cx="1920239" cy="109855"/>
+            </a:xfrm>
+            <a:custGeom>
+              <a:rect b="b" l="l" r="r" t="t"/>
+              <a:pathLst>
+                <a:path extrusionOk="0" h="109855" w="1920239">
+                  <a:moveTo>
+                    <a:pt x="1919973" y="0"/>
+                  </a:moveTo>
+                  <a:lnTo>
+                    <a:pt x="0" y="0"/>
+                  </a:lnTo>
+                  <a:lnTo>
+                    <a:pt x="0" y="109651"/>
+                  </a:lnTo>
+                  <a:lnTo>
+                    <a:pt x="1919973" y="109651"/>
+                  </a:lnTo>
+                  <a:lnTo>
+                    <a:pt x="1919973" y="0"/>
+                  </a:lnTo>
+                  <a:close/>
+                </a:path>
+              </a:pathLst>
+            </a:custGeom>
+            <a:solidFill>
+              <a:srgbClr val="EBEBEB"/>
+            </a:solidFill>
+            <a:ln>
+              <a:noFill/>
+            </a:ln>
+          </p:spPr>
+          <p:txBody>
+            <a:bodyPr anchorCtr="0" anchor="t" bIns="0" lIns="0" spcFirstLastPara="1" rIns="0" wrap="square" tIns="0">
+              <a:noAutofit/>
+            </a:bodyPr>
+            <a:lstStyle/>
+            <a:p>
+              <a:pPr indent="0" lvl="0" marL="0" rtl="0" algn="l">
+                <a:spcBef>
+                  <a:spcPts val="0"/>
+                </a:spcBef>
+                <a:spcAft>
+                  <a:spcPts val="0"/>
+                </a:spcAft>
+                <a:buNone/>
+              </a:pPr>
+              <a:r>
+                <a:t/>
+              </a:r>
+              <a:endParaRPr/>
+            </a:p>
+          </p:txBody>
+        </p:sp>
+        <p:sp>
+          <p:nvSpPr>
+            <p:cNvPr id="467" name="Google Shape;467;p21"/>
+            <p:cNvSpPr/>
+            <p:nvPr/>
+          </p:nvSpPr>
+          <p:spPr>
+            <a:xfrm>
+              <a:off x="3839946" y="3130346"/>
+              <a:ext cx="1920239" cy="109855"/>
+            </a:xfrm>
+            <a:custGeom>
+              <a:rect b="b" l="l" r="r" t="t"/>
+              <a:pathLst>
+                <a:path extrusionOk="0" h="109855" w="1920239">
+                  <a:moveTo>
+                    <a:pt x="1919973" y="0"/>
+                  </a:moveTo>
+                  <a:lnTo>
+                    <a:pt x="0" y="0"/>
+                  </a:lnTo>
+                  <a:lnTo>
+                    <a:pt x="0" y="109651"/>
+                  </a:lnTo>
+                  <a:lnTo>
+                    <a:pt x="1919973" y="109651"/>
+                  </a:lnTo>
+                  <a:lnTo>
+                    <a:pt x="1919973" y="0"/>
+                  </a:lnTo>
+                  <a:close/>
+                </a:path>
+              </a:pathLst>
+            </a:custGeom>
+            <a:solidFill>
+              <a:srgbClr val="D8D8D8"/>
+            </a:solidFill>
+            <a:ln>
+              <a:noFill/>
+            </a:ln>
+          </p:spPr>
+          <p:txBody>
+            <a:bodyPr anchorCtr="0" anchor="t" bIns="0" lIns="0" spcFirstLastPara="1" rIns="0" wrap="square" tIns="0">
+              <a:noAutofit/>
+            </a:bodyPr>
+            <a:lstStyle/>
+            <a:p>
+              <a:pPr indent="0" lvl="0" marL="0" rtl="0" algn="l">
+                <a:spcBef>
+                  <a:spcPts val="0"/>
+                </a:spcBef>
+                <a:spcAft>
+                  <a:spcPts val="0"/>
+                </a:spcAft>
+                <a:buNone/>
+              </a:pPr>
+              <a:r>
+                <a:t/>
+              </a:r>
+              <a:endParaRPr/>
+            </a:p>
+          </p:txBody>
+        </p:sp>
+      </p:grpSp>
+      <p:sp>
+        <p:nvSpPr>
+          <p:cNvPr id="468" name="Google Shape;468;p21"/>
+          <p:cNvSpPr txBox="1"/>
+          <p:nvPr>
+            <p:ph type="title"/>
+          </p:nvPr>
+        </p:nvSpPr>
+        <p:spPr>
+          <a:xfrm>
+            <a:off x="95300" y="72312"/>
+            <a:ext cx="1744200" cy="180900"/>
+          </a:xfrm>
+          <a:prstGeom prst="rect">
+            <a:avLst/>
+          </a:prstGeom>
+          <a:noFill/>
+          <a:ln>
+            <a:noFill/>
+          </a:ln>
+        </p:spPr>
+        <p:txBody>
+          <a:bodyPr anchorCtr="0" anchor="t" bIns="0" lIns="0" spcFirstLastPara="1" rIns="0" wrap="square" tIns="11425">
+            <a:spAutoFit/>
+          </a:bodyPr>
+          <a:lstStyle/>
+          <a:p>
+            <a:pPr indent="0" lvl="0" marL="12700" rtl="0" algn="l">
+              <a:lnSpc>
+                <a:spcPct val="100000"/>
+              </a:lnSpc>
+              <a:spcBef>
+                <a:spcPts val="0"/>
+              </a:spcBef>
+              <a:spcAft>
+                <a:spcPts val="0"/>
+              </a:spcAft>
+              <a:buNone/>
+            </a:pPr>
+            <a:r>
+              <a:rPr lang="en-US">
+                <a:solidFill>
+                  <a:srgbClr val="094183"/>
+                </a:solidFill>
+              </a:rPr>
+              <a:t>Summary</a:t>
+            </a:r>
+            <a:endParaRPr>
+              <a:solidFill>
+                <a:srgbClr val="094183"/>
+              </a:solidFill>
+            </a:endParaRPr>
+          </a:p>
+        </p:txBody>
+      </p:sp>
+      <p:sp>
+        <p:nvSpPr>
+          <p:cNvPr id="469" name="Google Shape;469;p21"/>
+          <p:cNvSpPr txBox="1"/>
+          <p:nvPr/>
+        </p:nvSpPr>
+        <p:spPr>
+          <a:xfrm>
+            <a:off x="83477" y="3135783"/>
+            <a:ext cx="1752600" cy="92400"/>
+          </a:xfrm>
+          <a:prstGeom prst="rect">
+            <a:avLst/>
+          </a:prstGeom>
+          <a:noFill/>
+          <a:ln>
+            <a:noFill/>
+          </a:ln>
+        </p:spPr>
+        <p:txBody>
+          <a:bodyPr anchorCtr="0" anchor="t" bIns="0" lIns="0" spcFirstLastPara="1" rIns="0" wrap="square" tIns="0">
+            <a:spAutoFit/>
+          </a:bodyPr>
+          <a:lstStyle/>
+          <a:p>
+            <a:pPr indent="0" lvl="0" marL="12700" rtl="0" algn="l">
+              <a:lnSpc>
+                <a:spcPct val="112500"/>
+              </a:lnSpc>
+              <a:spcBef>
+                <a:spcPts val="0"/>
+              </a:spcBef>
+              <a:spcAft>
+                <a:spcPts val="0"/>
+              </a:spcAft>
+              <a:buNone/>
+            </a:pPr>
+            <a:r>
+              <a:rPr lang="en-US" sz="600">
+                <a:solidFill>
+                  <a:srgbClr val="F2F2F2"/>
+                </a:solidFill>
+                <a:latin typeface="Tahoma"/>
+                <a:ea typeface="Tahoma"/>
+                <a:cs typeface="Tahoma"/>
+                <a:sym typeface="Tahoma"/>
+              </a:rPr>
+              <a:t>Yi, Jiang, Tran, G´omez, Canning, Bloem &amp; Barrett</a:t>
+            </a:r>
+            <a:endParaRPr sz="600">
+              <a:latin typeface="Tahoma"/>
+              <a:ea typeface="Tahoma"/>
+              <a:cs typeface="Tahoma"/>
+              <a:sym typeface="Tahoma"/>
+            </a:endParaRPr>
+          </a:p>
+        </p:txBody>
+      </p:sp>
+      <p:sp>
+        <p:nvSpPr>
+          <p:cNvPr id="470" name="Google Shape;470;p21"/>
+          <p:cNvSpPr txBox="1"/>
+          <p:nvPr>
+            <p:ph idx="11" type="ftr"/>
+          </p:nvPr>
+        </p:nvSpPr>
+        <p:spPr>
+          <a:xfrm>
+            <a:off x="2111768" y="3135783"/>
+            <a:ext cx="1536600" cy="92400"/>
+          </a:xfrm>
+          <a:prstGeom prst="rect">
+            <a:avLst/>
+          </a:prstGeom>
+          <a:noFill/>
+          <a:ln>
+            <a:noFill/>
+          </a:ln>
+        </p:spPr>
+        <p:txBody>
+          <a:bodyPr anchorCtr="0" anchor="t" bIns="0" lIns="0" spcFirstLastPara="1" rIns="0" wrap="square" tIns="0">
+            <a:spAutoFit/>
+          </a:bodyPr>
+          <a:lstStyle/>
+          <a:p>
+            <a:pPr indent="0" lvl="0" marL="12700" rtl="0" algn="l">
+              <a:lnSpc>
+                <a:spcPct val="112500"/>
+              </a:lnSpc>
+              <a:spcBef>
+                <a:spcPts val="0"/>
+              </a:spcBef>
+              <a:spcAft>
+                <a:spcPts val="0"/>
+              </a:spcAft>
+              <a:buNone/>
+            </a:pPr>
+            <a:r>
+              <a:rPr lang="en-US"/>
+              <a:t>Employment and Compensation within AVCs</a:t>
+            </a:r>
+            <a:endParaRPr/>
+          </a:p>
+        </p:txBody>
+      </p:sp>
+      <p:sp>
+        <p:nvSpPr>
+          <p:cNvPr id="471" name="Google Shape;471;p21"/>
+          <p:cNvSpPr txBox="1"/>
+          <p:nvPr>
+            <p:ph idx="10" type="dt"/>
+          </p:nvPr>
+        </p:nvSpPr>
+        <p:spPr>
+          <a:xfrm>
+            <a:off x="4472876" y="3135783"/>
+            <a:ext cx="426000" cy="92400"/>
+          </a:xfrm>
+          <a:prstGeom prst="rect">
+            <a:avLst/>
+          </a:prstGeom>
+          <a:noFill/>
+          <a:ln>
+            <a:noFill/>
+          </a:ln>
+        </p:spPr>
+        <p:txBody>
+          <a:bodyPr anchorCtr="0" anchor="t" bIns="0" lIns="0" spcFirstLastPara="1" rIns="0" wrap="square" tIns="0">
+            <a:spAutoFit/>
+          </a:bodyPr>
+          <a:lstStyle/>
+          <a:p>
+            <a:pPr indent="0" lvl="0" marL="12700" rtl="0" algn="l">
+              <a:lnSpc>
+                <a:spcPct val="112500"/>
+              </a:lnSpc>
+              <a:spcBef>
+                <a:spcPts val="0"/>
+              </a:spcBef>
+              <a:spcAft>
+                <a:spcPts val="0"/>
+              </a:spcAft>
+              <a:buNone/>
+            </a:pPr>
+            <a:r>
+              <a:rPr lang="en-US"/>
+              <a:t>March 2025</a:t>
+            </a:r>
+            <a:endParaRPr/>
+          </a:p>
+        </p:txBody>
+      </p:sp>
+      <p:sp>
+        <p:nvSpPr>
+          <p:cNvPr id="472" name="Google Shape;472;p21"/>
+          <p:cNvSpPr txBox="1"/>
+          <p:nvPr>
+            <p:ph idx="12" type="sldNum"/>
+          </p:nvPr>
+        </p:nvSpPr>
+        <p:spPr>
+          <a:xfrm>
+            <a:off x="5451184" y="3135783"/>
+            <a:ext cx="254100" cy="92400"/>
+          </a:xfrm>
+          <a:prstGeom prst="rect">
+            <a:avLst/>
+          </a:prstGeom>
+          <a:noFill/>
+          <a:ln>
+            <a:noFill/>
+          </a:ln>
+        </p:spPr>
+        <p:txBody>
+          <a:bodyPr anchorCtr="0" anchor="t" bIns="0" lIns="0" spcFirstLastPara="1" rIns="0" wrap="square" tIns="0">
+            <a:spAutoFit/>
+          </a:bodyPr>
+          <a:lstStyle/>
+          <a:p>
+            <a:pPr indent="0" lvl="0" marL="12700" rtl="0" algn="l">
+              <a:lnSpc>
+                <a:spcPct val="112500"/>
+              </a:lnSpc>
+              <a:spcBef>
+                <a:spcPts val="0"/>
+              </a:spcBef>
+              <a:spcAft>
+                <a:spcPts val="0"/>
+              </a:spcAft>
+              <a:buNone/>
+            </a:pPr>
+            <a:fld id="{00000000-1234-1234-1234-123412341234}" type="slidenum">
+              <a:rPr lang="en-US"/>
+              <a:t>‹#›</a:t>
+            </a:fld>
+            <a:r>
+              <a:rPr lang="en-US"/>
+              <a:t> / 18</a:t>
+            </a:r>
+            <a:endParaRPr/>
+          </a:p>
+        </p:txBody>
+      </p:sp>
+      <p:grpSp>
+        <p:nvGrpSpPr>
+          <p:cNvPr id="473" name="Google Shape;473;p21"/>
+          <p:cNvGrpSpPr/>
+          <p:nvPr/>
+        </p:nvGrpSpPr>
+        <p:grpSpPr>
+          <a:xfrm>
+            <a:off x="0" y="3130346"/>
+            <a:ext cx="5760185" cy="109855"/>
+            <a:chOff x="0" y="3130346"/>
+            <a:chExt cx="5760185" cy="109855"/>
+          </a:xfrm>
+        </p:grpSpPr>
+        <p:sp>
+          <p:nvSpPr>
+            <p:cNvPr id="474" name="Google Shape;474;p21"/>
+            <p:cNvSpPr/>
+            <p:nvPr/>
+          </p:nvSpPr>
+          <p:spPr>
+            <a:xfrm>
+              <a:off x="0" y="3130346"/>
+              <a:ext cx="1920239" cy="109855"/>
+            </a:xfrm>
+            <a:custGeom>
+              <a:rect b="b" l="l" r="r" t="t"/>
+              <a:pathLst>
+                <a:path extrusionOk="0" h="109855" w="1920239">
+                  <a:moveTo>
+                    <a:pt x="1919973" y="0"/>
+                  </a:moveTo>
+                  <a:lnTo>
+                    <a:pt x="0" y="0"/>
+                  </a:lnTo>
+                  <a:lnTo>
+                    <a:pt x="0" y="109651"/>
+                  </a:lnTo>
+                  <a:lnTo>
+                    <a:pt x="1919973" y="109651"/>
+                  </a:lnTo>
+                  <a:lnTo>
+                    <a:pt x="1919973" y="0"/>
+                  </a:lnTo>
+                  <a:close/>
+                </a:path>
+              </a:pathLst>
+            </a:custGeom>
+            <a:solidFill>
+              <a:srgbClr val="094183"/>
+            </a:solidFill>
+            <a:ln>
+              <a:noFill/>
+            </a:ln>
+          </p:spPr>
+          <p:txBody>
+            <a:bodyPr anchorCtr="0" anchor="t" bIns="0" lIns="0" spcFirstLastPara="1" rIns="0" wrap="square" tIns="0">
+              <a:noAutofit/>
+            </a:bodyPr>
+            <a:lstStyle/>
+            <a:p>
+              <a:pPr indent="0" lvl="0" marL="0" rtl="0" algn="l">
+                <a:spcBef>
+                  <a:spcPts val="0"/>
+                </a:spcBef>
+                <a:spcAft>
+                  <a:spcPts val="0"/>
+                </a:spcAft>
+                <a:buNone/>
+              </a:pPr>
+              <a:r>
+                <a:t/>
+              </a:r>
+              <a:endParaRPr/>
+            </a:p>
+          </p:txBody>
+        </p:sp>
+        <p:sp>
+          <p:nvSpPr>
+            <p:cNvPr id="475" name="Google Shape;475;p21"/>
+            <p:cNvSpPr/>
+            <p:nvPr/>
+          </p:nvSpPr>
+          <p:spPr>
+            <a:xfrm>
+              <a:off x="1919973" y="3130346"/>
+              <a:ext cx="1920239" cy="109855"/>
+            </a:xfrm>
+            <a:custGeom>
+              <a:rect b="b" l="l" r="r" t="t"/>
+              <a:pathLst>
+                <a:path extrusionOk="0" h="109855" w="1920239">
+                  <a:moveTo>
+                    <a:pt x="1919973" y="0"/>
+                  </a:moveTo>
+                  <a:lnTo>
+                    <a:pt x="0" y="0"/>
+                  </a:lnTo>
+                  <a:lnTo>
+                    <a:pt x="0" y="109651"/>
+                  </a:lnTo>
+                  <a:lnTo>
+                    <a:pt x="1919973" y="109651"/>
+                  </a:lnTo>
+                  <a:lnTo>
+                    <a:pt x="1919973" y="0"/>
+                  </a:lnTo>
+                  <a:close/>
+                </a:path>
+              </a:pathLst>
+            </a:custGeom>
+            <a:solidFill>
+              <a:srgbClr val="EBEBEB"/>
+            </a:solidFill>
+            <a:ln>
+              <a:noFill/>
+            </a:ln>
+          </p:spPr>
+          <p:txBody>
+            <a:bodyPr anchorCtr="0" anchor="t" bIns="0" lIns="0" spcFirstLastPara="1" rIns="0" wrap="square" tIns="0">
+              <a:noAutofit/>
+            </a:bodyPr>
+            <a:lstStyle/>
+            <a:p>
+              <a:pPr indent="0" lvl="0" marL="0" rtl="0" algn="l">
+                <a:spcBef>
+                  <a:spcPts val="0"/>
+                </a:spcBef>
+                <a:spcAft>
+                  <a:spcPts val="0"/>
+                </a:spcAft>
+                <a:buNone/>
+              </a:pPr>
+              <a:r>
+                <a:t/>
+              </a:r>
+              <a:endParaRPr/>
+            </a:p>
+          </p:txBody>
+        </p:sp>
+        <p:sp>
+          <p:nvSpPr>
+            <p:cNvPr id="476" name="Google Shape;476;p21"/>
+            <p:cNvSpPr/>
+            <p:nvPr/>
+          </p:nvSpPr>
+          <p:spPr>
+            <a:xfrm>
+              <a:off x="3839946" y="3130346"/>
+              <a:ext cx="1920239" cy="109855"/>
+            </a:xfrm>
+            <a:custGeom>
+              <a:rect b="b" l="l" r="r" t="t"/>
+              <a:pathLst>
+                <a:path extrusionOk="0" h="109855" w="1920239">
+                  <a:moveTo>
+                    <a:pt x="1919973" y="0"/>
+                  </a:moveTo>
+                  <a:lnTo>
+                    <a:pt x="0" y="0"/>
+                  </a:lnTo>
+                  <a:lnTo>
+                    <a:pt x="0" y="109651"/>
+                  </a:lnTo>
+                  <a:lnTo>
+                    <a:pt x="1919973" y="109651"/>
+                  </a:lnTo>
+                  <a:lnTo>
+                    <a:pt x="1919973" y="0"/>
+                  </a:lnTo>
+                  <a:close/>
+                </a:path>
+              </a:pathLst>
+            </a:custGeom>
+            <a:solidFill>
+              <a:srgbClr val="D8D8D8"/>
+            </a:solidFill>
+            <a:ln>
+              <a:noFill/>
+            </a:ln>
+          </p:spPr>
+          <p:txBody>
+            <a:bodyPr anchorCtr="0" anchor="t" bIns="0" lIns="0" spcFirstLastPara="1" rIns="0" wrap="square" tIns="0">
+              <a:noAutofit/>
+            </a:bodyPr>
+            <a:lstStyle/>
+            <a:p>
+              <a:pPr indent="0" lvl="0" marL="0" rtl="0" algn="l">
+                <a:spcBef>
+                  <a:spcPts val="0"/>
+                </a:spcBef>
+                <a:spcAft>
+                  <a:spcPts val="0"/>
+                </a:spcAft>
+                <a:buNone/>
+              </a:pPr>
+              <a:r>
+                <a:t/>
+              </a:r>
+              <a:endParaRPr/>
+            </a:p>
+          </p:txBody>
+        </p:sp>
+      </p:grpSp>
+      <p:sp>
+        <p:nvSpPr>
+          <p:cNvPr id="477" name="Google Shape;477;p21"/>
+          <p:cNvSpPr txBox="1"/>
+          <p:nvPr/>
+        </p:nvSpPr>
+        <p:spPr>
+          <a:xfrm>
+            <a:off x="83477" y="3135783"/>
+            <a:ext cx="1752600" cy="92400"/>
+          </a:xfrm>
+          <a:prstGeom prst="rect">
+            <a:avLst/>
+          </a:prstGeom>
+          <a:noFill/>
+          <a:ln>
+            <a:noFill/>
+          </a:ln>
+        </p:spPr>
+        <p:txBody>
+          <a:bodyPr anchorCtr="0" anchor="t" bIns="0" lIns="0" spcFirstLastPara="1" rIns="0" wrap="square" tIns="0">
+            <a:spAutoFit/>
+          </a:bodyPr>
+          <a:lstStyle/>
+          <a:p>
+            <a:pPr indent="0" lvl="0" marL="12700" rtl="0" algn="l">
+              <a:lnSpc>
+                <a:spcPct val="112500"/>
+              </a:lnSpc>
+              <a:spcBef>
+                <a:spcPts val="0"/>
+              </a:spcBef>
+              <a:spcAft>
+                <a:spcPts val="0"/>
+              </a:spcAft>
+              <a:buNone/>
+            </a:pPr>
+            <a:r>
+              <a:rPr lang="en-US" sz="600">
+                <a:solidFill>
+                  <a:srgbClr val="F2F2F2"/>
+                </a:solidFill>
+                <a:latin typeface="Tahoma"/>
+                <a:ea typeface="Tahoma"/>
+                <a:cs typeface="Tahoma"/>
+                <a:sym typeface="Tahoma"/>
+              </a:rPr>
+              <a:t>Jhonatan Parada Torres, Dr. Merlinda Drini</a:t>
+            </a:r>
+            <a:endParaRPr sz="600">
+              <a:latin typeface="Tahoma"/>
+              <a:ea typeface="Tahoma"/>
+              <a:cs typeface="Tahoma"/>
+              <a:sym typeface="Tahoma"/>
+            </a:endParaRPr>
+          </a:p>
+        </p:txBody>
+      </p:sp>
+      <p:sp>
+        <p:nvSpPr>
+          <p:cNvPr id="478" name="Google Shape;478;p21"/>
+          <p:cNvSpPr txBox="1"/>
+          <p:nvPr>
+            <p:ph idx="11" type="ftr"/>
+          </p:nvPr>
+        </p:nvSpPr>
+        <p:spPr>
+          <a:xfrm>
+            <a:off x="2111768" y="3135783"/>
+            <a:ext cx="1536600" cy="92400"/>
+          </a:xfrm>
+          <a:prstGeom prst="rect">
+            <a:avLst/>
+          </a:prstGeom>
+          <a:noFill/>
+          <a:ln>
+            <a:noFill/>
+          </a:ln>
+        </p:spPr>
+        <p:txBody>
+          <a:bodyPr anchorCtr="0" anchor="t" bIns="0" lIns="0" spcFirstLastPara="1" rIns="0" wrap="square" tIns="0">
+            <a:spAutoFit/>
+          </a:bodyPr>
+          <a:lstStyle/>
+          <a:p>
+            <a:pPr indent="0" lvl="0" marL="12700" rtl="0" algn="l">
+              <a:lnSpc>
+                <a:spcPct val="112500"/>
+              </a:lnSpc>
+              <a:spcBef>
+                <a:spcPts val="0"/>
+              </a:spcBef>
+              <a:spcAft>
+                <a:spcPts val="0"/>
+              </a:spcAft>
+              <a:buNone/>
+            </a:pPr>
+            <a:r>
+              <a:rPr lang="en-US">
+                <a:solidFill>
+                  <a:srgbClr val="094183"/>
+                </a:solidFill>
+              </a:rPr>
+              <a:t>Network IDPS Using Open-Source Tools</a:t>
+            </a:r>
+            <a:endParaRPr>
+              <a:solidFill>
+                <a:srgbClr val="094183"/>
+              </a:solidFill>
+            </a:endParaRPr>
+          </a:p>
+        </p:txBody>
+      </p:sp>
+      <p:sp>
+        <p:nvSpPr>
+          <p:cNvPr id="479" name="Google Shape;479;p21"/>
+          <p:cNvSpPr txBox="1"/>
+          <p:nvPr>
+            <p:ph idx="10" type="dt"/>
+          </p:nvPr>
+        </p:nvSpPr>
+        <p:spPr>
+          <a:xfrm>
+            <a:off x="4472876" y="3135783"/>
+            <a:ext cx="426000" cy="92400"/>
+          </a:xfrm>
+          <a:prstGeom prst="rect">
+            <a:avLst/>
+          </a:prstGeom>
+          <a:noFill/>
+          <a:ln>
+            <a:noFill/>
+          </a:ln>
+        </p:spPr>
+        <p:txBody>
+          <a:bodyPr anchorCtr="0" anchor="t" bIns="0" lIns="0" spcFirstLastPara="1" rIns="0" wrap="square" tIns="0">
+            <a:spAutoFit/>
+          </a:bodyPr>
+          <a:lstStyle/>
+          <a:p>
+            <a:pPr indent="0" lvl="0" marL="12700" rtl="0" algn="l">
+              <a:lnSpc>
+                <a:spcPct val="112500"/>
+              </a:lnSpc>
+              <a:spcBef>
+                <a:spcPts val="0"/>
+              </a:spcBef>
+              <a:spcAft>
+                <a:spcPts val="0"/>
+              </a:spcAft>
+              <a:buNone/>
+            </a:pPr>
+            <a:r>
+              <a:rPr lang="en-US">
+                <a:solidFill>
+                  <a:srgbClr val="094183"/>
+                </a:solidFill>
+              </a:rPr>
+              <a:t>April 2026</a:t>
+            </a:r>
+            <a:endParaRPr>
+              <a:solidFill>
+                <a:srgbClr val="094183"/>
+              </a:solidFill>
+            </a:endParaRPr>
+          </a:p>
+        </p:txBody>
+      </p:sp>
+      <p:sp>
+        <p:nvSpPr>
+          <p:cNvPr id="480" name="Google Shape;480;p21"/>
+          <p:cNvSpPr txBox="1"/>
+          <p:nvPr>
+            <p:ph idx="12" type="sldNum"/>
+          </p:nvPr>
+        </p:nvSpPr>
+        <p:spPr>
+          <a:xfrm>
+            <a:off x="5451184" y="3135783"/>
+            <a:ext cx="254100" cy="92400"/>
+          </a:xfrm>
+          <a:prstGeom prst="rect">
+            <a:avLst/>
+          </a:prstGeom>
+          <a:noFill/>
+          <a:ln>
+            <a:noFill/>
+          </a:ln>
+        </p:spPr>
+        <p:txBody>
+          <a:bodyPr anchorCtr="0" anchor="t" bIns="0" lIns="0" spcFirstLastPara="1" rIns="0" wrap="square" tIns="0">
+            <a:spAutoFit/>
+          </a:bodyPr>
+          <a:lstStyle/>
+          <a:p>
+            <a:pPr indent="0" lvl="0" marL="12700" rtl="0" algn="l">
+              <a:lnSpc>
+                <a:spcPct val="112500"/>
+              </a:lnSpc>
+              <a:spcBef>
+                <a:spcPts val="0"/>
+              </a:spcBef>
+              <a:spcAft>
+                <a:spcPts val="0"/>
+              </a:spcAft>
+              <a:buNone/>
+            </a:pPr>
+            <a:fld id="{00000000-1234-1234-1234-123412341234}" type="slidenum">
+              <a:rPr lang="en-US">
+                <a:solidFill>
+                  <a:srgbClr val="094183"/>
+                </a:solidFill>
+              </a:rPr>
+              <a:t>‹#›</a:t>
+            </a:fld>
+            <a:r>
+              <a:rPr lang="en-US">
+                <a:solidFill>
+                  <a:srgbClr val="094183"/>
+                </a:solidFill>
+              </a:rPr>
+              <a:t> / 18</a:t>
+            </a:r>
+            <a:endParaRPr>
+              <a:solidFill>
+                <a:srgbClr val="094183"/>
+              </a:solidFill>
+            </a:endParaRPr>
+          </a:p>
+        </p:txBody>
+      </p:sp>
+      <p:grpSp>
+        <p:nvGrpSpPr>
+          <p:cNvPr id="481" name="Google Shape;481;p21"/>
+          <p:cNvGrpSpPr/>
+          <p:nvPr/>
+        </p:nvGrpSpPr>
+        <p:grpSpPr>
+          <a:xfrm>
+            <a:off x="0" y="3130346"/>
+            <a:ext cx="5760185" cy="109855"/>
+            <a:chOff x="0" y="3130346"/>
+            <a:chExt cx="5760185" cy="109855"/>
+          </a:xfrm>
+        </p:grpSpPr>
+        <p:sp>
+          <p:nvSpPr>
+            <p:cNvPr id="482" name="Google Shape;482;p21"/>
+            <p:cNvSpPr/>
+            <p:nvPr/>
+          </p:nvSpPr>
+          <p:spPr>
+            <a:xfrm>
+              <a:off x="0" y="3130346"/>
+              <a:ext cx="1920239" cy="109855"/>
+            </a:xfrm>
+            <a:custGeom>
+              <a:rect b="b" l="l" r="r" t="t"/>
+              <a:pathLst>
+                <a:path extrusionOk="0" h="109855" w="1920239">
+                  <a:moveTo>
+                    <a:pt x="1919973" y="0"/>
+                  </a:moveTo>
+                  <a:lnTo>
+                    <a:pt x="0" y="0"/>
+                  </a:lnTo>
+                  <a:lnTo>
+                    <a:pt x="0" y="109651"/>
+                  </a:lnTo>
+                  <a:lnTo>
+                    <a:pt x="1919973" y="109651"/>
+                  </a:lnTo>
+                  <a:lnTo>
+                    <a:pt x="1919973" y="0"/>
+                  </a:lnTo>
+                  <a:close/>
+                </a:path>
+              </a:pathLst>
+            </a:custGeom>
+            <a:solidFill>
+              <a:srgbClr val="094183"/>
+            </a:solidFill>
+            <a:ln>
+              <a:noFill/>
+            </a:ln>
+          </p:spPr>
+          <p:txBody>
+            <a:bodyPr anchorCtr="0" anchor="t" bIns="0" lIns="0" spcFirstLastPara="1" rIns="0" wrap="square" tIns="0">
+              <a:noAutofit/>
+            </a:bodyPr>
+            <a:lstStyle/>
+            <a:p>
+              <a:pPr indent="0" lvl="0" marL="0" rtl="0" algn="l">
+                <a:spcBef>
+                  <a:spcPts val="0"/>
+                </a:spcBef>
+                <a:spcAft>
+                  <a:spcPts val="0"/>
+                </a:spcAft>
+                <a:buNone/>
+              </a:pPr>
+              <a:r>
+                <a:t/>
+              </a:r>
+              <a:endParaRPr/>
+            </a:p>
+          </p:txBody>
+        </p:sp>
+        <p:sp>
+          <p:nvSpPr>
+            <p:cNvPr id="483" name="Google Shape;483;p21"/>
+            <p:cNvSpPr/>
+            <p:nvPr/>
+          </p:nvSpPr>
+          <p:spPr>
+            <a:xfrm>
+              <a:off x="1919973" y="3130346"/>
+              <a:ext cx="1920239" cy="109855"/>
+            </a:xfrm>
+            <a:custGeom>
+              <a:rect b="b" l="l" r="r" t="t"/>
+              <a:pathLst>
+                <a:path extrusionOk="0" h="109855" w="1920239">
+                  <a:moveTo>
+                    <a:pt x="1919973" y="0"/>
+                  </a:moveTo>
+                  <a:lnTo>
+                    <a:pt x="0" y="0"/>
+                  </a:lnTo>
+                  <a:lnTo>
+                    <a:pt x="0" y="109651"/>
+                  </a:lnTo>
+                  <a:lnTo>
+                    <a:pt x="1919973" y="109651"/>
+                  </a:lnTo>
+                  <a:lnTo>
+                    <a:pt x="1919973" y="0"/>
+                  </a:lnTo>
+                  <a:close/>
+                </a:path>
+              </a:pathLst>
+            </a:custGeom>
+            <a:solidFill>
+              <a:srgbClr val="EBEBEB"/>
+            </a:solidFill>
+            <a:ln>
+              <a:noFill/>
+            </a:ln>
+          </p:spPr>
+          <p:txBody>
+            <a:bodyPr anchorCtr="0" anchor="t" bIns="0" lIns="0" spcFirstLastPara="1" rIns="0" wrap="square" tIns="0">
+              <a:noAutofit/>
+            </a:bodyPr>
+            <a:lstStyle/>
+            <a:p>
+              <a:pPr indent="0" lvl="0" marL="0" rtl="0" algn="l">
+                <a:spcBef>
+                  <a:spcPts val="0"/>
+                </a:spcBef>
+                <a:spcAft>
+                  <a:spcPts val="0"/>
+                </a:spcAft>
+                <a:buNone/>
+              </a:pPr>
+              <a:r>
+                <a:t/>
+              </a:r>
+              <a:endParaRPr/>
+            </a:p>
+          </p:txBody>
+        </p:sp>
+        <p:sp>
+          <p:nvSpPr>
+            <p:cNvPr id="484" name="Google Shape;484;p21"/>
+            <p:cNvSpPr/>
+            <p:nvPr/>
+          </p:nvSpPr>
+          <p:spPr>
+            <a:xfrm>
+              <a:off x="3839946" y="3130346"/>
+              <a:ext cx="1920239" cy="109855"/>
+            </a:xfrm>
+            <a:custGeom>
+              <a:rect b="b" l="l" r="r" t="t"/>
+              <a:pathLst>
+                <a:path extrusionOk="0" h="109855" w="1920239">
+                  <a:moveTo>
+                    <a:pt x="1919973" y="0"/>
+                  </a:moveTo>
+                  <a:lnTo>
+                    <a:pt x="0" y="0"/>
+                  </a:lnTo>
+                  <a:lnTo>
+                    <a:pt x="0" y="109651"/>
+                  </a:lnTo>
+                  <a:lnTo>
+                    <a:pt x="1919973" y="109651"/>
+                  </a:lnTo>
+                  <a:lnTo>
+                    <a:pt x="1919973" y="0"/>
+                  </a:lnTo>
+                  <a:close/>
+                </a:path>
+              </a:pathLst>
+            </a:custGeom>
+            <a:solidFill>
+              <a:srgbClr val="D8D8D8"/>
+            </a:solidFill>
+            <a:ln>
+              <a:noFill/>
+            </a:ln>
+          </p:spPr>
+          <p:txBody>
+            <a:bodyPr anchorCtr="0" anchor="t" bIns="0" lIns="0" spcFirstLastPara="1" rIns="0" wrap="square" tIns="0">
+              <a:noAutofit/>
+            </a:bodyPr>
+            <a:lstStyle/>
+            <a:p>
+              <a:pPr indent="0" lvl="0" marL="0" rtl="0" algn="l">
+                <a:spcBef>
+                  <a:spcPts val="0"/>
+                </a:spcBef>
+                <a:spcAft>
+                  <a:spcPts val="0"/>
+                </a:spcAft>
+                <a:buNone/>
+              </a:pPr>
+              <a:r>
+                <a:t/>
+              </a:r>
+              <a:endParaRPr/>
+            </a:p>
+          </p:txBody>
+        </p:sp>
+      </p:grpSp>
+      <p:sp>
+        <p:nvSpPr>
+          <p:cNvPr id="485" name="Google Shape;485;p21"/>
+          <p:cNvSpPr txBox="1"/>
+          <p:nvPr/>
+        </p:nvSpPr>
+        <p:spPr>
+          <a:xfrm>
+            <a:off x="83477" y="3135783"/>
+            <a:ext cx="1752600" cy="92400"/>
+          </a:xfrm>
+          <a:prstGeom prst="rect">
+            <a:avLst/>
+          </a:prstGeom>
+          <a:noFill/>
+          <a:ln>
+            <a:noFill/>
+          </a:ln>
+        </p:spPr>
+        <p:txBody>
+          <a:bodyPr anchorCtr="0" anchor="t" bIns="0" lIns="0" spcFirstLastPara="1" rIns="0" wrap="square" tIns="0">
+            <a:spAutoFit/>
+          </a:bodyPr>
+          <a:lstStyle/>
+          <a:p>
+            <a:pPr indent="0" lvl="0" marL="12700" rtl="0" algn="l">
+              <a:lnSpc>
+                <a:spcPct val="112500"/>
+              </a:lnSpc>
+              <a:spcBef>
+                <a:spcPts val="0"/>
+              </a:spcBef>
+              <a:spcAft>
+                <a:spcPts val="0"/>
+              </a:spcAft>
+              <a:buNone/>
+            </a:pPr>
+            <a:r>
+              <a:rPr lang="en-US" sz="600">
+                <a:solidFill>
+                  <a:srgbClr val="F2F2F2"/>
+                </a:solidFill>
+                <a:latin typeface="Tahoma"/>
+                <a:ea typeface="Tahoma"/>
+                <a:cs typeface="Tahoma"/>
+                <a:sym typeface="Tahoma"/>
+              </a:rPr>
+              <a:t>Jhonatan Parada Torres, Dr. Guozhen An</a:t>
+            </a:r>
+            <a:endParaRPr sz="600">
+              <a:latin typeface="Tahoma"/>
+              <a:ea typeface="Tahoma"/>
+              <a:cs typeface="Tahoma"/>
+              <a:sym typeface="Tahoma"/>
+            </a:endParaRPr>
+          </a:p>
+        </p:txBody>
+      </p:sp>
+      <p:sp>
+        <p:nvSpPr>
+          <p:cNvPr id="486" name="Google Shape;486;p21"/>
+          <p:cNvSpPr txBox="1"/>
+          <p:nvPr>
+            <p:ph idx="11" type="ftr"/>
+          </p:nvPr>
+        </p:nvSpPr>
+        <p:spPr>
+          <a:xfrm>
+            <a:off x="2111768" y="3135783"/>
+            <a:ext cx="1536600" cy="92400"/>
+          </a:xfrm>
+          <a:prstGeom prst="rect">
+            <a:avLst/>
+          </a:prstGeom>
+          <a:noFill/>
+          <a:ln>
+            <a:noFill/>
+          </a:ln>
+        </p:spPr>
+        <p:txBody>
+          <a:bodyPr anchorCtr="0" anchor="t" bIns="0" lIns="0" spcFirstLastPara="1" rIns="0" wrap="square" tIns="0">
+            <a:spAutoFit/>
+          </a:bodyPr>
+          <a:lstStyle/>
+          <a:p>
+            <a:pPr indent="0" lvl="0" marL="0" rtl="0" algn="ctr">
+              <a:lnSpc>
+                <a:spcPct val="112500"/>
+              </a:lnSpc>
+              <a:spcBef>
+                <a:spcPts val="0"/>
+              </a:spcBef>
+              <a:spcAft>
+                <a:spcPts val="0"/>
+              </a:spcAft>
+              <a:buNone/>
+            </a:pPr>
+            <a:r>
+              <a:rPr lang="en-US">
+                <a:solidFill>
+                  <a:srgbClr val="094183"/>
+                </a:solidFill>
+              </a:rPr>
+              <a:t>System of MBTI personality Recognition</a:t>
+            </a:r>
+            <a:endParaRPr>
+              <a:solidFill>
+                <a:srgbClr val="094183"/>
+              </a:solidFill>
+            </a:endParaRPr>
+          </a:p>
+        </p:txBody>
+      </p:sp>
+      <p:sp>
+        <p:nvSpPr>
+          <p:cNvPr id="487" name="Google Shape;487;p21"/>
+          <p:cNvSpPr txBox="1"/>
+          <p:nvPr>
+            <p:ph idx="10" type="dt"/>
+          </p:nvPr>
+        </p:nvSpPr>
+        <p:spPr>
+          <a:xfrm>
+            <a:off x="4472876" y="3135783"/>
+            <a:ext cx="426000" cy="92400"/>
+          </a:xfrm>
+          <a:prstGeom prst="rect">
+            <a:avLst/>
+          </a:prstGeom>
+          <a:noFill/>
+          <a:ln>
+            <a:noFill/>
+          </a:ln>
+        </p:spPr>
+        <p:txBody>
+          <a:bodyPr anchorCtr="0" anchor="t" bIns="0" lIns="0" spcFirstLastPara="1" rIns="0" wrap="square" tIns="0">
+            <a:spAutoFit/>
+          </a:bodyPr>
+          <a:lstStyle/>
+          <a:p>
+            <a:pPr indent="0" lvl="0" marL="12700" rtl="0" algn="l">
+              <a:lnSpc>
+                <a:spcPct val="112500"/>
+              </a:lnSpc>
+              <a:spcBef>
+                <a:spcPts val="0"/>
+              </a:spcBef>
+              <a:spcAft>
+                <a:spcPts val="0"/>
+              </a:spcAft>
+              <a:buNone/>
+            </a:pPr>
+            <a:r>
+              <a:rPr lang="en-US">
+                <a:solidFill>
+                  <a:srgbClr val="094183"/>
+                </a:solidFill>
+              </a:rPr>
+              <a:t>April 2026</a:t>
+            </a:r>
+            <a:endParaRPr>
+              <a:solidFill>
+                <a:srgbClr val="094183"/>
+              </a:solidFill>
+            </a:endParaRPr>
+          </a:p>
+        </p:txBody>
+      </p:sp>
+      <p:sp>
+        <p:nvSpPr>
+          <p:cNvPr id="488" name="Google Shape;488;p21"/>
+          <p:cNvSpPr txBox="1"/>
+          <p:nvPr>
+            <p:ph idx="12" type="sldNum"/>
+          </p:nvPr>
+        </p:nvSpPr>
+        <p:spPr>
+          <a:xfrm>
+            <a:off x="5451184" y="3135783"/>
+            <a:ext cx="254100" cy="92400"/>
+          </a:xfrm>
+          <a:prstGeom prst="rect">
+            <a:avLst/>
+          </a:prstGeom>
+          <a:noFill/>
+          <a:ln>
+            <a:noFill/>
+          </a:ln>
+        </p:spPr>
+        <p:txBody>
+          <a:bodyPr anchorCtr="0" anchor="t" bIns="0" lIns="0" spcFirstLastPara="1" rIns="0" wrap="square" tIns="0">
+            <a:spAutoFit/>
+          </a:bodyPr>
+          <a:lstStyle/>
+          <a:p>
+            <a:pPr indent="0" lvl="0" marL="12700" rtl="0" algn="l">
+              <a:lnSpc>
+                <a:spcPct val="112500"/>
+              </a:lnSpc>
+              <a:spcBef>
+                <a:spcPts val="0"/>
+              </a:spcBef>
+              <a:spcAft>
+                <a:spcPts val="0"/>
+              </a:spcAft>
+              <a:buNone/>
+            </a:pPr>
+            <a:fld id="{00000000-1234-1234-1234-123412341234}" type="slidenum">
+              <a:rPr lang="en-US">
+                <a:solidFill>
+                  <a:srgbClr val="094183"/>
+                </a:solidFill>
+              </a:rPr>
+              <a:t>‹#›</a:t>
+            </a:fld>
+            <a:r>
+              <a:rPr lang="en-US">
+                <a:solidFill>
+                  <a:srgbClr val="094183"/>
+                </a:solidFill>
+              </a:rPr>
+              <a:t> / 18</a:t>
+            </a:r>
+            <a:endParaRPr>
+              <a:solidFill>
+                <a:srgbClr val="094183"/>
+              </a:solidFill>
+            </a:endParaRPr>
+          </a:p>
+        </p:txBody>
+      </p:sp>
+      <p:pic>
+        <p:nvPicPr>
+          <p:cNvPr id="489" name="Google Shape;489;p21"/>
+          <p:cNvPicPr preferRelativeResize="0"/>
+          <p:nvPr/>
+        </p:nvPicPr>
+        <p:blipFill rotWithShape="1">
+          <a:blip r:embed="rId3">
+            <a:alphaModFix/>
+          </a:blip>
+          <a:srcRect b="0" l="24035" r="24848" t="0"/>
+          <a:stretch/>
+        </p:blipFill>
+        <p:spPr>
+          <a:xfrm>
+            <a:off x="3274475" y="358613"/>
+            <a:ext cx="2298199" cy="2527649"/>
+          </a:xfrm>
+          <a:prstGeom prst="rect">
+            <a:avLst/>
+          </a:prstGeom>
+          <a:noFill/>
+          <a:ln>
+            <a:noFill/>
+          </a:ln>
+        </p:spPr>
+      </p:pic>
+      <p:pic>
+        <p:nvPicPr>
+          <p:cNvPr id="490" name="Google Shape;490;p21"/>
+          <p:cNvPicPr preferRelativeResize="0"/>
+          <p:nvPr/>
+        </p:nvPicPr>
+        <p:blipFill>
+          <a:blip r:embed="rId4">
+            <a:alphaModFix/>
+          </a:blip>
+          <a:stretch>
+            <a:fillRect/>
+          </a:stretch>
+        </p:blipFill>
+        <p:spPr>
+          <a:xfrm>
+            <a:off x="83483" y="1136546"/>
+            <a:ext cx="3093124" cy="971775"/>
+          </a:xfrm>
+          <a:prstGeom prst="rect">
+            <a:avLst/>
+          </a:prstGeom>
+          <a:noFill/>
+          <a:ln cap="flat" cmpd="sng" w="9525">
+            <a:solidFill>
+              <a:schemeClr val="dk2"/>
+            </a:solidFill>
+            <a:prstDash val="solid"/>
+            <a:round/>
+            <a:headEnd len="sm" w="sm" type="none"/>
+            <a:tailEnd len="sm" w="sm" type="none"/>
+          </a:ln>
+        </p:spPr>
+      </p:pic>
+    </p:spTree>
+  </p:cSld>
+  <p:clrMapOvr>
+    <a:masterClrMapping/>
+  </p:clrMapOvr>
+  <p:transition>
+    <p:fade thruBlk="1"/>
+  </p:transition>
+</p:sld>
+</file>
+
+<file path=ppt/slides/slide16.xml><?xml version="1.0" encoding="utf-8"?>
+<p:sld xmlns:a="http://schemas.openxmlformats.org/drawingml/2006/main" xmlns:r="http://schemas.openxmlformats.org/officeDocument/2006/relationships" xmlns:mc="http://schemas.openxmlformats.org/markup-compatibility/2006" xmlns:mv="urn:schemas-microsoft-com:mac:vml" xmlns:p="http://schemas.openxmlformats.org/presentationml/2006/main" xmlns:c="http://schemas.openxmlformats.org/drawingml/2006/chart" xmlns:dgm="http://schemas.openxmlformats.org/drawingml/2006/diagram" xmlns:o="urn:schemas-microsoft-com:office:office" xmlns:v="urn:schemas-microsoft-com:vml" xmlns:pvml="urn:schemas-microsoft-com:office:powerpoint" xmlns:com="http://schemas.openxmlformats.org/drawingml/2006/compatibility" xmlns:p14="http://schemas.microsoft.com/office/powerpoint/2010/main" xmlns:p15="http://schemas.microsoft.com/office/powerpoint/2012/main" xmlns:ahyp="http://schemas.microsoft.com/office/drawing/2018/hyperlinkcolor">
+  <p:cSld>
+    <p:spTree>
+      <p:nvGrpSpPr>
+        <p:cNvPr id="494" name="Shape 494"/>
+        <p:cNvGrpSpPr/>
+        <p:nvPr/>
+      </p:nvGrpSpPr>
+      <p:grpSpPr>
+        <a:xfrm>
+          <a:off x="0" y="0"/>
+          <a:ext cx="0" cy="0"/>
+          <a:chOff x="0" y="0"/>
+          <a:chExt cx="0" cy="0"/>
+        </a:xfrm>
+      </p:grpSpPr>
+      <p:grpSp>
+        <p:nvGrpSpPr>
+          <p:cNvPr id="495" name="Google Shape;495;p22"/>
+          <p:cNvGrpSpPr/>
+          <p:nvPr/>
+        </p:nvGrpSpPr>
+        <p:grpSpPr>
+          <a:xfrm>
+            <a:off x="0" y="3130346"/>
+            <a:ext cx="5760185" cy="109855"/>
+            <a:chOff x="0" y="3130346"/>
+            <a:chExt cx="5760185" cy="109855"/>
+          </a:xfrm>
+        </p:grpSpPr>
+        <p:sp>
+          <p:nvSpPr>
+            <p:cNvPr id="496" name="Google Shape;496;p22"/>
+            <p:cNvSpPr/>
+            <p:nvPr/>
+          </p:nvSpPr>
+          <p:spPr>
+            <a:xfrm>
+              <a:off x="0" y="3130346"/>
+              <a:ext cx="1920239" cy="109855"/>
+            </a:xfrm>
+            <a:custGeom>
+              <a:rect b="b" l="l" r="r" t="t"/>
+              <a:pathLst>
+                <a:path extrusionOk="0" h="109855" w="1920239">
+                  <a:moveTo>
+                    <a:pt x="1919973" y="0"/>
+                  </a:moveTo>
+                  <a:lnTo>
+                    <a:pt x="0" y="0"/>
+                  </a:lnTo>
+                  <a:lnTo>
+                    <a:pt x="0" y="109651"/>
+                  </a:lnTo>
+                  <a:lnTo>
+                    <a:pt x="1919973" y="109651"/>
+                  </a:lnTo>
+                  <a:lnTo>
+                    <a:pt x="1919973" y="0"/>
+                  </a:lnTo>
+                  <a:close/>
+                </a:path>
+              </a:pathLst>
+            </a:custGeom>
+            <a:solidFill>
+              <a:srgbClr val="A30000"/>
+            </a:solidFill>
+            <a:ln>
+              <a:noFill/>
+            </a:ln>
+          </p:spPr>
+          <p:txBody>
+            <a:bodyPr anchorCtr="0" anchor="t" bIns="0" lIns="0" spcFirstLastPara="1" rIns="0" wrap="square" tIns="0">
+              <a:noAutofit/>
+            </a:bodyPr>
+            <a:lstStyle/>
+            <a:p>
+              <a:pPr indent="0" lvl="0" marL="0" rtl="0" algn="l">
+                <a:spcBef>
+                  <a:spcPts val="0"/>
+                </a:spcBef>
+                <a:spcAft>
+                  <a:spcPts val="0"/>
+                </a:spcAft>
+                <a:buNone/>
+              </a:pPr>
+              <a:r>
+                <a:t/>
+              </a:r>
+              <a:endParaRPr/>
+            </a:p>
+          </p:txBody>
+        </p:sp>
+        <p:sp>
+          <p:nvSpPr>
+            <p:cNvPr id="497" name="Google Shape;497;p22"/>
+            <p:cNvSpPr/>
+            <p:nvPr/>
+          </p:nvSpPr>
+          <p:spPr>
+            <a:xfrm>
+              <a:off x="1919973" y="3130346"/>
+              <a:ext cx="1920239" cy="109855"/>
+            </a:xfrm>
+            <a:custGeom>
+              <a:rect b="b" l="l" r="r" t="t"/>
+              <a:pathLst>
+                <a:path extrusionOk="0" h="109855" w="1920239">
+                  <a:moveTo>
+                    <a:pt x="1919973" y="0"/>
+                  </a:moveTo>
+                  <a:lnTo>
+                    <a:pt x="0" y="0"/>
+                  </a:lnTo>
+                  <a:lnTo>
+                    <a:pt x="0" y="109651"/>
+                  </a:lnTo>
+                  <a:lnTo>
+                    <a:pt x="1919973" y="109651"/>
+                  </a:lnTo>
+                  <a:lnTo>
+                    <a:pt x="1919973" y="0"/>
+                  </a:lnTo>
+                  <a:close/>
+                </a:path>
+              </a:pathLst>
+            </a:custGeom>
+            <a:solidFill>
+              <a:srgbClr val="EBEBEB"/>
+            </a:solidFill>
+            <a:ln>
+              <a:noFill/>
+            </a:ln>
+          </p:spPr>
+          <p:txBody>
+            <a:bodyPr anchorCtr="0" anchor="t" bIns="0" lIns="0" spcFirstLastPara="1" rIns="0" wrap="square" tIns="0">
+              <a:noAutofit/>
+            </a:bodyPr>
+            <a:lstStyle/>
+            <a:p>
+              <a:pPr indent="0" lvl="0" marL="0" rtl="0" algn="l">
+                <a:spcBef>
+                  <a:spcPts val="0"/>
+                </a:spcBef>
+                <a:spcAft>
+                  <a:spcPts val="0"/>
+                </a:spcAft>
+                <a:buNone/>
+              </a:pPr>
+              <a:r>
+                <a:t/>
+              </a:r>
+              <a:endParaRPr/>
+            </a:p>
+          </p:txBody>
+        </p:sp>
+        <p:sp>
+          <p:nvSpPr>
+            <p:cNvPr id="498" name="Google Shape;498;p22"/>
+            <p:cNvSpPr/>
+            <p:nvPr/>
+          </p:nvSpPr>
+          <p:spPr>
+            <a:xfrm>
+              <a:off x="3839946" y="3130346"/>
+              <a:ext cx="1920239" cy="109855"/>
+            </a:xfrm>
+            <a:custGeom>
+              <a:rect b="b" l="l" r="r" t="t"/>
+              <a:pathLst>
+                <a:path extrusionOk="0" h="109855" w="1920239">
+                  <a:moveTo>
+                    <a:pt x="1919973" y="0"/>
+                  </a:moveTo>
+                  <a:lnTo>
+                    <a:pt x="0" y="0"/>
+                  </a:lnTo>
+                  <a:lnTo>
+                    <a:pt x="0" y="109651"/>
+                  </a:lnTo>
+                  <a:lnTo>
+                    <a:pt x="1919973" y="109651"/>
+                  </a:lnTo>
+                  <a:lnTo>
+                    <a:pt x="1919973" y="0"/>
+                  </a:lnTo>
+                  <a:close/>
+                </a:path>
+              </a:pathLst>
+            </a:custGeom>
+            <a:solidFill>
+              <a:srgbClr val="D8D8D8"/>
+            </a:solidFill>
+            <a:ln>
+              <a:noFill/>
+            </a:ln>
+          </p:spPr>
+          <p:txBody>
+            <a:bodyPr anchorCtr="0" anchor="t" bIns="0" lIns="0" spcFirstLastPara="1" rIns="0" wrap="square" tIns="0">
+              <a:noAutofit/>
+            </a:bodyPr>
+            <a:lstStyle/>
+            <a:p>
+              <a:pPr indent="0" lvl="0" marL="0" rtl="0" algn="l">
+                <a:spcBef>
+                  <a:spcPts val="0"/>
+                </a:spcBef>
+                <a:spcAft>
+                  <a:spcPts val="0"/>
+                </a:spcAft>
+                <a:buNone/>
+              </a:pPr>
+              <a:r>
+                <a:t/>
+              </a:r>
+              <a:endParaRPr/>
+            </a:p>
+          </p:txBody>
+        </p:sp>
+      </p:grpSp>
+      <p:sp>
+        <p:nvSpPr>
+          <p:cNvPr id="499" name="Google Shape;499;p22"/>
+          <p:cNvSpPr txBox="1"/>
+          <p:nvPr/>
+        </p:nvSpPr>
+        <p:spPr>
+          <a:xfrm>
+            <a:off x="1166329" y="919820"/>
+            <a:ext cx="3429000" cy="381600"/>
+          </a:xfrm>
+          <a:prstGeom prst="rect">
+            <a:avLst/>
+          </a:prstGeom>
+          <a:noFill/>
+          <a:ln>
+            <a:noFill/>
+          </a:ln>
+        </p:spPr>
+        <p:txBody>
+          <a:bodyPr anchorCtr="0" anchor="t" bIns="0" lIns="0" spcFirstLastPara="1" rIns="0" wrap="square" tIns="12050">
+            <a:spAutoFit/>
+          </a:bodyPr>
+          <a:lstStyle/>
+          <a:p>
+            <a:pPr indent="0" lvl="0" marL="0" rtl="0" algn="ctr">
+              <a:lnSpc>
+                <a:spcPct val="100000"/>
+              </a:lnSpc>
+              <a:spcBef>
+                <a:spcPts val="0"/>
+              </a:spcBef>
+              <a:spcAft>
+                <a:spcPts val="0"/>
+              </a:spcAft>
+              <a:buNone/>
+            </a:pPr>
+            <a:r>
+              <a:rPr lang="en-US" sz="1200">
+                <a:solidFill>
+                  <a:srgbClr val="094183"/>
+                </a:solidFill>
+                <a:latin typeface="Tahoma"/>
+                <a:ea typeface="Tahoma"/>
+                <a:cs typeface="Tahoma"/>
+                <a:sym typeface="Tahoma"/>
+              </a:rPr>
+              <a:t>Thank you for your interest, questions, and comments!</a:t>
+            </a:r>
+            <a:endParaRPr sz="1200">
+              <a:solidFill>
+                <a:srgbClr val="094183"/>
+              </a:solidFill>
+              <a:latin typeface="Tahoma"/>
+              <a:ea typeface="Tahoma"/>
+              <a:cs typeface="Tahoma"/>
+              <a:sym typeface="Tahoma"/>
+            </a:endParaRPr>
+          </a:p>
+        </p:txBody>
+      </p:sp>
+      <p:sp>
+        <p:nvSpPr>
+          <p:cNvPr id="500" name="Google Shape;500;p22"/>
+          <p:cNvSpPr txBox="1"/>
+          <p:nvPr/>
+        </p:nvSpPr>
+        <p:spPr>
+          <a:xfrm>
+            <a:off x="83477" y="3135783"/>
+            <a:ext cx="1752600" cy="102235"/>
+          </a:xfrm>
+          <a:prstGeom prst="rect">
+            <a:avLst/>
+          </a:prstGeom>
+          <a:noFill/>
+          <a:ln>
+            <a:noFill/>
+          </a:ln>
+        </p:spPr>
+        <p:txBody>
+          <a:bodyPr anchorCtr="0" anchor="t" bIns="0" lIns="0" spcFirstLastPara="1" rIns="0" wrap="square" tIns="0">
+            <a:spAutoFit/>
+          </a:bodyPr>
+          <a:lstStyle/>
+          <a:p>
+            <a:pPr indent="0" lvl="0" marL="12700" rtl="0" algn="l">
+              <a:lnSpc>
+                <a:spcPct val="112500"/>
+              </a:lnSpc>
+              <a:spcBef>
+                <a:spcPts val="0"/>
+              </a:spcBef>
+              <a:spcAft>
+                <a:spcPts val="0"/>
+              </a:spcAft>
+              <a:buNone/>
+            </a:pPr>
+            <a:r>
+              <a:rPr lang="en-US" sz="600">
+                <a:solidFill>
+                  <a:srgbClr val="F2F2F2"/>
+                </a:solidFill>
+                <a:latin typeface="Tahoma"/>
+                <a:ea typeface="Tahoma"/>
+                <a:cs typeface="Tahoma"/>
+                <a:sym typeface="Tahoma"/>
+              </a:rPr>
+              <a:t>Yi, Jiang, Tran, G´omez, Canning, Bloem &amp; Barrett</a:t>
+            </a:r>
+            <a:endParaRPr sz="600">
+              <a:latin typeface="Tahoma"/>
+              <a:ea typeface="Tahoma"/>
+              <a:cs typeface="Tahoma"/>
+              <a:sym typeface="Tahoma"/>
+            </a:endParaRPr>
+          </a:p>
+        </p:txBody>
+      </p:sp>
+      <p:sp>
+        <p:nvSpPr>
+          <p:cNvPr id="501" name="Google Shape;501;p22"/>
+          <p:cNvSpPr txBox="1"/>
+          <p:nvPr>
+            <p:ph idx="11" type="ftr"/>
+          </p:nvPr>
+        </p:nvSpPr>
+        <p:spPr>
+          <a:xfrm>
+            <a:off x="2111768" y="3135783"/>
+            <a:ext cx="1536700" cy="102235"/>
+          </a:xfrm>
+          <a:prstGeom prst="rect">
+            <a:avLst/>
+          </a:prstGeom>
+          <a:noFill/>
+          <a:ln>
+            <a:noFill/>
+          </a:ln>
+        </p:spPr>
+        <p:txBody>
+          <a:bodyPr anchorCtr="0" anchor="t" bIns="0" lIns="0" spcFirstLastPara="1" rIns="0" wrap="square" tIns="0">
+            <a:spAutoFit/>
+          </a:bodyPr>
+          <a:lstStyle/>
+          <a:p>
+            <a:pPr indent="0" lvl="0" marL="12700" rtl="0" algn="l">
+              <a:lnSpc>
+                <a:spcPct val="112500"/>
+              </a:lnSpc>
+              <a:spcBef>
+                <a:spcPts val="0"/>
+              </a:spcBef>
+              <a:spcAft>
+                <a:spcPts val="0"/>
+              </a:spcAft>
+              <a:buNone/>
+            </a:pPr>
+            <a:r>
+              <a:rPr lang="en-US"/>
+              <a:t>Employment and Compensation within AVCs</a:t>
+            </a:r>
+            <a:endParaRPr/>
+          </a:p>
+        </p:txBody>
+      </p:sp>
+      <p:sp>
+        <p:nvSpPr>
+          <p:cNvPr id="502" name="Google Shape;502;p22"/>
+          <p:cNvSpPr txBox="1"/>
+          <p:nvPr>
+            <p:ph idx="10" type="dt"/>
+          </p:nvPr>
+        </p:nvSpPr>
+        <p:spPr>
+          <a:xfrm>
+            <a:off x="4472876" y="3135783"/>
+            <a:ext cx="426085" cy="102235"/>
+          </a:xfrm>
+          <a:prstGeom prst="rect">
+            <a:avLst/>
+          </a:prstGeom>
+          <a:noFill/>
+          <a:ln>
+            <a:noFill/>
+          </a:ln>
+        </p:spPr>
+        <p:txBody>
+          <a:bodyPr anchorCtr="0" anchor="t" bIns="0" lIns="0" spcFirstLastPara="1" rIns="0" wrap="square" tIns="0">
+            <a:spAutoFit/>
+          </a:bodyPr>
+          <a:lstStyle/>
+          <a:p>
+            <a:pPr indent="0" lvl="0" marL="12700" rtl="0" algn="l">
+              <a:lnSpc>
+                <a:spcPct val="112500"/>
+              </a:lnSpc>
+              <a:spcBef>
+                <a:spcPts val="0"/>
+              </a:spcBef>
+              <a:spcAft>
+                <a:spcPts val="0"/>
+              </a:spcAft>
+              <a:buNone/>
+            </a:pPr>
+            <a:r>
+              <a:rPr lang="en-US"/>
+              <a:t>March 2025</a:t>
+            </a:r>
+            <a:endParaRPr/>
+          </a:p>
+        </p:txBody>
+      </p:sp>
+      <p:sp>
+        <p:nvSpPr>
+          <p:cNvPr id="503" name="Google Shape;503;p22"/>
+          <p:cNvSpPr txBox="1"/>
+          <p:nvPr>
+            <p:ph idx="12" type="sldNum"/>
+          </p:nvPr>
+        </p:nvSpPr>
+        <p:spPr>
+          <a:xfrm>
+            <a:off x="5451184" y="3135783"/>
+            <a:ext cx="254000" cy="102235"/>
+          </a:xfrm>
+          <a:prstGeom prst="rect">
+            <a:avLst/>
+          </a:prstGeom>
+          <a:noFill/>
+          <a:ln>
+            <a:noFill/>
+          </a:ln>
+        </p:spPr>
+        <p:txBody>
+          <a:bodyPr anchorCtr="0" anchor="t" bIns="0" lIns="0" spcFirstLastPara="1" rIns="0" wrap="square" tIns="0">
+            <a:spAutoFit/>
+          </a:bodyPr>
+          <a:lstStyle/>
+          <a:p>
+            <a:pPr indent="0" lvl="0" marL="12700" rtl="0" algn="l">
+              <a:lnSpc>
+                <a:spcPct val="112500"/>
+              </a:lnSpc>
+              <a:spcBef>
+                <a:spcPts val="0"/>
+              </a:spcBef>
+              <a:spcAft>
+                <a:spcPts val="0"/>
+              </a:spcAft>
+              <a:buNone/>
+            </a:pPr>
+            <a:fld id="{00000000-1234-1234-1234-123412341234}" type="slidenum">
+              <a:rPr lang="en-US"/>
+              <a:t>‹#›</a:t>
+            </a:fld>
+            <a:r>
+              <a:rPr lang="en-US"/>
+              <a:t> / 18</a:t>
+            </a:r>
+            <a:endParaRPr/>
+          </a:p>
+        </p:txBody>
+      </p:sp>
+      <p:grpSp>
+        <p:nvGrpSpPr>
+          <p:cNvPr id="504" name="Google Shape;504;p22"/>
+          <p:cNvGrpSpPr/>
+          <p:nvPr/>
+        </p:nvGrpSpPr>
+        <p:grpSpPr>
+          <a:xfrm>
+            <a:off x="0" y="3130346"/>
+            <a:ext cx="5760185" cy="109855"/>
+            <a:chOff x="0" y="3130346"/>
+            <a:chExt cx="5760185" cy="109855"/>
+          </a:xfrm>
+        </p:grpSpPr>
+        <p:sp>
+          <p:nvSpPr>
+            <p:cNvPr id="505" name="Google Shape;505;p22"/>
+            <p:cNvSpPr/>
+            <p:nvPr/>
+          </p:nvSpPr>
+          <p:spPr>
+            <a:xfrm>
+              <a:off x="0" y="3130346"/>
+              <a:ext cx="1920239" cy="109855"/>
+            </a:xfrm>
+            <a:custGeom>
+              <a:rect b="b" l="l" r="r" t="t"/>
+              <a:pathLst>
+                <a:path extrusionOk="0" h="109855" w="1920239">
+                  <a:moveTo>
+                    <a:pt x="1919973" y="0"/>
+                  </a:moveTo>
+                  <a:lnTo>
+                    <a:pt x="0" y="0"/>
+                  </a:lnTo>
+                  <a:lnTo>
+                    <a:pt x="0" y="109651"/>
+                  </a:lnTo>
+                  <a:lnTo>
+                    <a:pt x="1919973" y="109651"/>
+                  </a:lnTo>
+                  <a:lnTo>
+                    <a:pt x="1919973" y="0"/>
+                  </a:lnTo>
+                  <a:close/>
+                </a:path>
+              </a:pathLst>
+            </a:custGeom>
+            <a:solidFill>
+              <a:srgbClr val="094183"/>
+            </a:solidFill>
+            <a:ln>
+              <a:noFill/>
+            </a:ln>
+          </p:spPr>
+          <p:txBody>
+            <a:bodyPr anchorCtr="0" anchor="t" bIns="0" lIns="0" spcFirstLastPara="1" rIns="0" wrap="square" tIns="0">
+              <a:noAutofit/>
+            </a:bodyPr>
+            <a:lstStyle/>
+            <a:p>
+              <a:pPr indent="0" lvl="0" marL="0" rtl="0" algn="l">
+                <a:spcBef>
+                  <a:spcPts val="0"/>
+                </a:spcBef>
+                <a:spcAft>
+                  <a:spcPts val="0"/>
+                </a:spcAft>
+                <a:buNone/>
+              </a:pPr>
+              <a:r>
+                <a:t/>
+              </a:r>
+              <a:endParaRPr/>
+            </a:p>
+          </p:txBody>
+        </p:sp>
+        <p:sp>
+          <p:nvSpPr>
+            <p:cNvPr id="506" name="Google Shape;506;p22"/>
+            <p:cNvSpPr/>
+            <p:nvPr/>
+          </p:nvSpPr>
+          <p:spPr>
+            <a:xfrm>
+              <a:off x="1919973" y="3130346"/>
+              <a:ext cx="1920239" cy="109855"/>
+            </a:xfrm>
+            <a:custGeom>
+              <a:rect b="b" l="l" r="r" t="t"/>
+              <a:pathLst>
+                <a:path extrusionOk="0" h="109855" w="1920239">
+                  <a:moveTo>
+                    <a:pt x="1919973" y="0"/>
+                  </a:moveTo>
+                  <a:lnTo>
+                    <a:pt x="0" y="0"/>
+                  </a:lnTo>
+                  <a:lnTo>
+                    <a:pt x="0" y="109651"/>
+                  </a:lnTo>
+                  <a:lnTo>
+                    <a:pt x="1919973" y="109651"/>
+                  </a:lnTo>
+                  <a:lnTo>
+                    <a:pt x="1919973" y="0"/>
+                  </a:lnTo>
+                  <a:close/>
+                </a:path>
+              </a:pathLst>
+            </a:custGeom>
+            <a:solidFill>
+              <a:srgbClr val="EBEBEB"/>
+            </a:solidFill>
+            <a:ln>
+              <a:noFill/>
+            </a:ln>
+          </p:spPr>
+          <p:txBody>
+            <a:bodyPr anchorCtr="0" anchor="t" bIns="0" lIns="0" spcFirstLastPara="1" rIns="0" wrap="square" tIns="0">
+              <a:noAutofit/>
+            </a:bodyPr>
+            <a:lstStyle/>
+            <a:p>
+              <a:pPr indent="0" lvl="0" marL="0" rtl="0" algn="l">
+                <a:spcBef>
+                  <a:spcPts val="0"/>
+                </a:spcBef>
+                <a:spcAft>
+                  <a:spcPts val="0"/>
+                </a:spcAft>
+                <a:buNone/>
+              </a:pPr>
+              <a:r>
+                <a:t/>
+              </a:r>
+              <a:endParaRPr/>
+            </a:p>
+          </p:txBody>
+        </p:sp>
+        <p:sp>
+          <p:nvSpPr>
+            <p:cNvPr id="507" name="Google Shape;507;p22"/>
+            <p:cNvSpPr/>
+            <p:nvPr/>
+          </p:nvSpPr>
+          <p:spPr>
+            <a:xfrm>
+              <a:off x="3839946" y="3130346"/>
+              <a:ext cx="1920239" cy="109855"/>
+            </a:xfrm>
+            <a:custGeom>
+              <a:rect b="b" l="l" r="r" t="t"/>
+              <a:pathLst>
+                <a:path extrusionOk="0" h="109855" w="1920239">
+                  <a:moveTo>
+                    <a:pt x="1919973" y="0"/>
+                  </a:moveTo>
+                  <a:lnTo>
+                    <a:pt x="0" y="0"/>
+                  </a:lnTo>
+                  <a:lnTo>
+                    <a:pt x="0" y="109651"/>
+                  </a:lnTo>
+                  <a:lnTo>
+                    <a:pt x="1919973" y="109651"/>
+                  </a:lnTo>
+                  <a:lnTo>
+                    <a:pt x="1919973" y="0"/>
+                  </a:lnTo>
+                  <a:close/>
+                </a:path>
+              </a:pathLst>
+            </a:custGeom>
+            <a:solidFill>
+              <a:srgbClr val="D8D8D8"/>
+            </a:solidFill>
+            <a:ln>
+              <a:noFill/>
+            </a:ln>
+          </p:spPr>
+          <p:txBody>
+            <a:bodyPr anchorCtr="0" anchor="t" bIns="0" lIns="0" spcFirstLastPara="1" rIns="0" wrap="square" tIns="0">
+              <a:noAutofit/>
+            </a:bodyPr>
+            <a:lstStyle/>
+            <a:p>
+              <a:pPr indent="0" lvl="0" marL="0" rtl="0" algn="l">
+                <a:spcBef>
+                  <a:spcPts val="0"/>
+                </a:spcBef>
+                <a:spcAft>
+                  <a:spcPts val="0"/>
+                </a:spcAft>
+                <a:buNone/>
+              </a:pPr>
+              <a:r>
+                <a:t/>
+              </a:r>
+              <a:endParaRPr/>
+            </a:p>
+          </p:txBody>
+        </p:sp>
+      </p:grpSp>
+      <p:sp>
+        <p:nvSpPr>
+          <p:cNvPr id="508" name="Google Shape;508;p22"/>
+          <p:cNvSpPr txBox="1"/>
+          <p:nvPr/>
+        </p:nvSpPr>
+        <p:spPr>
+          <a:xfrm>
+            <a:off x="83477" y="3135783"/>
+            <a:ext cx="1752600" cy="92400"/>
+          </a:xfrm>
+          <a:prstGeom prst="rect">
+            <a:avLst/>
+          </a:prstGeom>
+          <a:noFill/>
+          <a:ln>
+            <a:noFill/>
+          </a:ln>
+        </p:spPr>
+        <p:txBody>
+          <a:bodyPr anchorCtr="0" anchor="t" bIns="0" lIns="0" spcFirstLastPara="1" rIns="0" wrap="square" tIns="0">
+            <a:spAutoFit/>
+          </a:bodyPr>
+          <a:lstStyle/>
+          <a:p>
+            <a:pPr indent="0" lvl="0" marL="12700" rtl="0" algn="l">
+              <a:lnSpc>
+                <a:spcPct val="112500"/>
+              </a:lnSpc>
+              <a:spcBef>
+                <a:spcPts val="0"/>
+              </a:spcBef>
+              <a:spcAft>
+                <a:spcPts val="0"/>
+              </a:spcAft>
+              <a:buNone/>
+            </a:pPr>
+            <a:r>
+              <a:rPr lang="en-US" sz="600">
+                <a:solidFill>
+                  <a:srgbClr val="F2F2F2"/>
+                </a:solidFill>
+                <a:latin typeface="Tahoma"/>
+                <a:ea typeface="Tahoma"/>
+                <a:cs typeface="Tahoma"/>
+                <a:sym typeface="Tahoma"/>
+              </a:rPr>
+              <a:t>Jhonatan Parada Torres, Dr. Merlinda Drini</a:t>
+            </a:r>
+            <a:endParaRPr sz="600">
+              <a:latin typeface="Tahoma"/>
+              <a:ea typeface="Tahoma"/>
+              <a:cs typeface="Tahoma"/>
+              <a:sym typeface="Tahoma"/>
+            </a:endParaRPr>
+          </a:p>
+        </p:txBody>
+      </p:sp>
+      <p:sp>
+        <p:nvSpPr>
+          <p:cNvPr id="509" name="Google Shape;509;p22"/>
+          <p:cNvSpPr txBox="1"/>
+          <p:nvPr>
+            <p:ph idx="11" type="ftr"/>
+          </p:nvPr>
+        </p:nvSpPr>
+        <p:spPr>
+          <a:xfrm>
+            <a:off x="2111768" y="3135783"/>
+            <a:ext cx="1536600" cy="92400"/>
+          </a:xfrm>
+          <a:prstGeom prst="rect">
+            <a:avLst/>
+          </a:prstGeom>
+          <a:noFill/>
+          <a:ln>
+            <a:noFill/>
+          </a:ln>
+        </p:spPr>
+        <p:txBody>
+          <a:bodyPr anchorCtr="0" anchor="t" bIns="0" lIns="0" spcFirstLastPara="1" rIns="0" wrap="square" tIns="0">
+            <a:spAutoFit/>
+          </a:bodyPr>
+          <a:lstStyle/>
+          <a:p>
+            <a:pPr indent="0" lvl="0" marL="12700" rtl="0" algn="l">
+              <a:lnSpc>
+                <a:spcPct val="112500"/>
+              </a:lnSpc>
+              <a:spcBef>
+                <a:spcPts val="0"/>
+              </a:spcBef>
+              <a:spcAft>
+                <a:spcPts val="0"/>
+              </a:spcAft>
+              <a:buNone/>
+            </a:pPr>
+            <a:r>
+              <a:rPr lang="en-US">
+                <a:solidFill>
+                  <a:srgbClr val="094183"/>
+                </a:solidFill>
+              </a:rPr>
+              <a:t>Network IDPS Using Open-Source Tools</a:t>
+            </a:r>
+            <a:endParaRPr>
+              <a:solidFill>
+                <a:srgbClr val="094183"/>
+              </a:solidFill>
+            </a:endParaRPr>
+          </a:p>
+        </p:txBody>
+      </p:sp>
+      <p:sp>
+        <p:nvSpPr>
+          <p:cNvPr id="510" name="Google Shape;510;p22"/>
+          <p:cNvSpPr txBox="1"/>
+          <p:nvPr>
+            <p:ph idx="10" type="dt"/>
+          </p:nvPr>
+        </p:nvSpPr>
+        <p:spPr>
+          <a:xfrm>
+            <a:off x="4472876" y="3135783"/>
+            <a:ext cx="426000" cy="92400"/>
+          </a:xfrm>
+          <a:prstGeom prst="rect">
+            <a:avLst/>
+          </a:prstGeom>
+          <a:noFill/>
+          <a:ln>
+            <a:noFill/>
+          </a:ln>
+        </p:spPr>
+        <p:txBody>
+          <a:bodyPr anchorCtr="0" anchor="t" bIns="0" lIns="0" spcFirstLastPara="1" rIns="0" wrap="square" tIns="0">
+            <a:spAutoFit/>
+          </a:bodyPr>
+          <a:lstStyle/>
+          <a:p>
+            <a:pPr indent="0" lvl="0" marL="12700" rtl="0" algn="l">
+              <a:lnSpc>
+                <a:spcPct val="112500"/>
+              </a:lnSpc>
+              <a:spcBef>
+                <a:spcPts val="0"/>
+              </a:spcBef>
+              <a:spcAft>
+                <a:spcPts val="0"/>
+              </a:spcAft>
+              <a:buNone/>
+            </a:pPr>
+            <a:r>
+              <a:rPr lang="en-US">
+                <a:solidFill>
+                  <a:srgbClr val="094183"/>
+                </a:solidFill>
+              </a:rPr>
+              <a:t>April 2026</a:t>
+            </a:r>
+            <a:endParaRPr>
+              <a:solidFill>
+                <a:srgbClr val="094183"/>
+              </a:solidFill>
+            </a:endParaRPr>
+          </a:p>
+        </p:txBody>
+      </p:sp>
+      <p:sp>
+        <p:nvSpPr>
+          <p:cNvPr id="511" name="Google Shape;511;p22"/>
+          <p:cNvSpPr txBox="1"/>
+          <p:nvPr>
+            <p:ph idx="12" type="sldNum"/>
+          </p:nvPr>
+        </p:nvSpPr>
+        <p:spPr>
+          <a:xfrm>
+            <a:off x="5451184" y="3135783"/>
+            <a:ext cx="254100" cy="92400"/>
+          </a:xfrm>
+          <a:prstGeom prst="rect">
+            <a:avLst/>
+          </a:prstGeom>
+          <a:noFill/>
+          <a:ln>
+            <a:noFill/>
+          </a:ln>
+        </p:spPr>
+        <p:txBody>
+          <a:bodyPr anchorCtr="0" anchor="t" bIns="0" lIns="0" spcFirstLastPara="1" rIns="0" wrap="square" tIns="0">
+            <a:spAutoFit/>
+          </a:bodyPr>
+          <a:lstStyle/>
+          <a:p>
+            <a:pPr indent="0" lvl="0" marL="12700" rtl="0" algn="l">
+              <a:lnSpc>
+                <a:spcPct val="112500"/>
+              </a:lnSpc>
+              <a:spcBef>
+                <a:spcPts val="0"/>
+              </a:spcBef>
+              <a:spcAft>
+                <a:spcPts val="0"/>
+              </a:spcAft>
+              <a:buNone/>
+            </a:pPr>
+            <a:fld id="{00000000-1234-1234-1234-123412341234}" type="slidenum">
+              <a:rPr lang="en-US">
+                <a:solidFill>
+                  <a:srgbClr val="094183"/>
+                </a:solidFill>
+              </a:rPr>
+              <a:t>‹#›</a:t>
+            </a:fld>
+            <a:r>
+              <a:rPr lang="en-US">
+                <a:solidFill>
+                  <a:srgbClr val="094183"/>
+                </a:solidFill>
+              </a:rPr>
+              <a:t> / 18</a:t>
+            </a:r>
+            <a:endParaRPr>
+              <a:solidFill>
+                <a:srgbClr val="094183"/>
+              </a:solidFill>
+            </a:endParaRPr>
+          </a:p>
+        </p:txBody>
+      </p:sp>
+      <p:grpSp>
+        <p:nvGrpSpPr>
+          <p:cNvPr id="512" name="Google Shape;512;p22"/>
+          <p:cNvGrpSpPr/>
+          <p:nvPr/>
+        </p:nvGrpSpPr>
+        <p:grpSpPr>
+          <a:xfrm>
+            <a:off x="0" y="3130346"/>
+            <a:ext cx="5760185" cy="109855"/>
+            <a:chOff x="0" y="3130346"/>
+            <a:chExt cx="5760185" cy="109855"/>
+          </a:xfrm>
+        </p:grpSpPr>
+        <p:sp>
+          <p:nvSpPr>
+            <p:cNvPr id="513" name="Google Shape;513;p22"/>
+            <p:cNvSpPr/>
+            <p:nvPr/>
+          </p:nvSpPr>
+          <p:spPr>
+            <a:xfrm>
+              <a:off x="0" y="3130346"/>
+              <a:ext cx="1920239" cy="109855"/>
+            </a:xfrm>
+            <a:custGeom>
+              <a:rect b="b" l="l" r="r" t="t"/>
+              <a:pathLst>
+                <a:path extrusionOk="0" h="109855" w="1920239">
+                  <a:moveTo>
+                    <a:pt x="1919973" y="0"/>
+                  </a:moveTo>
+                  <a:lnTo>
+                    <a:pt x="0" y="0"/>
+                  </a:lnTo>
+                  <a:lnTo>
+                    <a:pt x="0" y="109651"/>
+                  </a:lnTo>
+                  <a:lnTo>
+                    <a:pt x="1919973" y="109651"/>
+                  </a:lnTo>
+                  <a:lnTo>
+                    <a:pt x="1919973" y="0"/>
+                  </a:lnTo>
+                  <a:close/>
+                </a:path>
+              </a:pathLst>
+            </a:custGeom>
+            <a:solidFill>
+              <a:srgbClr val="094183"/>
+            </a:solidFill>
+            <a:ln>
+              <a:noFill/>
+            </a:ln>
+          </p:spPr>
+          <p:txBody>
+            <a:bodyPr anchorCtr="0" anchor="t" bIns="0" lIns="0" spcFirstLastPara="1" rIns="0" wrap="square" tIns="0">
+              <a:noAutofit/>
+            </a:bodyPr>
+            <a:lstStyle/>
+            <a:p>
+              <a:pPr indent="0" lvl="0" marL="0" rtl="0" algn="l">
+                <a:spcBef>
+                  <a:spcPts val="0"/>
+                </a:spcBef>
+                <a:spcAft>
+                  <a:spcPts val="0"/>
+                </a:spcAft>
+                <a:buNone/>
+              </a:pPr>
+              <a:r>
+                <a:t/>
+              </a:r>
+              <a:endParaRPr/>
+            </a:p>
+          </p:txBody>
+        </p:sp>
+        <p:sp>
+          <p:nvSpPr>
+            <p:cNvPr id="514" name="Google Shape;514;p22"/>
+            <p:cNvSpPr/>
+            <p:nvPr/>
+          </p:nvSpPr>
+          <p:spPr>
+            <a:xfrm>
+              <a:off x="1919973" y="3130346"/>
+              <a:ext cx="1920239" cy="109855"/>
+            </a:xfrm>
+            <a:custGeom>
+              <a:rect b="b" l="l" r="r" t="t"/>
+              <a:pathLst>
+                <a:path extrusionOk="0" h="109855" w="1920239">
+                  <a:moveTo>
+                    <a:pt x="1919973" y="0"/>
+                  </a:moveTo>
+                  <a:lnTo>
+                    <a:pt x="0" y="0"/>
+                  </a:lnTo>
+                  <a:lnTo>
+                    <a:pt x="0" y="109651"/>
+                  </a:lnTo>
+                  <a:lnTo>
+                    <a:pt x="1919973" y="109651"/>
+                  </a:lnTo>
+                  <a:lnTo>
+                    <a:pt x="1919973" y="0"/>
+                  </a:lnTo>
+                  <a:close/>
+                </a:path>
+              </a:pathLst>
+            </a:custGeom>
+            <a:solidFill>
+              <a:srgbClr val="EBEBEB"/>
+            </a:solidFill>
+            <a:ln>
+              <a:noFill/>
+            </a:ln>
+          </p:spPr>
+          <p:txBody>
+            <a:bodyPr anchorCtr="0" anchor="t" bIns="0" lIns="0" spcFirstLastPara="1" rIns="0" wrap="square" tIns="0">
+              <a:noAutofit/>
+            </a:bodyPr>
+            <a:lstStyle/>
+            <a:p>
+              <a:pPr indent="0" lvl="0" marL="0" rtl="0" algn="l">
+                <a:spcBef>
+                  <a:spcPts val="0"/>
+                </a:spcBef>
+                <a:spcAft>
+                  <a:spcPts val="0"/>
+                </a:spcAft>
+                <a:buNone/>
+              </a:pPr>
+              <a:r>
+                <a:t/>
+              </a:r>
+              <a:endParaRPr/>
+            </a:p>
+          </p:txBody>
+        </p:sp>
+        <p:sp>
+          <p:nvSpPr>
+            <p:cNvPr id="515" name="Google Shape;515;p22"/>
+            <p:cNvSpPr/>
+            <p:nvPr/>
+          </p:nvSpPr>
+          <p:spPr>
+            <a:xfrm>
+              <a:off x="3839946" y="3130346"/>
+              <a:ext cx="1920239" cy="109855"/>
+            </a:xfrm>
+            <a:custGeom>
+              <a:rect b="b" l="l" r="r" t="t"/>
+              <a:pathLst>
+                <a:path extrusionOk="0" h="109855" w="1920239">
+                  <a:moveTo>
+                    <a:pt x="1919973" y="0"/>
+                  </a:moveTo>
+                  <a:lnTo>
+                    <a:pt x="0" y="0"/>
+                  </a:lnTo>
+                  <a:lnTo>
+                    <a:pt x="0" y="109651"/>
+                  </a:lnTo>
+                  <a:lnTo>
+                    <a:pt x="1919973" y="109651"/>
+                  </a:lnTo>
+                  <a:lnTo>
+                    <a:pt x="1919973" y="0"/>
+                  </a:lnTo>
+                  <a:close/>
+                </a:path>
+              </a:pathLst>
+            </a:custGeom>
+            <a:solidFill>
+              <a:srgbClr val="D8D8D8"/>
+            </a:solidFill>
+            <a:ln>
+              <a:noFill/>
+            </a:ln>
+          </p:spPr>
+          <p:txBody>
+            <a:bodyPr anchorCtr="0" anchor="t" bIns="0" lIns="0" spcFirstLastPara="1" rIns="0" wrap="square" tIns="0">
+              <a:noAutofit/>
+            </a:bodyPr>
+            <a:lstStyle/>
+            <a:p>
+              <a:pPr indent="0" lvl="0" marL="0" rtl="0" algn="l">
+                <a:spcBef>
+                  <a:spcPts val="0"/>
+                </a:spcBef>
+                <a:spcAft>
+                  <a:spcPts val="0"/>
+                </a:spcAft>
+                <a:buNone/>
+              </a:pPr>
+              <a:r>
+                <a:t/>
+              </a:r>
+              <a:endParaRPr/>
+            </a:p>
+          </p:txBody>
+        </p:sp>
+      </p:grpSp>
+      <p:sp>
+        <p:nvSpPr>
+          <p:cNvPr id="516" name="Google Shape;516;p22"/>
+          <p:cNvSpPr txBox="1"/>
+          <p:nvPr/>
+        </p:nvSpPr>
+        <p:spPr>
+          <a:xfrm>
+            <a:off x="83477" y="3135783"/>
+            <a:ext cx="1752600" cy="92400"/>
+          </a:xfrm>
+          <a:prstGeom prst="rect">
+            <a:avLst/>
+          </a:prstGeom>
+          <a:noFill/>
+          <a:ln>
+            <a:noFill/>
+          </a:ln>
+        </p:spPr>
+        <p:txBody>
+          <a:bodyPr anchorCtr="0" anchor="t" bIns="0" lIns="0" spcFirstLastPara="1" rIns="0" wrap="square" tIns="0">
+            <a:spAutoFit/>
+          </a:bodyPr>
+          <a:lstStyle/>
+          <a:p>
+            <a:pPr indent="0" lvl="0" marL="12700" rtl="0" algn="l">
+              <a:lnSpc>
+                <a:spcPct val="112500"/>
+              </a:lnSpc>
+              <a:spcBef>
+                <a:spcPts val="0"/>
+              </a:spcBef>
+              <a:spcAft>
+                <a:spcPts val="0"/>
+              </a:spcAft>
+              <a:buNone/>
+            </a:pPr>
+            <a:r>
+              <a:rPr lang="en-US" sz="600">
+                <a:solidFill>
+                  <a:srgbClr val="F2F2F2"/>
+                </a:solidFill>
+                <a:latin typeface="Tahoma"/>
+                <a:ea typeface="Tahoma"/>
+                <a:cs typeface="Tahoma"/>
+                <a:sym typeface="Tahoma"/>
+              </a:rPr>
+              <a:t>Jhonatan Parada Torres, Dr. Guozhen An</a:t>
+            </a:r>
+            <a:endParaRPr sz="600">
+              <a:latin typeface="Tahoma"/>
+              <a:ea typeface="Tahoma"/>
+              <a:cs typeface="Tahoma"/>
+              <a:sym typeface="Tahoma"/>
+            </a:endParaRPr>
+          </a:p>
+        </p:txBody>
+      </p:sp>
+      <p:sp>
+        <p:nvSpPr>
+          <p:cNvPr id="517" name="Google Shape;517;p22"/>
+          <p:cNvSpPr txBox="1"/>
+          <p:nvPr>
+            <p:ph idx="11" type="ftr"/>
+          </p:nvPr>
+        </p:nvSpPr>
+        <p:spPr>
+          <a:xfrm>
+            <a:off x="2111768" y="3135783"/>
+            <a:ext cx="1536600" cy="92400"/>
+          </a:xfrm>
+          <a:prstGeom prst="rect">
+            <a:avLst/>
+          </a:prstGeom>
+          <a:noFill/>
+          <a:ln>
+            <a:noFill/>
+          </a:ln>
+        </p:spPr>
+        <p:txBody>
+          <a:bodyPr anchorCtr="0" anchor="t" bIns="0" lIns="0" spcFirstLastPara="1" rIns="0" wrap="square" tIns="0">
+            <a:spAutoFit/>
+          </a:bodyPr>
+          <a:lstStyle/>
+          <a:p>
+            <a:pPr indent="0" lvl="0" marL="0" rtl="0" algn="ctr">
+              <a:lnSpc>
+                <a:spcPct val="112500"/>
+              </a:lnSpc>
+              <a:spcBef>
+                <a:spcPts val="0"/>
+              </a:spcBef>
+              <a:spcAft>
+                <a:spcPts val="0"/>
+              </a:spcAft>
+              <a:buNone/>
+            </a:pPr>
+            <a:r>
+              <a:rPr lang="en-US">
+                <a:solidFill>
+                  <a:srgbClr val="094183"/>
+                </a:solidFill>
+              </a:rPr>
+              <a:t>System of MBTI personality Recognition</a:t>
+            </a:r>
+            <a:endParaRPr>
+              <a:solidFill>
+                <a:srgbClr val="094183"/>
+              </a:solidFill>
+            </a:endParaRPr>
+          </a:p>
+        </p:txBody>
+      </p:sp>
+      <p:sp>
+        <p:nvSpPr>
+          <p:cNvPr id="518" name="Google Shape;518;p22"/>
+          <p:cNvSpPr txBox="1"/>
+          <p:nvPr>
+            <p:ph idx="10" type="dt"/>
+          </p:nvPr>
+        </p:nvSpPr>
+        <p:spPr>
+          <a:xfrm>
+            <a:off x="4472876" y="3135783"/>
+            <a:ext cx="426000" cy="92400"/>
+          </a:xfrm>
+          <a:prstGeom prst="rect">
+            <a:avLst/>
+          </a:prstGeom>
+          <a:noFill/>
+          <a:ln>
+            <a:noFill/>
+          </a:ln>
+        </p:spPr>
+        <p:txBody>
+          <a:bodyPr anchorCtr="0" anchor="t" bIns="0" lIns="0" spcFirstLastPara="1" rIns="0" wrap="square" tIns="0">
+            <a:spAutoFit/>
+          </a:bodyPr>
+          <a:lstStyle/>
+          <a:p>
+            <a:pPr indent="0" lvl="0" marL="12700" rtl="0" algn="l">
+              <a:lnSpc>
+                <a:spcPct val="112500"/>
+              </a:lnSpc>
+              <a:spcBef>
+                <a:spcPts val="0"/>
+              </a:spcBef>
+              <a:spcAft>
+                <a:spcPts val="0"/>
+              </a:spcAft>
+              <a:buNone/>
+            </a:pPr>
+            <a:r>
+              <a:rPr lang="en-US">
+                <a:solidFill>
+                  <a:srgbClr val="094183"/>
+                </a:solidFill>
+              </a:rPr>
+              <a:t>April 2026</a:t>
+            </a:r>
+            <a:endParaRPr>
+              <a:solidFill>
+                <a:srgbClr val="094183"/>
+              </a:solidFill>
+            </a:endParaRPr>
+          </a:p>
+        </p:txBody>
+      </p:sp>
+      <p:sp>
+        <p:nvSpPr>
+          <p:cNvPr id="519" name="Google Shape;519;p22"/>
           <p:cNvSpPr txBox="1"/>
           <p:nvPr>
             <p:ph idx="12" type="sldNum"/>
@@ -16221,7 +19141,7 @@
                   <a:srgbClr val="094183"/>
                 </a:solidFill>
               </a:rPr>
-              <a:t>Motivation</a:t>
+              <a:t>Coverage</a:t>
             </a:r>
             <a:endParaRPr>
               <a:solidFill>
@@ -17637,7 +20557,7 @@
                   <a:srgbClr val="094183"/>
                 </a:solidFill>
               </a:rPr>
-              <a:t>Motivation</a:t>
+              <a:t>Data Coverage</a:t>
             </a:r>
             <a:endParaRPr>
               <a:solidFill>
@@ -18848,7 +21768,7 @@
         </p:blipFill>
         <p:spPr>
           <a:xfrm>
-            <a:off x="874637" y="38579"/>
+            <a:off x="864560" y="38579"/>
             <a:ext cx="4016526" cy="1057875"/>
           </a:xfrm>
           <a:prstGeom prst="rect">
@@ -19109,7 +22029,7 @@
                   <a:srgbClr val="094183"/>
                 </a:solidFill>
               </a:rPr>
-              <a:t>Motivation</a:t>
+              <a:t>Coverage</a:t>
             </a:r>
             <a:endParaRPr>
               <a:solidFill>
@@ -20497,7 +23417,7 @@
                   <a:srgbClr val="094183"/>
                 </a:solidFill>
               </a:rPr>
-              <a:t>Motivation</a:t>
+              <a:t>Methods</a:t>
             </a:r>
             <a:endParaRPr>
               <a:solidFill>
@@ -21681,7 +24601,7 @@
                   <a:srgbClr val="094183"/>
                 </a:solidFill>
               </a:rPr>
-              <a:t>Data Coverage</a:t>
+              <a:t>Methods</a:t>
             </a:r>
             <a:endParaRPr>
               <a:solidFill>
@@ -23069,7 +25989,7 @@
                   <a:srgbClr val="094183"/>
                 </a:solidFill>
               </a:rPr>
-              <a:t>Data Coverage</a:t>
+              <a:t>Methods</a:t>
             </a:r>
             <a:endParaRPr>
               <a:solidFill>
@@ -24457,7 +27377,7 @@
                   <a:srgbClr val="094183"/>
                 </a:solidFill>
               </a:rPr>
-              <a:t>Data Coverage</a:t>
+              <a:t>Methods</a:t>
             </a:r>
             <a:endParaRPr>
               <a:solidFill>
@@ -26049,7 +28969,7 @@
                   <a:srgbClr val="094183"/>
                 </a:solidFill>
               </a:rPr>
-              <a:t>Data Coverage</a:t>
+              <a:t>Results</a:t>
             </a:r>
             <a:endParaRPr>
               <a:solidFill>
@@ -27200,6 +30120,285 @@
 </file>
 
 <file path=ppt/theme/theme1.xml><?xml version="1.0" encoding="utf-8"?>
+<a:theme xmlns:a="http://schemas.openxmlformats.org/drawingml/2006/main" xmlns:r="http://schemas.openxmlformats.org/officeDocument/2006/relationships" name="Office Theme">
+  <a:themeElements>
+    <a:clrScheme name="Office">
+      <a:dk1>
+        <a:srgbClr val="000000"/>
+      </a:dk1>
+      <a:lt1>
+        <a:srgbClr val="FFFFFF"/>
+      </a:lt1>
+      <a:dk2>
+        <a:srgbClr val="1F497D"/>
+      </a:dk2>
+      <a:lt2>
+        <a:srgbClr val="EEECE1"/>
+      </a:lt2>
+      <a:accent1>
+        <a:srgbClr val="4F81BD"/>
+      </a:accent1>
+      <a:accent2>
+        <a:srgbClr val="C0504D"/>
+      </a:accent2>
+      <a:accent3>
+        <a:srgbClr val="9BBB59"/>
+      </a:accent3>
+      <a:accent4>
+        <a:srgbClr val="8064A2"/>
+      </a:accent4>
+      <a:accent5>
+        <a:srgbClr val="4BACC6"/>
+      </a:accent5>
+      <a:accent6>
+        <a:srgbClr val="F79646"/>
+      </a:accent6>
+      <a:hlink>
+        <a:srgbClr val="B40404"/>
+      </a:hlink>
+      <a:folHlink>
+        <a:srgbClr val="800080"/>
+      </a:folHlink>
+    </a:clrScheme>
+    <a:fontScheme name="Office">
+      <a:majorFont>
+        <a:latin typeface="Arial"/>
+        <a:ea typeface=""/>
+        <a:cs typeface=""/>
+        <a:font script="Jpan" typeface="ＭＳ Ｐゴシック"/>
+        <a:font script="Hang" typeface="맑은 고딕"/>
+        <a:font script="Hans" typeface="宋体"/>
+        <a:font script="Hant" typeface="新細明體"/>
+        <a:font script="Arab" typeface="Times New Roman"/>
+        <a:font script="Hebr" typeface="Times New Roman"/>
+        <a:font script="Thai" typeface="Angsana New"/>
+        <a:font script="Ethi" typeface="Nyala"/>
+        <a:font script="Beng" typeface="Vrinda"/>
+        <a:font script="Gujr" typeface="Shruti"/>
+        <a:font script="Khmr" typeface="MoolBoran"/>
+        <a:font script="Knda" typeface="Tunga"/>
+        <a:font script="Guru" typeface="Raavi"/>
+        <a:font script="Cans" typeface="Euphemia"/>
+        <a:font script="Cher" typeface="Plantagenet Cherokee"/>
+        <a:font script="Yiii" typeface="Microsoft Yi Baiti"/>
+        <a:font script="Tibt" typeface="Microsoft Himalaya"/>
+        <a:font script="Thaa" typeface="MV Boli"/>
+        <a:font script="Deva" typeface="Mangal"/>
+        <a:font script="Telu" typeface="Gautami"/>
+        <a:font script="Taml" typeface="Latha"/>
+        <a:font script="Syrc" typeface="Estrangelo Edessa"/>
+        <a:font script="Orya" typeface="Kalinga"/>
+        <a:font script="Mlym" typeface="Kartika"/>
+        <a:font script="Laoo" typeface="DokChampa"/>
+        <a:font script="Sinh" typeface="Iskoola Pota"/>
+        <a:font script="Mong" typeface="Mongolian Baiti"/>
+        <a:font script="Viet" typeface="Times New Roman"/>
+        <a:font script="Uigh" typeface="Microsoft Uighur"/>
+        <a:font script="Geor" typeface="Sylfaen"/>
+      </a:majorFont>
+      <a:minorFont>
+        <a:latin typeface="Arial"/>
+        <a:ea typeface=""/>
+        <a:cs typeface=""/>
+        <a:font script="Jpan" typeface="ＭＳ Ｐゴシック"/>
+        <a:font script="Hang" typeface="맑은 고딕"/>
+        <a:font script="Hans" typeface="宋体"/>
+        <a:font script="Hant" typeface="新細明體"/>
+        <a:font script="Arab" typeface="Arial"/>
+        <a:font script="Hebr" typeface="Arial"/>
+        <a:font script="Thai" typeface="Cordia New"/>
+        <a:font script="Ethi" typeface="Nyala"/>
+        <a:font script="Beng" typeface="Vrinda"/>
+        <a:font script="Gujr" typeface="Shruti"/>
+        <a:font script="Khmr" typeface="DaunPenh"/>
+        <a:font script="Knda" typeface="Tunga"/>
+        <a:font script="Guru" typeface="Raavi"/>
+        <a:font script="Cans" typeface="Euphemia"/>
+        <a:font script="Cher" typeface="Plantagenet Cherokee"/>
+        <a:font script="Yiii" typeface="Microsoft Yi Baiti"/>
+        <a:font script="Tibt" typeface="Microsoft Himalaya"/>
+        <a:font script="Thaa" typeface="MV Boli"/>
+        <a:font script="Deva" typeface="Mangal"/>
+        <a:font script="Telu" typeface="Gautami"/>
+        <a:font script="Taml" typeface="Latha"/>
+        <a:font script="Syrc" typeface="Estrangelo Edessa"/>
+        <a:font script="Orya" typeface="Kalinga"/>
+        <a:font script="Mlym" typeface="Kartika"/>
+        <a:font script="Laoo" typeface="DokChampa"/>
+        <a:font script="Sinh" typeface="Iskoola Pota"/>
+        <a:font script="Mong" typeface="Mongolian Baiti"/>
+        <a:font script="Viet" typeface="Arial"/>
+        <a:font script="Uigh" typeface="Microsoft Uighur"/>
+        <a:font script="Geor" typeface="Sylfaen"/>
+      </a:minorFont>
+    </a:fontScheme>
+    <a:fmtScheme name="Office">
+      <a:fillStyleLst>
+        <a:solidFill>
+          <a:schemeClr val="phClr"/>
+        </a:solidFill>
+        <a:gradFill rotWithShape="1">
+          <a:gsLst>
+            <a:gs pos="0">
+              <a:schemeClr val="phClr">
+                <a:tint val="50000"/>
+                <a:satMod val="300000"/>
+              </a:schemeClr>
+            </a:gs>
+            <a:gs pos="35000">
+              <a:schemeClr val="phClr">
+                <a:tint val="37000"/>
+                <a:satMod val="300000"/>
+              </a:schemeClr>
+            </a:gs>
+            <a:gs pos="100000">
+              <a:schemeClr val="phClr">
+                <a:tint val="15000"/>
+                <a:satMod val="350000"/>
+              </a:schemeClr>
+            </a:gs>
+          </a:gsLst>
+          <a:lin ang="16200000" scaled="1"/>
+        </a:gradFill>
+        <a:gradFill rotWithShape="1">
+          <a:gsLst>
+            <a:gs pos="0">
+              <a:schemeClr val="phClr">
+                <a:tint val="100000"/>
+                <a:shade val="100000"/>
+                <a:satMod val="130000"/>
+              </a:schemeClr>
+            </a:gs>
+            <a:gs pos="100000">
+              <a:schemeClr val="phClr">
+                <a:tint val="50000"/>
+                <a:shade val="100000"/>
+                <a:satMod val="350000"/>
+              </a:schemeClr>
+            </a:gs>
+          </a:gsLst>
+          <a:lin ang="16200000" scaled="0"/>
+        </a:gradFill>
+      </a:fillStyleLst>
+      <a:lnStyleLst>
+        <a:ln w="9525" cap="flat" cmpd="sng" algn="ctr">
+          <a:solidFill>
+            <a:schemeClr val="phClr">
+              <a:shade val="95000"/>
+              <a:satMod val="105000"/>
+            </a:schemeClr>
+          </a:solidFill>
+          <a:prstDash val="solid"/>
+        </a:ln>
+        <a:ln w="25400" cap="flat" cmpd="sng" algn="ctr">
+          <a:solidFill>
+            <a:schemeClr val="phClr"/>
+          </a:solidFill>
+          <a:prstDash val="solid"/>
+        </a:ln>
+        <a:ln w="38100" cap="flat" cmpd="sng" algn="ctr">
+          <a:solidFill>
+            <a:schemeClr val="phClr"/>
+          </a:solidFill>
+          <a:prstDash val="solid"/>
+        </a:ln>
+      </a:lnStyleLst>
+      <a:effectStyleLst>
+        <a:effectStyle>
+          <a:effectLst>
+            <a:outerShdw blurRad="40000" dist="20000" dir="5400000" rotWithShape="0">
+              <a:srgbClr val="000000">
+                <a:alpha val="38000"/>
+              </a:srgbClr>
+            </a:outerShdw>
+          </a:effectLst>
+        </a:effectStyle>
+        <a:effectStyle>
+          <a:effectLst>
+            <a:outerShdw blurRad="40000" dist="23000" dir="5400000" rotWithShape="0">
+              <a:srgbClr val="000000">
+                <a:alpha val="35000"/>
+              </a:srgbClr>
+            </a:outerShdw>
+          </a:effectLst>
+        </a:effectStyle>
+        <a:effectStyle>
+          <a:effectLst>
+            <a:outerShdw blurRad="40000" dist="23000" dir="5400000" rotWithShape="0">
+              <a:srgbClr val="000000">
+                <a:alpha val="35000"/>
+              </a:srgbClr>
+            </a:outerShdw>
+          </a:effectLst>
+          <a:scene3d>
+            <a:camera prst="orthographicFront">
+              <a:rot lat="0" lon="0" rev="0"/>
+            </a:camera>
+            <a:lightRig rig="threePt" dir="t">
+              <a:rot lat="0" lon="0" rev="1200000"/>
+            </a:lightRig>
+          </a:scene3d>
+          <a:sp3d>
+            <a:bevelT w="63500" h="25400"/>
+          </a:sp3d>
+        </a:effectStyle>
+      </a:effectStyleLst>
+      <a:bgFillStyleLst>
+        <a:solidFill>
+          <a:schemeClr val="phClr"/>
+        </a:solidFill>
+        <a:gradFill rotWithShape="1">
+          <a:gsLst>
+            <a:gs pos="0">
+              <a:schemeClr val="phClr">
+                <a:tint val="40000"/>
+                <a:satMod val="350000"/>
+              </a:schemeClr>
+            </a:gs>
+            <a:gs pos="40000">
+              <a:schemeClr val="phClr">
+                <a:tint val="45000"/>
+                <a:shade val="99000"/>
+                <a:satMod val="350000"/>
+              </a:schemeClr>
+            </a:gs>
+            <a:gs pos="100000">
+              <a:schemeClr val="phClr">
+                <a:shade val="20000"/>
+                <a:satMod val="255000"/>
+              </a:schemeClr>
+            </a:gs>
+          </a:gsLst>
+          <a:path path="circle">
+            <a:fillToRect l="50000" t="-80000" r="50000" b="180000"/>
+          </a:path>
+        </a:gradFill>
+        <a:gradFill rotWithShape="1">
+          <a:gsLst>
+            <a:gs pos="0">
+              <a:schemeClr val="phClr">
+                <a:tint val="80000"/>
+                <a:satMod val="300000"/>
+              </a:schemeClr>
+            </a:gs>
+            <a:gs pos="100000">
+              <a:schemeClr val="phClr">
+                <a:shade val="30000"/>
+                <a:satMod val="200000"/>
+              </a:schemeClr>
+            </a:gs>
+          </a:gsLst>
+          <a:path path="circle">
+            <a:fillToRect l="50000" t="50000" r="50000" b="50000"/>
+          </a:path>
+        </a:gradFill>
+      </a:bgFillStyleLst>
+    </a:fmtScheme>
+  </a:themeElements>
+</a:theme>
+</file>
+
+<file path=ppt/theme/theme2.xml><?xml version="1.0" encoding="utf-8"?>
 <a:theme xmlns:a="http://schemas.openxmlformats.org/drawingml/2006/main" xmlns:r="http://schemas.openxmlformats.org/officeDocument/2006/relationships">
   <a:themeElements>
     <a:clrScheme name="Default">
@@ -27476,283 +30675,4 @@
     </a:fmtScheme>
   </a:themeElements>
 </a:theme>
-</file>
-
-<file path=ppt/theme/theme2.xml><?xml version="1.0" encoding="utf-8"?>
-<a:theme xmlns:a="http://schemas.openxmlformats.org/drawingml/2006/main" xmlns:r="http://schemas.openxmlformats.org/officeDocument/2006/relationships" name="Office Theme">
-  <a:themeElements>
-    <a:clrScheme name="Office">
-      <a:dk1>
-        <a:srgbClr val="000000"/>
-      </a:dk1>
-      <a:lt1>
-        <a:srgbClr val="FFFFFF"/>
-      </a:lt1>
-      <a:dk2>
-        <a:srgbClr val="1F497D"/>
-      </a:dk2>
-      <a:lt2>
-        <a:srgbClr val="EEECE1"/>
-      </a:lt2>
-      <a:accent1>
-        <a:srgbClr val="4F81BD"/>
-      </a:accent1>
-      <a:accent2>
-        <a:srgbClr val="C0504D"/>
-      </a:accent2>
-      <a:accent3>
-        <a:srgbClr val="9BBB59"/>
-      </a:accent3>
-      <a:accent4>
-        <a:srgbClr val="8064A2"/>
-      </a:accent4>
-      <a:accent5>
-        <a:srgbClr val="4BACC6"/>
-      </a:accent5>
-      <a:accent6>
-        <a:srgbClr val="F79646"/>
-      </a:accent6>
-      <a:hlink>
-        <a:srgbClr val="B40404"/>
-      </a:hlink>
-      <a:folHlink>
-        <a:srgbClr val="800080"/>
-      </a:folHlink>
-    </a:clrScheme>
-    <a:fontScheme name="Office">
-      <a:majorFont>
-        <a:latin typeface="Arial"/>
-        <a:ea typeface=""/>
-        <a:cs typeface=""/>
-        <a:font script="Jpan" typeface="ＭＳ Ｐゴシック"/>
-        <a:font script="Hang" typeface="맑은 고딕"/>
-        <a:font script="Hans" typeface="宋体"/>
-        <a:font script="Hant" typeface="新細明體"/>
-        <a:font script="Arab" typeface="Times New Roman"/>
-        <a:font script="Hebr" typeface="Times New Roman"/>
-        <a:font script="Thai" typeface="Angsana New"/>
-        <a:font script="Ethi" typeface="Nyala"/>
-        <a:font script="Beng" typeface="Vrinda"/>
-        <a:font script="Gujr" typeface="Shruti"/>
-        <a:font script="Khmr" typeface="MoolBoran"/>
-        <a:font script="Knda" typeface="Tunga"/>
-        <a:font script="Guru" typeface="Raavi"/>
-        <a:font script="Cans" typeface="Euphemia"/>
-        <a:font script="Cher" typeface="Plantagenet Cherokee"/>
-        <a:font script="Yiii" typeface="Microsoft Yi Baiti"/>
-        <a:font script="Tibt" typeface="Microsoft Himalaya"/>
-        <a:font script="Thaa" typeface="MV Boli"/>
-        <a:font script="Deva" typeface="Mangal"/>
-        <a:font script="Telu" typeface="Gautami"/>
-        <a:font script="Taml" typeface="Latha"/>
-        <a:font script="Syrc" typeface="Estrangelo Edessa"/>
-        <a:font script="Orya" typeface="Kalinga"/>
-        <a:font script="Mlym" typeface="Kartika"/>
-        <a:font script="Laoo" typeface="DokChampa"/>
-        <a:font script="Sinh" typeface="Iskoola Pota"/>
-        <a:font script="Mong" typeface="Mongolian Baiti"/>
-        <a:font script="Viet" typeface="Times New Roman"/>
-        <a:font script="Uigh" typeface="Microsoft Uighur"/>
-        <a:font script="Geor" typeface="Sylfaen"/>
-      </a:majorFont>
-      <a:minorFont>
-        <a:latin typeface="Arial"/>
-        <a:ea typeface=""/>
-        <a:cs typeface=""/>
-        <a:font script="Jpan" typeface="ＭＳ Ｐゴシック"/>
-        <a:font script="Hang" typeface="맑은 고딕"/>
-        <a:font script="Hans" typeface="宋体"/>
-        <a:font script="Hant" typeface="新細明體"/>
-        <a:font script="Arab" typeface="Arial"/>
-        <a:font script="Hebr" typeface="Arial"/>
-        <a:font script="Thai" typeface="Cordia New"/>
-        <a:font script="Ethi" typeface="Nyala"/>
-        <a:font script="Beng" typeface="Vrinda"/>
-        <a:font script="Gujr" typeface="Shruti"/>
-        <a:font script="Khmr" typeface="DaunPenh"/>
-        <a:font script="Knda" typeface="Tunga"/>
-        <a:font script="Guru" typeface="Raavi"/>
-        <a:font script="Cans" typeface="Euphemia"/>
-        <a:font script="Cher" typeface="Plantagenet Cherokee"/>
-        <a:font script="Yiii" typeface="Microsoft Yi Baiti"/>
-        <a:font script="Tibt" typeface="Microsoft Himalaya"/>
-        <a:font script="Thaa" typeface="MV Boli"/>
-        <a:font script="Deva" typeface="Mangal"/>
-        <a:font script="Telu" typeface="Gautami"/>
-        <a:font script="Taml" typeface="Latha"/>
-        <a:font script="Syrc" typeface="Estrangelo Edessa"/>
-        <a:font script="Orya" typeface="Kalinga"/>
-        <a:font script="Mlym" typeface="Kartika"/>
-        <a:font script="Laoo" typeface="DokChampa"/>
-        <a:font script="Sinh" typeface="Iskoola Pota"/>
-        <a:font script="Mong" typeface="Mongolian Baiti"/>
-        <a:font script="Viet" typeface="Arial"/>
-        <a:font script="Uigh" typeface="Microsoft Uighur"/>
-        <a:font script="Geor" typeface="Sylfaen"/>
-      </a:minorFont>
-    </a:fontScheme>
-    <a:fmtScheme name="Office">
-      <a:fillStyleLst>
-        <a:solidFill>
-          <a:schemeClr val="phClr"/>
-        </a:solidFill>
-        <a:gradFill rotWithShape="1">
-          <a:gsLst>
-            <a:gs pos="0">
-              <a:schemeClr val="phClr">
-                <a:tint val="50000"/>
-                <a:satMod val="300000"/>
-              </a:schemeClr>
-            </a:gs>
-            <a:gs pos="35000">
-              <a:schemeClr val="phClr">
-                <a:tint val="37000"/>
-                <a:satMod val="300000"/>
-              </a:schemeClr>
-            </a:gs>
-            <a:gs pos="100000">
-              <a:schemeClr val="phClr">
-                <a:tint val="15000"/>
-                <a:satMod val="350000"/>
-              </a:schemeClr>
-            </a:gs>
-          </a:gsLst>
-          <a:lin ang="16200000" scaled="1"/>
-        </a:gradFill>
-        <a:gradFill rotWithShape="1">
-          <a:gsLst>
-            <a:gs pos="0">
-              <a:schemeClr val="phClr">
-                <a:tint val="100000"/>
-                <a:shade val="100000"/>
-                <a:satMod val="130000"/>
-              </a:schemeClr>
-            </a:gs>
-            <a:gs pos="100000">
-              <a:schemeClr val="phClr">
-                <a:tint val="50000"/>
-                <a:shade val="100000"/>
-                <a:satMod val="350000"/>
-              </a:schemeClr>
-            </a:gs>
-          </a:gsLst>
-          <a:lin ang="16200000" scaled="0"/>
-        </a:gradFill>
-      </a:fillStyleLst>
-      <a:lnStyleLst>
-        <a:ln w="9525" cap="flat" cmpd="sng" algn="ctr">
-          <a:solidFill>
-            <a:schemeClr val="phClr">
-              <a:shade val="95000"/>
-              <a:satMod val="105000"/>
-            </a:schemeClr>
-          </a:solidFill>
-          <a:prstDash val="solid"/>
-        </a:ln>
-        <a:ln w="25400" cap="flat" cmpd="sng" algn="ctr">
-          <a:solidFill>
-            <a:schemeClr val="phClr"/>
-          </a:solidFill>
-          <a:prstDash val="solid"/>
-        </a:ln>
-        <a:ln w="38100" cap="flat" cmpd="sng" algn="ctr">
-          <a:solidFill>
-            <a:schemeClr val="phClr"/>
-          </a:solidFill>
-          <a:prstDash val="solid"/>
-        </a:ln>
-      </a:lnStyleLst>
-      <a:effectStyleLst>
-        <a:effectStyle>
-          <a:effectLst>
-            <a:outerShdw blurRad="40000" dist="20000" dir="5400000" rotWithShape="0">
-              <a:srgbClr val="000000">
-                <a:alpha val="38000"/>
-              </a:srgbClr>
-            </a:outerShdw>
-          </a:effectLst>
-        </a:effectStyle>
-        <a:effectStyle>
-          <a:effectLst>
-            <a:outerShdw blurRad="40000" dist="23000" dir="5400000" rotWithShape="0">
-              <a:srgbClr val="000000">
-                <a:alpha val="35000"/>
-              </a:srgbClr>
-            </a:outerShdw>
-          </a:effectLst>
-        </a:effectStyle>
-        <a:effectStyle>
-          <a:effectLst>
-            <a:outerShdw blurRad="40000" dist="23000" dir="5400000" rotWithShape="0">
-              <a:srgbClr val="000000">
-                <a:alpha val="35000"/>
-              </a:srgbClr>
-            </a:outerShdw>
-          </a:effectLst>
-          <a:scene3d>
-            <a:camera prst="orthographicFront">
-              <a:rot lat="0" lon="0" rev="0"/>
-            </a:camera>
-            <a:lightRig rig="threePt" dir="t">
-              <a:rot lat="0" lon="0" rev="1200000"/>
-            </a:lightRig>
-          </a:scene3d>
-          <a:sp3d>
-            <a:bevelT w="63500" h="25400"/>
-          </a:sp3d>
-        </a:effectStyle>
-      </a:effectStyleLst>
-      <a:bgFillStyleLst>
-        <a:solidFill>
-          <a:schemeClr val="phClr"/>
-        </a:solidFill>
-        <a:gradFill rotWithShape="1">
-          <a:gsLst>
-            <a:gs pos="0">
-              <a:schemeClr val="phClr">
-                <a:tint val="40000"/>
-                <a:satMod val="350000"/>
-              </a:schemeClr>
-            </a:gs>
-            <a:gs pos="40000">
-              <a:schemeClr val="phClr">
-                <a:tint val="45000"/>
-                <a:shade val="99000"/>
-                <a:satMod val="350000"/>
-              </a:schemeClr>
-            </a:gs>
-            <a:gs pos="100000">
-              <a:schemeClr val="phClr">
-                <a:shade val="20000"/>
-                <a:satMod val="255000"/>
-              </a:schemeClr>
-            </a:gs>
-          </a:gsLst>
-          <a:path path="circle">
-            <a:fillToRect l="50000" t="-80000" r="50000" b="180000"/>
-          </a:path>
-        </a:gradFill>
-        <a:gradFill rotWithShape="1">
-          <a:gsLst>
-            <a:gs pos="0">
-              <a:schemeClr val="phClr">
-                <a:tint val="80000"/>
-                <a:satMod val="300000"/>
-              </a:schemeClr>
-            </a:gs>
-            <a:gs pos="100000">
-              <a:schemeClr val="phClr">
-                <a:shade val="30000"/>
-                <a:satMod val="200000"/>
-              </a:schemeClr>
-            </a:gs>
-          </a:gsLst>
-          <a:path path="circle">
-            <a:fillToRect l="50000" t="50000" r="50000" b="50000"/>
-          </a:path>
-        </a:gradFill>
-      </a:bgFillStyleLst>
-    </a:fmtScheme>
-  </a:themeElements>
-</a:theme>
 </file>
--- a/compliance/research_presentation.pptx
+++ b/compliance/research_presentation.pptx
@@ -12159,7 +12159,7 @@
                   <a:srgbClr val="094183"/>
                 </a:solidFill>
               </a:rPr>
-              <a:t>Coverage</a:t>
+              <a:t>Results</a:t>
             </a:r>
             <a:endParaRPr>
               <a:solidFill>
@@ -14966,7 +14966,7 @@
                   <a:srgbClr val="094183"/>
                 </a:solidFill>
               </a:rPr>
-              <a:t>Summary</a:t>
+              <a:t>Results</a:t>
             </a:r>
             <a:endParaRPr>
               <a:solidFill>
@@ -16354,7 +16354,7 @@
                   <a:srgbClr val="094183"/>
                 </a:solidFill>
               </a:rPr>
-              <a:t>Summary</a:t>
+              <a:t>Results</a:t>
             </a:r>
             <a:endParaRPr>
               <a:solidFill>
